--- a/MVM_Waterfall_Protected_Base_Growth_Movement_FIXED.pptx
+++ b/MVM_Waterfall_Protected_Base_Growth_Movement_FIXED.pptx
@@ -5,9 +5,11 @@
     <p:sldMasterId id="2147483648" r:id="rId1"/>
   </p:sldMasterIdLst>
   <p:sldIdLst>
-    <p:sldId id="256" r:id="rId7"/>
+    <p:sldId id="256" r:id="rId2"/>
+    <p:sldId id="257" r:id="rId3"/>
+    <p:sldId id="258" r:id="rId4"/>
   </p:sldIdLst>
-  <p:sldSz cx="14630400" cy="8229600" type="screen4x3"/>
+  <p:sldSz cx="14630400" cy="8229600"/>
   <p:notesSz cx="6858000" cy="9144000"/>
   <p:defaultTextStyle>
     <a:defPPr>
@@ -104,6 +106,22 @@
       </a:defRPr>
     </a:lvl9pPr>
   </p:defaultTextStyle>
+  <p:extLst>
+    <p:ext uri="{EFAFB233-063F-42B5-8137-9DF3F51BA10A}">
+      <p15:sldGuideLst xmlns:p15="http://schemas.microsoft.com/office/powerpoint/2012/main">
+        <p15:guide id="1" orient="horz" pos="2160">
+          <p15:clr>
+            <a:srgbClr val="A4A3A4"/>
+          </p15:clr>
+        </p15:guide>
+        <p15:guide id="2" pos="2880">
+          <p15:clr>
+            <a:srgbClr val="A4A3A4"/>
+          </p15:clr>
+        </p15:guide>
+      </p15:sldGuideLst>
+    </p:ext>
+  </p:extLst>
 </p:presentation>
 </file>
 
@@ -145,10 +163,9 @@
           <a:lstStyle/>
           <a:p>
             <a:r>
-              <a:rPr lang="en-US" smtClean="0"/>
+              <a:rPr lang="en-US"/>
               <a:t>Click to edit Master title style</a:t>
             </a:r>
-            <a:endParaRPr lang="en-US"/>
           </a:p>
         </p:txBody>
       </p:sp>
@@ -264,10 +281,9 @@
           </a:lstStyle>
           <a:p>
             <a:r>
-              <a:rPr lang="en-US" smtClean="0"/>
+              <a:rPr lang="en-US"/>
               <a:t>Click to edit Master subtitle style</a:t>
             </a:r>
-            <a:endParaRPr lang="en-US"/>
           </a:p>
         </p:txBody>
       </p:sp>
@@ -288,7 +304,7 @@
           <a:p>
             <a:fld id="{5BCAD085-E8A6-8845-BD4E-CB4CCA059FC4}" type="datetimeFigureOut">
               <a:rPr lang="en-US" smtClean="0"/>
-              <a:t>1/27/13</a:t>
+              <a:t>8/6/2026</a:t>
             </a:fld>
             <a:endParaRPr lang="en-US"/>
           </a:p>
@@ -382,10 +398,9 @@
           <a:lstStyle/>
           <a:p>
             <a:r>
-              <a:rPr lang="en-US" smtClean="0"/>
+              <a:rPr lang="en-US"/>
               <a:t>Click to edit Master title style</a:t>
             </a:r>
-            <a:endParaRPr lang="en-US"/>
           </a:p>
         </p:txBody>
       </p:sp>
@@ -406,38 +421,37 @@
           <a:p>
             <a:pPr lvl="0"/>
             <a:r>
-              <a:rPr lang="en-US" smtClean="0"/>
+              <a:rPr lang="en-US"/>
               <a:t>Click to edit Master text styles</a:t>
             </a:r>
           </a:p>
           <a:p>
             <a:pPr lvl="1"/>
             <a:r>
-              <a:rPr lang="en-US" smtClean="0"/>
+              <a:rPr lang="en-US"/>
               <a:t>Second level</a:t>
             </a:r>
           </a:p>
           <a:p>
             <a:pPr lvl="2"/>
             <a:r>
-              <a:rPr lang="en-US" smtClean="0"/>
+              <a:rPr lang="en-US"/>
               <a:t>Third level</a:t>
             </a:r>
           </a:p>
           <a:p>
             <a:pPr lvl="3"/>
             <a:r>
-              <a:rPr lang="en-US" smtClean="0"/>
+              <a:rPr lang="en-US"/>
               <a:t>Fourth level</a:t>
             </a:r>
           </a:p>
           <a:p>
             <a:pPr lvl="4"/>
             <a:r>
-              <a:rPr lang="en-US" smtClean="0"/>
+              <a:rPr lang="en-US"/>
               <a:t>Fifth level</a:t>
             </a:r>
-            <a:endParaRPr lang="en-US"/>
           </a:p>
         </p:txBody>
       </p:sp>
@@ -458,7 +472,7 @@
           <a:p>
             <a:fld id="{5BCAD085-E8A6-8845-BD4E-CB4CCA059FC4}" type="datetimeFigureOut">
               <a:rPr lang="en-US" smtClean="0"/>
-              <a:t>1/27/13</a:t>
+              <a:t>8/6/2026</a:t>
             </a:fld>
             <a:endParaRPr lang="en-US"/>
           </a:p>
@@ -557,10 +571,9 @@
           <a:lstStyle/>
           <a:p>
             <a:r>
-              <a:rPr lang="en-US" smtClean="0"/>
+              <a:rPr lang="en-US"/>
               <a:t>Click to edit Master title style</a:t>
             </a:r>
-            <a:endParaRPr lang="en-US"/>
           </a:p>
         </p:txBody>
       </p:sp>
@@ -586,38 +599,37 @@
           <a:p>
             <a:pPr lvl="0"/>
             <a:r>
-              <a:rPr lang="en-US" smtClean="0"/>
+              <a:rPr lang="en-US"/>
               <a:t>Click to edit Master text styles</a:t>
             </a:r>
           </a:p>
           <a:p>
             <a:pPr lvl="1"/>
             <a:r>
-              <a:rPr lang="en-US" smtClean="0"/>
+              <a:rPr lang="en-US"/>
               <a:t>Second level</a:t>
             </a:r>
           </a:p>
           <a:p>
             <a:pPr lvl="2"/>
             <a:r>
-              <a:rPr lang="en-US" smtClean="0"/>
+              <a:rPr lang="en-US"/>
               <a:t>Third level</a:t>
             </a:r>
           </a:p>
           <a:p>
             <a:pPr lvl="3"/>
             <a:r>
-              <a:rPr lang="en-US" smtClean="0"/>
+              <a:rPr lang="en-US"/>
               <a:t>Fourth level</a:t>
             </a:r>
           </a:p>
           <a:p>
             <a:pPr lvl="4"/>
             <a:r>
-              <a:rPr lang="en-US" smtClean="0"/>
+              <a:rPr lang="en-US"/>
               <a:t>Fifth level</a:t>
             </a:r>
-            <a:endParaRPr lang="en-US"/>
           </a:p>
         </p:txBody>
       </p:sp>
@@ -638,7 +650,7 @@
           <a:p>
             <a:fld id="{5BCAD085-E8A6-8845-BD4E-CB4CCA059FC4}" type="datetimeFigureOut">
               <a:rPr lang="en-US" smtClean="0"/>
-              <a:t>1/27/13</a:t>
+              <a:t>8/6/2026</a:t>
             </a:fld>
             <a:endParaRPr lang="en-US"/>
           </a:p>
@@ -732,10 +744,9 @@
           <a:lstStyle/>
           <a:p>
             <a:r>
-              <a:rPr lang="en-US" smtClean="0"/>
+              <a:rPr lang="en-US"/>
               <a:t>Click to edit Master title style</a:t>
             </a:r>
-            <a:endParaRPr lang="en-US"/>
           </a:p>
         </p:txBody>
       </p:sp>
@@ -756,38 +767,37 @@
           <a:p>
             <a:pPr lvl="0"/>
             <a:r>
-              <a:rPr lang="en-US" smtClean="0"/>
+              <a:rPr lang="en-US"/>
               <a:t>Click to edit Master text styles</a:t>
             </a:r>
           </a:p>
           <a:p>
             <a:pPr lvl="1"/>
             <a:r>
-              <a:rPr lang="en-US" smtClean="0"/>
+              <a:rPr lang="en-US"/>
               <a:t>Second level</a:t>
             </a:r>
           </a:p>
           <a:p>
             <a:pPr lvl="2"/>
             <a:r>
-              <a:rPr lang="en-US" smtClean="0"/>
+              <a:rPr lang="en-US"/>
               <a:t>Third level</a:t>
             </a:r>
           </a:p>
           <a:p>
             <a:pPr lvl="3"/>
             <a:r>
-              <a:rPr lang="en-US" smtClean="0"/>
+              <a:rPr lang="en-US"/>
               <a:t>Fourth level</a:t>
             </a:r>
           </a:p>
           <a:p>
             <a:pPr lvl="4"/>
             <a:r>
-              <a:rPr lang="en-US" smtClean="0"/>
+              <a:rPr lang="en-US"/>
               <a:t>Fifth level</a:t>
             </a:r>
-            <a:endParaRPr lang="en-US"/>
           </a:p>
         </p:txBody>
       </p:sp>
@@ -808,7 +818,7 @@
           <a:p>
             <a:fld id="{5BCAD085-E8A6-8845-BD4E-CB4CCA059FC4}" type="datetimeFigureOut">
               <a:rPr lang="en-US" smtClean="0"/>
-              <a:t>1/27/13</a:t>
+              <a:t>8/6/2026</a:t>
             </a:fld>
             <a:endParaRPr lang="en-US"/>
           </a:p>
@@ -911,10 +921,9 @@
           </a:lstStyle>
           <a:p>
             <a:r>
-              <a:rPr lang="en-US" smtClean="0"/>
+              <a:rPr lang="en-US"/>
               <a:t>Click to edit Master title style</a:t>
             </a:r>
-            <a:endParaRPr lang="en-US"/>
           </a:p>
         </p:txBody>
       </p:sp>
@@ -1031,7 +1040,7 @@
           <a:p>
             <a:pPr lvl="0"/>
             <a:r>
-              <a:rPr lang="en-US" smtClean="0"/>
+              <a:rPr lang="en-US"/>
               <a:t>Click to edit Master text styles</a:t>
             </a:r>
           </a:p>
@@ -1054,7 +1063,7 @@
           <a:p>
             <a:fld id="{5BCAD085-E8A6-8845-BD4E-CB4CCA059FC4}" type="datetimeFigureOut">
               <a:rPr lang="en-US" smtClean="0"/>
-              <a:t>1/27/13</a:t>
+              <a:t>8/6/2026</a:t>
             </a:fld>
             <a:endParaRPr lang="en-US"/>
           </a:p>
@@ -1148,10 +1157,9 @@
           <a:lstStyle/>
           <a:p>
             <a:r>
-              <a:rPr lang="en-US" smtClean="0"/>
+              <a:rPr lang="en-US"/>
               <a:t>Click to edit Master title style</a:t>
             </a:r>
-            <a:endParaRPr lang="en-US"/>
           </a:p>
         </p:txBody>
       </p:sp>
@@ -1205,38 +1213,37 @@
           <a:p>
             <a:pPr lvl="0"/>
             <a:r>
-              <a:rPr lang="en-US" smtClean="0"/>
+              <a:rPr lang="en-US"/>
               <a:t>Click to edit Master text styles</a:t>
             </a:r>
           </a:p>
           <a:p>
             <a:pPr lvl="1"/>
             <a:r>
-              <a:rPr lang="en-US" smtClean="0"/>
+              <a:rPr lang="en-US"/>
               <a:t>Second level</a:t>
             </a:r>
           </a:p>
           <a:p>
             <a:pPr lvl="2"/>
             <a:r>
-              <a:rPr lang="en-US" smtClean="0"/>
+              <a:rPr lang="en-US"/>
               <a:t>Third level</a:t>
             </a:r>
           </a:p>
           <a:p>
             <a:pPr lvl="3"/>
             <a:r>
-              <a:rPr lang="en-US" smtClean="0"/>
+              <a:rPr lang="en-US"/>
               <a:t>Fourth level</a:t>
             </a:r>
           </a:p>
           <a:p>
             <a:pPr lvl="4"/>
             <a:r>
-              <a:rPr lang="en-US" smtClean="0"/>
+              <a:rPr lang="en-US"/>
               <a:t>Fifth level</a:t>
             </a:r>
-            <a:endParaRPr lang="en-US"/>
           </a:p>
         </p:txBody>
       </p:sp>
@@ -1290,38 +1297,37 @@
           <a:p>
             <a:pPr lvl="0"/>
             <a:r>
-              <a:rPr lang="en-US" smtClean="0"/>
+              <a:rPr lang="en-US"/>
               <a:t>Click to edit Master text styles</a:t>
             </a:r>
           </a:p>
           <a:p>
             <a:pPr lvl="1"/>
             <a:r>
-              <a:rPr lang="en-US" smtClean="0"/>
+              <a:rPr lang="en-US"/>
               <a:t>Second level</a:t>
             </a:r>
           </a:p>
           <a:p>
             <a:pPr lvl="2"/>
             <a:r>
-              <a:rPr lang="en-US" smtClean="0"/>
+              <a:rPr lang="en-US"/>
               <a:t>Third level</a:t>
             </a:r>
           </a:p>
           <a:p>
             <a:pPr lvl="3"/>
             <a:r>
-              <a:rPr lang="en-US" smtClean="0"/>
+              <a:rPr lang="en-US"/>
               <a:t>Fourth level</a:t>
             </a:r>
           </a:p>
           <a:p>
             <a:pPr lvl="4"/>
             <a:r>
-              <a:rPr lang="en-US" smtClean="0"/>
+              <a:rPr lang="en-US"/>
               <a:t>Fifth level</a:t>
             </a:r>
-            <a:endParaRPr lang="en-US"/>
           </a:p>
         </p:txBody>
       </p:sp>
@@ -1342,7 +1348,7 @@
           <a:p>
             <a:fld id="{5BCAD085-E8A6-8845-BD4E-CB4CCA059FC4}" type="datetimeFigureOut">
               <a:rPr lang="en-US" smtClean="0"/>
-              <a:t>1/27/13</a:t>
+              <a:t>8/6/2026</a:t>
             </a:fld>
             <a:endParaRPr lang="en-US"/>
           </a:p>
@@ -1440,10 +1446,9 @@
           </a:lstStyle>
           <a:p>
             <a:r>
-              <a:rPr lang="en-US" smtClean="0"/>
+              <a:rPr lang="en-US"/>
               <a:t>Click to edit Master title style</a:t>
             </a:r>
-            <a:endParaRPr lang="en-US"/>
           </a:p>
         </p:txBody>
       </p:sp>
@@ -1506,7 +1511,7 @@
           <a:p>
             <a:pPr lvl="0"/>
             <a:r>
-              <a:rPr lang="en-US" smtClean="0"/>
+              <a:rPr lang="en-US"/>
               <a:t>Click to edit Master text styles</a:t>
             </a:r>
           </a:p>
@@ -1562,38 +1567,37 @@
           <a:p>
             <a:pPr lvl="0"/>
             <a:r>
-              <a:rPr lang="en-US" smtClean="0"/>
+              <a:rPr lang="en-US"/>
               <a:t>Click to edit Master text styles</a:t>
             </a:r>
           </a:p>
           <a:p>
             <a:pPr lvl="1"/>
             <a:r>
-              <a:rPr lang="en-US" smtClean="0"/>
+              <a:rPr lang="en-US"/>
               <a:t>Second level</a:t>
             </a:r>
           </a:p>
           <a:p>
             <a:pPr lvl="2"/>
             <a:r>
-              <a:rPr lang="en-US" smtClean="0"/>
+              <a:rPr lang="en-US"/>
               <a:t>Third level</a:t>
             </a:r>
           </a:p>
           <a:p>
             <a:pPr lvl="3"/>
             <a:r>
-              <a:rPr lang="en-US" smtClean="0"/>
+              <a:rPr lang="en-US"/>
               <a:t>Fourth level</a:t>
             </a:r>
           </a:p>
           <a:p>
             <a:pPr lvl="4"/>
             <a:r>
-              <a:rPr lang="en-US" smtClean="0"/>
+              <a:rPr lang="en-US"/>
               <a:t>Fifth level</a:t>
             </a:r>
-            <a:endParaRPr lang="en-US"/>
           </a:p>
         </p:txBody>
       </p:sp>
@@ -1656,7 +1660,7 @@
           <a:p>
             <a:pPr lvl="0"/>
             <a:r>
-              <a:rPr lang="en-US" smtClean="0"/>
+              <a:rPr lang="en-US"/>
               <a:t>Click to edit Master text styles</a:t>
             </a:r>
           </a:p>
@@ -1712,38 +1716,37 @@
           <a:p>
             <a:pPr lvl="0"/>
             <a:r>
-              <a:rPr lang="en-US" smtClean="0"/>
+              <a:rPr lang="en-US"/>
               <a:t>Click to edit Master text styles</a:t>
             </a:r>
           </a:p>
           <a:p>
             <a:pPr lvl="1"/>
             <a:r>
-              <a:rPr lang="en-US" smtClean="0"/>
+              <a:rPr lang="en-US"/>
               <a:t>Second level</a:t>
             </a:r>
           </a:p>
           <a:p>
             <a:pPr lvl="2"/>
             <a:r>
-              <a:rPr lang="en-US" smtClean="0"/>
+              <a:rPr lang="en-US"/>
               <a:t>Third level</a:t>
             </a:r>
           </a:p>
           <a:p>
             <a:pPr lvl="3"/>
             <a:r>
-              <a:rPr lang="en-US" smtClean="0"/>
+              <a:rPr lang="en-US"/>
               <a:t>Fourth level</a:t>
             </a:r>
           </a:p>
           <a:p>
             <a:pPr lvl="4"/>
             <a:r>
-              <a:rPr lang="en-US" smtClean="0"/>
+              <a:rPr lang="en-US"/>
               <a:t>Fifth level</a:t>
             </a:r>
-            <a:endParaRPr lang="en-US"/>
           </a:p>
         </p:txBody>
       </p:sp>
@@ -1764,7 +1767,7 @@
           <a:p>
             <a:fld id="{5BCAD085-E8A6-8845-BD4E-CB4CCA059FC4}" type="datetimeFigureOut">
               <a:rPr lang="en-US" smtClean="0"/>
-              <a:t>1/27/13</a:t>
+              <a:t>8/6/2026</a:t>
             </a:fld>
             <a:endParaRPr lang="en-US"/>
           </a:p>
@@ -1858,10 +1861,9 @@
           <a:lstStyle/>
           <a:p>
             <a:r>
-              <a:rPr lang="en-US" smtClean="0"/>
+              <a:rPr lang="en-US"/>
               <a:t>Click to edit Master title style</a:t>
             </a:r>
-            <a:endParaRPr lang="en-US"/>
           </a:p>
         </p:txBody>
       </p:sp>
@@ -1882,7 +1884,7 @@
           <a:p>
             <a:fld id="{5BCAD085-E8A6-8845-BD4E-CB4CCA059FC4}" type="datetimeFigureOut">
               <a:rPr lang="en-US" smtClean="0"/>
-              <a:t>1/27/13</a:t>
+              <a:t>8/6/2026</a:t>
             </a:fld>
             <a:endParaRPr lang="en-US"/>
           </a:p>
@@ -1977,7 +1979,7 @@
           <a:p>
             <a:fld id="{5BCAD085-E8A6-8845-BD4E-CB4CCA059FC4}" type="datetimeFigureOut">
               <a:rPr lang="en-US" smtClean="0"/>
-              <a:t>1/27/13</a:t>
+              <a:t>8/6/2026</a:t>
             </a:fld>
             <a:endParaRPr lang="en-US"/>
           </a:p>
@@ -2080,10 +2082,9 @@
           </a:lstStyle>
           <a:p>
             <a:r>
-              <a:rPr lang="en-US" smtClean="0"/>
+              <a:rPr lang="en-US"/>
               <a:t>Click to edit Master title style</a:t>
             </a:r>
-            <a:endParaRPr lang="en-US"/>
           </a:p>
         </p:txBody>
       </p:sp>
@@ -2137,38 +2138,37 @@
           <a:p>
             <a:pPr lvl="0"/>
             <a:r>
-              <a:rPr lang="en-US" smtClean="0"/>
+              <a:rPr lang="en-US"/>
               <a:t>Click to edit Master text styles</a:t>
             </a:r>
           </a:p>
           <a:p>
             <a:pPr lvl="1"/>
             <a:r>
-              <a:rPr lang="en-US" smtClean="0"/>
+              <a:rPr lang="en-US"/>
               <a:t>Second level</a:t>
             </a:r>
           </a:p>
           <a:p>
             <a:pPr lvl="2"/>
             <a:r>
-              <a:rPr lang="en-US" smtClean="0"/>
+              <a:rPr lang="en-US"/>
               <a:t>Third level</a:t>
             </a:r>
           </a:p>
           <a:p>
             <a:pPr lvl="3"/>
             <a:r>
-              <a:rPr lang="en-US" smtClean="0"/>
+              <a:rPr lang="en-US"/>
               <a:t>Fourth level</a:t>
             </a:r>
           </a:p>
           <a:p>
             <a:pPr lvl="4"/>
             <a:r>
-              <a:rPr lang="en-US" smtClean="0"/>
+              <a:rPr lang="en-US"/>
               <a:t>Fifth level</a:t>
             </a:r>
-            <a:endParaRPr lang="en-US"/>
           </a:p>
         </p:txBody>
       </p:sp>
@@ -2231,7 +2231,7 @@
           <a:p>
             <a:pPr lvl="0"/>
             <a:r>
-              <a:rPr lang="en-US" smtClean="0"/>
+              <a:rPr lang="en-US"/>
               <a:t>Click to edit Master text styles</a:t>
             </a:r>
           </a:p>
@@ -2254,7 +2254,7 @@
           <a:p>
             <a:fld id="{5BCAD085-E8A6-8845-BD4E-CB4CCA059FC4}" type="datetimeFigureOut">
               <a:rPr lang="en-US" smtClean="0"/>
-              <a:t>1/27/13</a:t>
+              <a:t>8/6/2026</a:t>
             </a:fld>
             <a:endParaRPr lang="en-US"/>
           </a:p>
@@ -2357,10 +2357,9 @@
           </a:lstStyle>
           <a:p>
             <a:r>
-              <a:rPr lang="en-US" smtClean="0"/>
+              <a:rPr lang="en-US"/>
               <a:t>Click to edit Master title style</a:t>
             </a:r>
-            <a:endParaRPr lang="en-US"/>
           </a:p>
         </p:txBody>
       </p:sp>
@@ -2484,7 +2483,7 @@
           <a:p>
             <a:pPr lvl="0"/>
             <a:r>
-              <a:rPr lang="en-US" smtClean="0"/>
+              <a:rPr lang="en-US"/>
               <a:t>Click to edit Master text styles</a:t>
             </a:r>
           </a:p>
@@ -2507,7 +2506,7 @@
           <a:p>
             <a:fld id="{5BCAD085-E8A6-8845-BD4E-CB4CCA059FC4}" type="datetimeFigureOut">
               <a:rPr lang="en-US" smtClean="0"/>
-              <a:t>1/27/13</a:t>
+              <a:t>8/6/2026</a:t>
             </a:fld>
             <a:endParaRPr lang="en-US"/>
           </a:p>
@@ -2616,10 +2615,9 @@
           <a:lstStyle/>
           <a:p>
             <a:r>
-              <a:rPr lang="en-US" smtClean="0"/>
+              <a:rPr lang="en-US"/>
               <a:t>Click to edit Master title style</a:t>
             </a:r>
-            <a:endParaRPr lang="en-US"/>
           </a:p>
         </p:txBody>
       </p:sp>
@@ -2650,38 +2648,37 @@
           <a:p>
             <a:pPr lvl="0"/>
             <a:r>
-              <a:rPr lang="en-US" smtClean="0"/>
+              <a:rPr lang="en-US"/>
               <a:t>Click to edit Master text styles</a:t>
             </a:r>
           </a:p>
           <a:p>
             <a:pPr lvl="1"/>
             <a:r>
-              <a:rPr lang="en-US" smtClean="0"/>
+              <a:rPr lang="en-US"/>
               <a:t>Second level</a:t>
             </a:r>
           </a:p>
           <a:p>
             <a:pPr lvl="2"/>
             <a:r>
-              <a:rPr lang="en-US" smtClean="0"/>
+              <a:rPr lang="en-US"/>
               <a:t>Third level</a:t>
             </a:r>
           </a:p>
           <a:p>
             <a:pPr lvl="3"/>
             <a:r>
-              <a:rPr lang="en-US" smtClean="0"/>
+              <a:rPr lang="en-US"/>
               <a:t>Fourth level</a:t>
             </a:r>
           </a:p>
           <a:p>
             <a:pPr lvl="4"/>
             <a:r>
-              <a:rPr lang="en-US" smtClean="0"/>
+              <a:rPr lang="en-US"/>
               <a:t>Fifth level</a:t>
             </a:r>
-            <a:endParaRPr lang="en-US"/>
           </a:p>
         </p:txBody>
       </p:sp>
@@ -2720,7 +2717,7 @@
           <a:p>
             <a:fld id="{5BCAD085-E8A6-8845-BD4E-CB4CCA059FC4}" type="datetimeFigureOut">
               <a:rPr lang="en-US" smtClean="0"/>
-              <a:t>1/27/13</a:t>
+              <a:t>8/6/2026</a:t>
             </a:fld>
             <a:endParaRPr lang="en-US"/>
           </a:p>
@@ -3079,7 +3076,7 @@
 </file>
 
 <file path=ppt/slides/slide1.xml><?xml version="1.0" encoding="utf-8"?>
-<p:sld xmlns:a="http://schemas.openxmlformats.org/drawingml/2006/main" xmlns:p="http://schemas.openxmlformats.org/presentationml/2006/main" xmlns:r="http://schemas.openxmlformats.org/officeDocument/2006/relationships">
+<p:sld xmlns:a="http://schemas.openxmlformats.org/drawingml/2006/main" xmlns:r="http://schemas.openxmlformats.org/officeDocument/2006/relationships" xmlns:p="http://schemas.openxmlformats.org/presentationml/2006/main">
   <p:cSld>
     <p:spTree>
       <p:nvGrpSpPr>
@@ -3087,7 +3084,14 @@
         <p:cNvGrpSpPr/>
         <p:nvPr/>
       </p:nvGrpSpPr>
-      <p:grpSpPr/>
+      <p:grpSpPr>
+        <a:xfrm>
+          <a:off x="0" y="0"/>
+          <a:ext cx="0" cy="0"/>
+          <a:chOff x="0" y="0"/>
+          <a:chExt cx="0" cy="0"/>
+        </a:xfrm>
+      </p:grpSpPr>
       <p:sp>
         <p:nvSpPr>
           <p:cNvPr id="2" name="TextBox 1"/>
@@ -3108,8 +3112,8 @@
           </a:ln>
         </p:spPr>
         <p:txBody>
-          <a:bodyPr wrap="none" lIns="27432" rIns="27432" tIns="18288" bIns="18288" anchor="ctr">
-            <a:normAutofit/>
+          <a:bodyPr wrap="none" lIns="27432" tIns="18288" rIns="27432" bIns="18288" anchor="ctr">
+            <a:normAutofit lnSpcReduction="10000"/>
           </a:bodyPr>
           <a:lstStyle/>
           <a:p>
@@ -3146,7 +3150,7 @@
           </a:ln>
         </p:spPr>
         <p:txBody>
-          <a:bodyPr wrap="none" lIns="27432" rIns="27432" tIns="18288" bIns="18288" anchor="ctr">
+          <a:bodyPr wrap="none" lIns="27432" tIns="18288" rIns="27432" bIns="18288" anchor="ctr">
             <a:normAutofit/>
           </a:bodyPr>
           <a:lstStyle/>
@@ -3204,6 +3208,7 @@
           <a:lstStyle/>
           <a:p>
             <a:pPr algn="ctr"/>
+            <a:endParaRPr/>
           </a:p>
         </p:txBody>
       </p:sp>
@@ -3227,7 +3232,7 @@
           </a:ln>
         </p:spPr>
         <p:txBody>
-          <a:bodyPr wrap="none" lIns="27432" rIns="27432" tIns="18288" bIns="18288" anchor="ctr">
+          <a:bodyPr wrap="none" lIns="27432" tIns="18288" rIns="27432" bIns="18288" anchor="ctr">
             <a:normAutofit/>
           </a:bodyPr>
           <a:lstStyle/>
@@ -3285,6 +3290,7 @@
           <a:lstStyle/>
           <a:p>
             <a:pPr algn="ctr"/>
+            <a:endParaRPr/>
           </a:p>
         </p:txBody>
       </p:sp>
@@ -3308,7 +3314,7 @@
           </a:ln>
         </p:spPr>
         <p:txBody>
-          <a:bodyPr wrap="none" lIns="27432" rIns="27432" tIns="18288" bIns="18288" anchor="ctr">
+          <a:bodyPr wrap="none" lIns="27432" tIns="18288" rIns="27432" bIns="18288" anchor="ctr">
             <a:normAutofit/>
           </a:bodyPr>
           <a:lstStyle/>
@@ -3366,6 +3372,7 @@
           <a:lstStyle/>
           <a:p>
             <a:pPr algn="ctr"/>
+            <a:endParaRPr/>
           </a:p>
         </p:txBody>
       </p:sp>
@@ -3389,7 +3396,7 @@
           </a:ln>
         </p:spPr>
         <p:txBody>
-          <a:bodyPr wrap="none" lIns="27432" rIns="27432" tIns="18288" bIns="18288" anchor="ctr">
+          <a:bodyPr wrap="none" lIns="27432" tIns="18288" rIns="27432" bIns="18288" anchor="ctr">
             <a:normAutofit/>
           </a:bodyPr>
           <a:lstStyle/>
@@ -3447,6 +3454,7 @@
           <a:lstStyle/>
           <a:p>
             <a:pPr algn="ctr"/>
+            <a:endParaRPr/>
           </a:p>
         </p:txBody>
       </p:sp>
@@ -3470,7 +3478,7 @@
           </a:ln>
         </p:spPr>
         <p:txBody>
-          <a:bodyPr wrap="none" lIns="27432" rIns="27432" tIns="18288" bIns="18288" anchor="ctr">
+          <a:bodyPr wrap="none" lIns="27432" tIns="18288" rIns="27432" bIns="18288" anchor="ctr">
             <a:normAutofit/>
           </a:bodyPr>
           <a:lstStyle/>
@@ -3528,6 +3536,7 @@
           <a:lstStyle/>
           <a:p>
             <a:pPr algn="ctr"/>
+            <a:endParaRPr/>
           </a:p>
         </p:txBody>
       </p:sp>
@@ -3551,7 +3560,7 @@
           </a:ln>
         </p:spPr>
         <p:txBody>
-          <a:bodyPr wrap="none" lIns="27432" rIns="27432" tIns="18288" bIns="18288" anchor="ctr">
+          <a:bodyPr wrap="none" lIns="27432" tIns="18288" rIns="27432" bIns="18288" anchor="ctr">
             <a:normAutofit/>
           </a:bodyPr>
           <a:lstStyle/>
@@ -3609,6 +3618,7 @@
           <a:lstStyle/>
           <a:p>
             <a:pPr algn="ctr"/>
+            <a:endParaRPr/>
           </a:p>
         </p:txBody>
       </p:sp>
@@ -3632,7 +3642,7 @@
           </a:ln>
         </p:spPr>
         <p:txBody>
-          <a:bodyPr wrap="none" lIns="27432" rIns="27432" tIns="18288" bIns="18288" anchor="ctr">
+          <a:bodyPr wrap="none" lIns="27432" tIns="18288" rIns="27432" bIns="18288" anchor="ctr">
             <a:normAutofit/>
           </a:bodyPr>
           <a:lstStyle/>
@@ -3670,8 +3680,8 @@
           </a:ln>
         </p:spPr>
         <p:txBody>
-          <a:bodyPr wrap="none" lIns="27432" rIns="27432" tIns="18288" bIns="18288" anchor="ctr">
-            <a:normAutofit/>
+          <a:bodyPr wrap="none" lIns="27432" tIns="18288" rIns="27432" bIns="18288" anchor="ctr">
+            <a:normAutofit fontScale="92500" lnSpcReduction="10000"/>
           </a:bodyPr>
           <a:lstStyle/>
           <a:p>
@@ -3753,7 +3763,7 @@
           </a:ln>
         </p:spPr>
         <p:txBody>
-          <a:bodyPr wrap="none" lIns="27432" rIns="27432" tIns="18288" bIns="18288" anchor="ctr">
+          <a:bodyPr wrap="none" lIns="27432" tIns="18288" rIns="27432" bIns="18288" anchor="ctr">
             <a:normAutofit/>
           </a:bodyPr>
           <a:lstStyle/>
@@ -3826,8 +3836,8 @@
           </a:ln>
         </p:spPr>
         <p:txBody>
-          <a:bodyPr wrap="none" lIns="27432" rIns="27432" tIns="18288" bIns="18288" anchor="ctr">
-            <a:normAutofit/>
+          <a:bodyPr wrap="none" lIns="27432" tIns="18288" rIns="27432" bIns="18288" anchor="ctr">
+            <a:normAutofit fontScale="92500" lnSpcReduction="10000"/>
           </a:bodyPr>
           <a:lstStyle/>
           <a:p>
@@ -3909,7 +3919,7 @@
           </a:ln>
         </p:spPr>
         <p:txBody>
-          <a:bodyPr wrap="none" lIns="27432" rIns="27432" tIns="18288" bIns="18288" anchor="ctr">
+          <a:bodyPr wrap="none" lIns="27432" tIns="18288" rIns="27432" bIns="18288" anchor="ctr">
             <a:normAutofit/>
           </a:bodyPr>
           <a:lstStyle/>
@@ -3982,8 +3992,8 @@
           </a:ln>
         </p:spPr>
         <p:txBody>
-          <a:bodyPr wrap="none" lIns="27432" rIns="27432" tIns="18288" bIns="18288" anchor="ctr">
-            <a:normAutofit/>
+          <a:bodyPr wrap="none" lIns="27432" tIns="18288" rIns="27432" bIns="18288" anchor="ctr">
+            <a:normAutofit fontScale="92500" lnSpcReduction="10000"/>
           </a:bodyPr>
           <a:lstStyle/>
           <a:p>
@@ -4065,8 +4075,8 @@
           </a:ln>
         </p:spPr>
         <p:txBody>
-          <a:bodyPr wrap="none" lIns="27432" rIns="27432" tIns="18288" bIns="18288" anchor="ctr">
-            <a:normAutofit/>
+          <a:bodyPr wrap="none" lIns="27432" tIns="18288" rIns="27432" bIns="18288" anchor="ctr">
+            <a:normAutofit fontScale="92500" lnSpcReduction="10000"/>
           </a:bodyPr>
           <a:lstStyle/>
           <a:p>
@@ -4148,7 +4158,7 @@
           </a:ln>
         </p:spPr>
         <p:txBody>
-          <a:bodyPr wrap="none" lIns="27432" rIns="27432" tIns="18288" bIns="18288" anchor="ctr">
+          <a:bodyPr wrap="none" lIns="27432" tIns="18288" rIns="27432" bIns="18288" anchor="ctr">
             <a:normAutofit/>
           </a:bodyPr>
           <a:lstStyle/>
@@ -4544,7 +4554,7 @@
           </a:ln>
         </p:spPr>
         <p:txBody>
-          <a:bodyPr wrap="none" lIns="27432" rIns="27432" tIns="18288" bIns="18288" anchor="ctr">
+          <a:bodyPr wrap="none" lIns="27432" tIns="18288" rIns="27432" bIns="18288" anchor="ctr">
             <a:normAutofit/>
           </a:bodyPr>
           <a:lstStyle/>
@@ -4612,6 +4622,7 @@
           <a:lstStyle/>
           <a:p>
             <a:pPr algn="ctr"/>
+            <a:endParaRPr/>
           </a:p>
         </p:txBody>
       </p:sp>
@@ -4635,7 +4646,7 @@
           </a:ln>
         </p:spPr>
         <p:txBody>
-          <a:bodyPr wrap="none" lIns="27432" rIns="27432" tIns="18288" bIns="18288" anchor="ctr">
+          <a:bodyPr wrap="none" lIns="27432" tIns="18288" rIns="27432" bIns="18288" anchor="ctr">
             <a:normAutofit/>
           </a:bodyPr>
           <a:lstStyle/>
@@ -4673,7 +4684,7 @@
           </a:ln>
         </p:spPr>
         <p:txBody>
-          <a:bodyPr wrap="none" lIns="27432" rIns="27432" tIns="18288" bIns="18288" anchor="ctr">
+          <a:bodyPr wrap="none" lIns="27432" tIns="18288" rIns="27432" bIns="18288" anchor="ctr">
             <a:normAutofit/>
           </a:bodyPr>
           <a:lstStyle/>
@@ -4757,7 +4768,7 @@
           </a:ln>
         </p:spPr>
         <p:txBody>
-          <a:bodyPr wrap="none" lIns="27432" rIns="27432" tIns="18288" bIns="18288" anchor="ctr">
+          <a:bodyPr wrap="none" lIns="27432" tIns="18288" rIns="27432" bIns="18288" anchor="ctr">
             <a:normAutofit/>
           </a:bodyPr>
           <a:lstStyle/>
@@ -4815,6 +4826,7 @@
           <a:lstStyle/>
           <a:p>
             <a:pPr algn="ctr"/>
+            <a:endParaRPr/>
           </a:p>
         </p:txBody>
       </p:sp>
@@ -4838,7 +4850,7 @@
           </a:ln>
         </p:spPr>
         <p:txBody>
-          <a:bodyPr wrap="none" lIns="27432" rIns="27432" tIns="18288" bIns="18288" anchor="ctr">
+          <a:bodyPr wrap="none" lIns="27432" tIns="18288" rIns="27432" bIns="18288" anchor="ctr">
             <a:normAutofit/>
           </a:bodyPr>
           <a:lstStyle/>
@@ -4876,7 +4888,7 @@
           </a:ln>
         </p:spPr>
         <p:txBody>
-          <a:bodyPr wrap="none" lIns="27432" rIns="27432" tIns="18288" bIns="18288" anchor="ctr">
+          <a:bodyPr wrap="none" lIns="27432" tIns="18288" rIns="27432" bIns="18288" anchor="ctr">
             <a:normAutofit/>
           </a:bodyPr>
           <a:lstStyle/>
@@ -4924,7 +4936,7 @@
           </a:ln>
         </p:spPr>
         <p:txBody>
-          <a:bodyPr wrap="none" lIns="27432" rIns="27432" tIns="18288" bIns="18288" anchor="ctr">
+          <a:bodyPr wrap="none" lIns="27432" tIns="18288" rIns="27432" bIns="18288" anchor="ctr">
             <a:normAutofit/>
           </a:bodyPr>
           <a:lstStyle/>
@@ -5028,6 +5040,7 @@
           <a:lstStyle/>
           <a:p>
             <a:pPr algn="ctr"/>
+            <a:endParaRPr/>
           </a:p>
         </p:txBody>
       </p:sp>
@@ -5051,7 +5064,7 @@
           </a:ln>
         </p:spPr>
         <p:txBody>
-          <a:bodyPr wrap="none" lIns="27432" rIns="27432" tIns="18288" bIns="18288" anchor="ctr">
+          <a:bodyPr wrap="none" lIns="27432" tIns="18288" rIns="27432" bIns="18288" anchor="ctr">
             <a:normAutofit/>
           </a:bodyPr>
           <a:lstStyle/>
@@ -5089,7 +5102,7 @@
           </a:ln>
         </p:spPr>
         <p:txBody>
-          <a:bodyPr wrap="none" lIns="27432" rIns="27432" tIns="18288" bIns="18288" anchor="ctr">
+          <a:bodyPr wrap="none" lIns="27432" tIns="18288" rIns="27432" bIns="18288" anchor="ctr">
             <a:normAutofit/>
           </a:bodyPr>
           <a:lstStyle/>
@@ -5193,6 +5206,7 @@
           <a:lstStyle/>
           <a:p>
             <a:pPr algn="ctr"/>
+            <a:endParaRPr/>
           </a:p>
         </p:txBody>
       </p:sp>
@@ -5216,7 +5230,7 @@
           </a:ln>
         </p:spPr>
         <p:txBody>
-          <a:bodyPr wrap="none" lIns="27432" rIns="27432" tIns="18288" bIns="18288" anchor="ctr">
+          <a:bodyPr wrap="none" lIns="27432" tIns="18288" rIns="27432" bIns="18288" anchor="ctr">
             <a:normAutofit/>
           </a:bodyPr>
           <a:lstStyle/>
@@ -5254,7 +5268,7 @@
           </a:ln>
         </p:spPr>
         <p:txBody>
-          <a:bodyPr wrap="none" lIns="27432" rIns="27432" tIns="18288" bIns="18288" anchor="ctr">
+          <a:bodyPr wrap="none" lIns="27432" tIns="18288" rIns="27432" bIns="18288" anchor="ctr">
             <a:normAutofit/>
           </a:bodyPr>
           <a:lstStyle/>
@@ -5358,6 +5372,7 @@
           <a:lstStyle/>
           <a:p>
             <a:pPr algn="ctr"/>
+            <a:endParaRPr/>
           </a:p>
         </p:txBody>
       </p:sp>
@@ -5381,7 +5396,7 @@
           </a:ln>
         </p:spPr>
         <p:txBody>
-          <a:bodyPr wrap="none" lIns="27432" rIns="27432" tIns="18288" bIns="18288" anchor="ctr">
+          <a:bodyPr wrap="none" lIns="27432" tIns="18288" rIns="27432" bIns="18288" anchor="ctr">
             <a:normAutofit/>
           </a:bodyPr>
           <a:lstStyle/>
@@ -5419,7 +5434,7 @@
           </a:ln>
         </p:spPr>
         <p:txBody>
-          <a:bodyPr wrap="none" lIns="27432" rIns="27432" tIns="18288" bIns="18288" anchor="ctr">
+          <a:bodyPr wrap="none" lIns="27432" tIns="18288" rIns="27432" bIns="18288" anchor="ctr">
             <a:normAutofit/>
           </a:bodyPr>
           <a:lstStyle/>
@@ -5523,6 +5538,7 @@
           <a:lstStyle/>
           <a:p>
             <a:pPr algn="ctr"/>
+            <a:endParaRPr/>
           </a:p>
         </p:txBody>
       </p:sp>
@@ -5546,7 +5562,7 @@
           </a:ln>
         </p:spPr>
         <p:txBody>
-          <a:bodyPr wrap="none" lIns="27432" rIns="27432" tIns="18288" bIns="18288" anchor="ctr">
+          <a:bodyPr wrap="none" lIns="27432" tIns="18288" rIns="27432" bIns="18288" anchor="ctr">
             <a:normAutofit/>
           </a:bodyPr>
           <a:lstStyle/>
@@ -5584,7 +5600,7 @@
           </a:ln>
         </p:spPr>
         <p:txBody>
-          <a:bodyPr wrap="none" lIns="27432" rIns="27432" tIns="18288" bIns="18288" anchor="ctr">
+          <a:bodyPr wrap="none" lIns="27432" tIns="18288" rIns="27432" bIns="18288" anchor="ctr">
             <a:normAutofit/>
           </a:bodyPr>
           <a:lstStyle/>
@@ -5678,6 +5694,7 @@
           <a:lstStyle/>
           <a:p>
             <a:pPr algn="ctr"/>
+            <a:endParaRPr/>
           </a:p>
         </p:txBody>
       </p:sp>
@@ -5701,7 +5718,7 @@
           </a:ln>
         </p:spPr>
         <p:txBody>
-          <a:bodyPr wrap="none" lIns="27432" rIns="27432" tIns="18288" bIns="18288" anchor="ctr">
+          <a:bodyPr wrap="none" lIns="27432" tIns="18288" rIns="27432" bIns="18288" anchor="ctr">
             <a:normAutofit/>
           </a:bodyPr>
           <a:lstStyle/>
@@ -5739,7 +5756,7 @@
           </a:ln>
         </p:spPr>
         <p:txBody>
-          <a:bodyPr wrap="none" lIns="27432" rIns="27432" tIns="18288" bIns="18288" anchor="ctr">
+          <a:bodyPr wrap="none" lIns="27432" tIns="18288" rIns="27432" bIns="18288" anchor="ctr">
             <a:normAutofit/>
           </a:bodyPr>
           <a:lstStyle/>
@@ -5843,6 +5860,7 @@
           <a:lstStyle/>
           <a:p>
             <a:pPr algn="ctr"/>
+            <a:endParaRPr/>
           </a:p>
         </p:txBody>
       </p:sp>
@@ -5866,7 +5884,7 @@
           </a:ln>
         </p:spPr>
         <p:txBody>
-          <a:bodyPr wrap="none" lIns="27432" rIns="27432" tIns="18288" bIns="18288" anchor="ctr">
+          <a:bodyPr wrap="none" lIns="27432" tIns="18288" rIns="27432" bIns="18288" anchor="ctr">
             <a:normAutofit/>
           </a:bodyPr>
           <a:lstStyle/>
@@ -5904,7 +5922,7 @@
           </a:ln>
         </p:spPr>
         <p:txBody>
-          <a:bodyPr wrap="none" lIns="27432" rIns="27432" tIns="18288" bIns="18288" anchor="ctr">
+          <a:bodyPr wrap="none" lIns="27432" tIns="18288" rIns="27432" bIns="18288" anchor="ctr">
             <a:normAutofit/>
           </a:bodyPr>
           <a:lstStyle/>
@@ -6008,6 +6026,7 @@
           <a:lstStyle/>
           <a:p>
             <a:pPr algn="ctr"/>
+            <a:endParaRPr/>
           </a:p>
         </p:txBody>
       </p:sp>
@@ -6031,7 +6050,7 @@
           </a:ln>
         </p:spPr>
         <p:txBody>
-          <a:bodyPr wrap="none" lIns="27432" rIns="27432" tIns="18288" bIns="18288" anchor="ctr">
+          <a:bodyPr wrap="none" lIns="27432" tIns="18288" rIns="27432" bIns="18288" anchor="ctr">
             <a:normAutofit/>
           </a:bodyPr>
           <a:lstStyle/>
@@ -6069,7 +6088,7 @@
           </a:ln>
         </p:spPr>
         <p:txBody>
-          <a:bodyPr wrap="none" lIns="27432" rIns="27432" tIns="18288" bIns="18288" anchor="ctr">
+          <a:bodyPr wrap="none" lIns="27432" tIns="18288" rIns="27432" bIns="18288" anchor="ctr">
             <a:normAutofit/>
           </a:bodyPr>
           <a:lstStyle/>
@@ -6173,6 +6192,7 @@
           <a:lstStyle/>
           <a:p>
             <a:pPr algn="ctr"/>
+            <a:endParaRPr/>
           </a:p>
         </p:txBody>
       </p:sp>
@@ -6196,7 +6216,7 @@
           </a:ln>
         </p:spPr>
         <p:txBody>
-          <a:bodyPr wrap="none" lIns="27432" rIns="27432" tIns="18288" bIns="18288" anchor="ctr">
+          <a:bodyPr wrap="none" lIns="27432" tIns="18288" rIns="27432" bIns="18288" anchor="ctr">
             <a:normAutofit/>
           </a:bodyPr>
           <a:lstStyle/>
@@ -6234,7 +6254,7 @@
           </a:ln>
         </p:spPr>
         <p:txBody>
-          <a:bodyPr wrap="none" lIns="27432" rIns="27432" tIns="18288" bIns="18288" anchor="ctr">
+          <a:bodyPr wrap="none" lIns="27432" tIns="18288" rIns="27432" bIns="18288" anchor="ctr">
             <a:normAutofit/>
           </a:bodyPr>
           <a:lstStyle/>
@@ -6338,6 +6358,7 @@
           <a:lstStyle/>
           <a:p>
             <a:pPr algn="ctr"/>
+            <a:endParaRPr/>
           </a:p>
         </p:txBody>
       </p:sp>
@@ -6361,7 +6382,7 @@
           </a:ln>
         </p:spPr>
         <p:txBody>
-          <a:bodyPr wrap="none" lIns="27432" rIns="27432" tIns="18288" bIns="18288" anchor="ctr">
+          <a:bodyPr wrap="none" lIns="27432" tIns="18288" rIns="27432" bIns="18288" anchor="ctr">
             <a:normAutofit/>
           </a:bodyPr>
           <a:lstStyle/>
@@ -6399,7 +6420,7 @@
           </a:ln>
         </p:spPr>
         <p:txBody>
-          <a:bodyPr wrap="none" lIns="27432" rIns="27432" tIns="18288" bIns="18288" anchor="ctr">
+          <a:bodyPr wrap="none" lIns="27432" tIns="18288" rIns="27432" bIns="18288" anchor="ctr">
             <a:normAutofit/>
           </a:bodyPr>
           <a:lstStyle/>
@@ -6503,6 +6524,7 @@
           <a:lstStyle/>
           <a:p>
             <a:pPr algn="ctr"/>
+            <a:endParaRPr/>
           </a:p>
         </p:txBody>
       </p:sp>
@@ -6526,7 +6548,7 @@
           </a:ln>
         </p:spPr>
         <p:txBody>
-          <a:bodyPr wrap="none" lIns="27432" rIns="27432" tIns="18288" bIns="18288" anchor="ctr">
+          <a:bodyPr wrap="none" lIns="27432" tIns="18288" rIns="27432" bIns="18288" anchor="ctr">
             <a:normAutofit/>
           </a:bodyPr>
           <a:lstStyle/>
@@ -6564,7 +6586,7 @@
           </a:ln>
         </p:spPr>
         <p:txBody>
-          <a:bodyPr wrap="none" lIns="27432" rIns="27432" tIns="18288" bIns="18288" anchor="ctr">
+          <a:bodyPr wrap="none" lIns="27432" tIns="18288" rIns="27432" bIns="18288" anchor="ctr">
             <a:normAutofit/>
           </a:bodyPr>
           <a:lstStyle/>
@@ -6668,6 +6690,7 @@
           <a:lstStyle/>
           <a:p>
             <a:pPr algn="ctr"/>
+            <a:endParaRPr/>
           </a:p>
         </p:txBody>
       </p:sp>
@@ -6691,7 +6714,7 @@
           </a:ln>
         </p:spPr>
         <p:txBody>
-          <a:bodyPr wrap="none" lIns="27432" rIns="27432" tIns="18288" bIns="18288" anchor="ctr">
+          <a:bodyPr wrap="none" lIns="27432" tIns="18288" rIns="27432" bIns="18288" anchor="ctr">
             <a:normAutofit/>
           </a:bodyPr>
           <a:lstStyle/>
@@ -6729,7 +6752,7 @@
           </a:ln>
         </p:spPr>
         <p:txBody>
-          <a:bodyPr wrap="none" lIns="27432" rIns="27432" tIns="18288" bIns="18288" anchor="ctr">
+          <a:bodyPr wrap="none" lIns="27432" tIns="18288" rIns="27432" bIns="18288" anchor="ctr">
             <a:normAutofit/>
           </a:bodyPr>
           <a:lstStyle/>
@@ -6833,6 +6856,7 @@
           <a:lstStyle/>
           <a:p>
             <a:pPr algn="ctr"/>
+            <a:endParaRPr/>
           </a:p>
         </p:txBody>
       </p:sp>
@@ -6856,7 +6880,7 @@
           </a:ln>
         </p:spPr>
         <p:txBody>
-          <a:bodyPr wrap="none" lIns="27432" rIns="27432" tIns="18288" bIns="18288" anchor="ctr">
+          <a:bodyPr wrap="none" lIns="27432" tIns="18288" rIns="27432" bIns="18288" anchor="ctr">
             <a:normAutofit/>
           </a:bodyPr>
           <a:lstStyle/>
@@ -6894,7 +6918,7 @@
           </a:ln>
         </p:spPr>
         <p:txBody>
-          <a:bodyPr wrap="none" lIns="27432" rIns="27432" tIns="18288" bIns="18288" anchor="ctr">
+          <a:bodyPr wrap="none" lIns="27432" tIns="18288" rIns="27432" bIns="18288" anchor="ctr">
             <a:normAutofit/>
           </a:bodyPr>
           <a:lstStyle/>
@@ -6998,6 +7022,7 @@
           <a:lstStyle/>
           <a:p>
             <a:pPr algn="ctr"/>
+            <a:endParaRPr/>
           </a:p>
         </p:txBody>
       </p:sp>
@@ -7021,7 +7046,7 @@
           </a:ln>
         </p:spPr>
         <p:txBody>
-          <a:bodyPr wrap="none" lIns="27432" rIns="27432" tIns="18288" bIns="18288" anchor="ctr">
+          <a:bodyPr wrap="none" lIns="27432" tIns="18288" rIns="27432" bIns="18288" anchor="ctr">
             <a:normAutofit/>
           </a:bodyPr>
           <a:lstStyle/>
@@ -7059,7 +7084,7 @@
           </a:ln>
         </p:spPr>
         <p:txBody>
-          <a:bodyPr wrap="none" lIns="27432" rIns="27432" tIns="18288" bIns="18288" anchor="ctr">
+          <a:bodyPr wrap="none" lIns="27432" tIns="18288" rIns="27432" bIns="18288" anchor="ctr">
             <a:normAutofit/>
           </a:bodyPr>
           <a:lstStyle/>
@@ -7163,6 +7188,7 @@
           <a:lstStyle/>
           <a:p>
             <a:pPr algn="ctr"/>
+            <a:endParaRPr/>
           </a:p>
         </p:txBody>
       </p:sp>
@@ -7186,7 +7212,7 @@
           </a:ln>
         </p:spPr>
         <p:txBody>
-          <a:bodyPr wrap="none" lIns="27432" rIns="27432" tIns="18288" bIns="18288" anchor="ctr">
+          <a:bodyPr wrap="none" lIns="27432" tIns="18288" rIns="27432" bIns="18288" anchor="ctr">
             <a:normAutofit/>
           </a:bodyPr>
           <a:lstStyle/>
@@ -7224,7 +7250,7 @@
           </a:ln>
         </p:spPr>
         <p:txBody>
-          <a:bodyPr wrap="none" lIns="27432" rIns="27432" tIns="18288" bIns="18288" anchor="ctr">
+          <a:bodyPr wrap="none" lIns="27432" tIns="18288" rIns="27432" bIns="18288" anchor="ctr">
             <a:normAutofit/>
           </a:bodyPr>
           <a:lstStyle/>
@@ -7318,6 +7344,7 @@
           <a:lstStyle/>
           <a:p>
             <a:pPr algn="ctr"/>
+            <a:endParaRPr/>
           </a:p>
         </p:txBody>
       </p:sp>
@@ -7341,7 +7368,7 @@
           </a:ln>
         </p:spPr>
         <p:txBody>
-          <a:bodyPr wrap="none" lIns="27432" rIns="27432" tIns="18288" bIns="18288" anchor="ctr">
+          <a:bodyPr wrap="none" lIns="27432" tIns="18288" rIns="27432" bIns="18288" anchor="ctr">
             <a:normAutofit/>
           </a:bodyPr>
           <a:lstStyle/>
@@ -7379,7 +7406,7 @@
           </a:ln>
         </p:spPr>
         <p:txBody>
-          <a:bodyPr wrap="none" lIns="27432" rIns="27432" tIns="18288" bIns="18288" anchor="ctr">
+          <a:bodyPr wrap="none" lIns="27432" tIns="18288" rIns="27432" bIns="18288" anchor="ctr">
             <a:normAutofit/>
           </a:bodyPr>
           <a:lstStyle/>
@@ -7473,6 +7500,7 @@
           <a:lstStyle/>
           <a:p>
             <a:pPr algn="ctr"/>
+            <a:endParaRPr/>
           </a:p>
         </p:txBody>
       </p:sp>
@@ -7496,7 +7524,7 @@
           </a:ln>
         </p:spPr>
         <p:txBody>
-          <a:bodyPr wrap="none" lIns="27432" rIns="27432" tIns="18288" bIns="18288" anchor="ctr">
+          <a:bodyPr wrap="none" lIns="27432" tIns="18288" rIns="27432" bIns="18288" anchor="ctr">
             <a:normAutofit/>
           </a:bodyPr>
           <a:lstStyle/>
@@ -7534,7 +7562,7 @@
           </a:ln>
         </p:spPr>
         <p:txBody>
-          <a:bodyPr wrap="none" lIns="27432" rIns="27432" tIns="18288" bIns="18288" anchor="ctr">
+          <a:bodyPr wrap="none" lIns="27432" tIns="18288" rIns="27432" bIns="18288" anchor="ctr">
             <a:normAutofit/>
           </a:bodyPr>
           <a:lstStyle/>
@@ -7628,6 +7656,7 @@
           <a:lstStyle/>
           <a:p>
             <a:pPr algn="ctr"/>
+            <a:endParaRPr/>
           </a:p>
         </p:txBody>
       </p:sp>
@@ -7651,7 +7680,7 @@
           </a:ln>
         </p:spPr>
         <p:txBody>
-          <a:bodyPr wrap="none" lIns="27432" rIns="27432" tIns="18288" bIns="18288" anchor="ctr">
+          <a:bodyPr wrap="none" lIns="27432" tIns="18288" rIns="27432" bIns="18288" anchor="ctr">
             <a:normAutofit/>
           </a:bodyPr>
           <a:lstStyle/>
@@ -7689,7 +7718,7 @@
           </a:ln>
         </p:spPr>
         <p:txBody>
-          <a:bodyPr wrap="none" lIns="27432" rIns="27432" tIns="18288" bIns="18288" anchor="ctr">
+          <a:bodyPr wrap="none" lIns="27432" tIns="18288" rIns="27432" bIns="18288" anchor="ctr">
             <a:normAutofit/>
           </a:bodyPr>
           <a:lstStyle/>
@@ -7793,6 +7822,7 @@
           <a:lstStyle/>
           <a:p>
             <a:pPr algn="ctr"/>
+            <a:endParaRPr/>
           </a:p>
         </p:txBody>
       </p:sp>
@@ -7816,7 +7846,7 @@
           </a:ln>
         </p:spPr>
         <p:txBody>
-          <a:bodyPr wrap="none" lIns="27432" rIns="27432" tIns="18288" bIns="18288" anchor="ctr">
+          <a:bodyPr wrap="none" lIns="27432" tIns="18288" rIns="27432" bIns="18288" anchor="ctr">
             <a:normAutofit/>
           </a:bodyPr>
           <a:lstStyle/>
@@ -7854,7 +7884,7 @@
           </a:ln>
         </p:spPr>
         <p:txBody>
-          <a:bodyPr wrap="none" lIns="27432" rIns="27432" tIns="18288" bIns="18288" anchor="ctr">
+          <a:bodyPr wrap="none" lIns="27432" tIns="18288" rIns="27432" bIns="18288" anchor="ctr">
             <a:normAutofit/>
           </a:bodyPr>
           <a:lstStyle/>
@@ -7948,6 +7978,7 @@
           <a:lstStyle/>
           <a:p>
             <a:pPr algn="ctr"/>
+            <a:endParaRPr/>
           </a:p>
         </p:txBody>
       </p:sp>
@@ -7971,7 +8002,7 @@
           </a:ln>
         </p:spPr>
         <p:txBody>
-          <a:bodyPr wrap="none" lIns="27432" rIns="27432" tIns="18288" bIns="18288" anchor="ctr">
+          <a:bodyPr wrap="none" lIns="27432" tIns="18288" rIns="27432" bIns="18288" anchor="ctr">
             <a:normAutofit/>
           </a:bodyPr>
           <a:lstStyle/>
@@ -8009,7 +8040,7 @@
           </a:ln>
         </p:spPr>
         <p:txBody>
-          <a:bodyPr wrap="none" lIns="27432" rIns="27432" tIns="18288" bIns="18288" anchor="ctr">
+          <a:bodyPr wrap="none" lIns="27432" tIns="18288" rIns="27432" bIns="18288" anchor="ctr">
             <a:normAutofit/>
           </a:bodyPr>
           <a:lstStyle/>
@@ -8113,6 +8144,7 @@
           <a:lstStyle/>
           <a:p>
             <a:pPr algn="ctr"/>
+            <a:endParaRPr/>
           </a:p>
         </p:txBody>
       </p:sp>
@@ -8136,7 +8168,7 @@
           </a:ln>
         </p:spPr>
         <p:txBody>
-          <a:bodyPr wrap="none" lIns="27432" rIns="27432" tIns="18288" bIns="18288" anchor="ctr">
+          <a:bodyPr wrap="none" lIns="27432" tIns="18288" rIns="27432" bIns="18288" anchor="ctr">
             <a:normAutofit/>
           </a:bodyPr>
           <a:lstStyle/>
@@ -8174,7 +8206,7 @@
           </a:ln>
         </p:spPr>
         <p:txBody>
-          <a:bodyPr wrap="none" lIns="27432" rIns="27432" tIns="18288" bIns="18288" anchor="ctr">
+          <a:bodyPr wrap="none" lIns="27432" tIns="18288" rIns="27432" bIns="18288" anchor="ctr">
             <a:normAutofit/>
           </a:bodyPr>
           <a:lstStyle/>
@@ -8268,6 +8300,7 @@
           <a:lstStyle/>
           <a:p>
             <a:pPr algn="ctr"/>
+            <a:endParaRPr/>
           </a:p>
         </p:txBody>
       </p:sp>
@@ -8291,7 +8324,7 @@
           </a:ln>
         </p:spPr>
         <p:txBody>
-          <a:bodyPr wrap="none" lIns="27432" rIns="27432" tIns="18288" bIns="18288" anchor="ctr">
+          <a:bodyPr wrap="none" lIns="27432" tIns="18288" rIns="27432" bIns="18288" anchor="ctr">
             <a:normAutofit/>
           </a:bodyPr>
           <a:lstStyle/>
@@ -8329,7 +8362,7 @@
           </a:ln>
         </p:spPr>
         <p:txBody>
-          <a:bodyPr wrap="none" lIns="27432" rIns="27432" tIns="18288" bIns="18288" anchor="ctr">
+          <a:bodyPr wrap="none" lIns="27432" tIns="18288" rIns="27432" bIns="18288" anchor="ctr">
             <a:normAutofit/>
           </a:bodyPr>
           <a:lstStyle/>
@@ -8433,6 +8466,7 @@
           <a:lstStyle/>
           <a:p>
             <a:pPr algn="ctr"/>
+            <a:endParaRPr/>
           </a:p>
         </p:txBody>
       </p:sp>
@@ -8456,7 +8490,7 @@
           </a:ln>
         </p:spPr>
         <p:txBody>
-          <a:bodyPr wrap="none" lIns="27432" rIns="27432" tIns="18288" bIns="18288" anchor="ctr">
+          <a:bodyPr wrap="none" lIns="27432" tIns="18288" rIns="27432" bIns="18288" anchor="ctr">
             <a:normAutofit/>
           </a:bodyPr>
           <a:lstStyle/>
@@ -8494,7 +8528,7 @@
           </a:ln>
         </p:spPr>
         <p:txBody>
-          <a:bodyPr wrap="none" lIns="27432" rIns="27432" tIns="18288" bIns="18288" anchor="ctr">
+          <a:bodyPr wrap="none" lIns="27432" tIns="18288" rIns="27432" bIns="18288" anchor="ctr">
             <a:normAutofit/>
           </a:bodyPr>
           <a:lstStyle/>
@@ -8598,6 +8632,7 @@
           <a:lstStyle/>
           <a:p>
             <a:pPr algn="ctr"/>
+            <a:endParaRPr/>
           </a:p>
         </p:txBody>
       </p:sp>
@@ -8621,7 +8656,7 @@
           </a:ln>
         </p:spPr>
         <p:txBody>
-          <a:bodyPr wrap="none" lIns="27432" rIns="27432" tIns="18288" bIns="18288" anchor="ctr">
+          <a:bodyPr wrap="none" lIns="27432" tIns="18288" rIns="27432" bIns="18288" anchor="ctr">
             <a:normAutofit/>
           </a:bodyPr>
           <a:lstStyle/>
@@ -8659,7 +8694,7 @@
           </a:ln>
         </p:spPr>
         <p:txBody>
-          <a:bodyPr wrap="none" lIns="27432" rIns="27432" tIns="18288" bIns="18288" anchor="ctr">
+          <a:bodyPr wrap="none" lIns="27432" tIns="18288" rIns="27432" bIns="18288" anchor="ctr">
             <a:normAutofit/>
           </a:bodyPr>
           <a:lstStyle/>
@@ -8763,6 +8798,7 @@
           <a:lstStyle/>
           <a:p>
             <a:pPr algn="ctr"/>
+            <a:endParaRPr/>
           </a:p>
         </p:txBody>
       </p:sp>
@@ -8926,7 +8962,7 @@
           </a:ln>
         </p:spPr>
         <p:txBody>
-          <a:bodyPr wrap="none" lIns="27432" rIns="27432" tIns="18288" bIns="18288" anchor="ctr">
+          <a:bodyPr wrap="none" lIns="27432" tIns="18288" rIns="27432" bIns="18288" anchor="ctr">
             <a:normAutofit/>
           </a:bodyPr>
           <a:lstStyle/>
@@ -8964,7 +9000,7 @@
           </a:ln>
         </p:spPr>
         <p:txBody>
-          <a:bodyPr wrap="none" lIns="27432" rIns="27432" tIns="18288" bIns="18288" anchor="ctr">
+          <a:bodyPr wrap="none" lIns="27432" tIns="18288" rIns="27432" bIns="18288" anchor="ctr">
             <a:normAutofit/>
           </a:bodyPr>
           <a:lstStyle/>
@@ -9068,6 +9104,7 @@
           <a:lstStyle/>
           <a:p>
             <a:pPr algn="ctr"/>
+            <a:endParaRPr/>
           </a:p>
         </p:txBody>
       </p:sp>
@@ -9231,7 +9268,7 @@
           </a:ln>
         </p:spPr>
         <p:txBody>
-          <a:bodyPr wrap="none" lIns="27432" rIns="27432" tIns="18288" bIns="18288" anchor="ctr">
+          <a:bodyPr wrap="none" lIns="27432" tIns="18288" rIns="27432" bIns="18288" anchor="ctr">
             <a:normAutofit/>
           </a:bodyPr>
           <a:lstStyle/>
@@ -9269,7 +9306,7 @@
           </a:ln>
         </p:spPr>
         <p:txBody>
-          <a:bodyPr wrap="none" lIns="27432" rIns="27432" tIns="18288" bIns="18288" anchor="ctr">
+          <a:bodyPr wrap="none" lIns="27432" tIns="18288" rIns="27432" bIns="18288" anchor="ctr">
             <a:normAutofit/>
           </a:bodyPr>
           <a:lstStyle/>
@@ -9373,6 +9410,7 @@
           <a:lstStyle/>
           <a:p>
             <a:pPr algn="ctr"/>
+            <a:endParaRPr/>
           </a:p>
         </p:txBody>
       </p:sp>
@@ -9396,7 +9434,7 @@
           </a:ln>
         </p:spPr>
         <p:txBody>
-          <a:bodyPr wrap="none" lIns="27432" rIns="27432" tIns="18288" bIns="18288" anchor="ctr">
+          <a:bodyPr wrap="none" lIns="27432" tIns="18288" rIns="27432" bIns="18288" anchor="ctr">
             <a:normAutofit/>
           </a:bodyPr>
           <a:lstStyle/>
@@ -9434,7 +9472,7 @@
           </a:ln>
         </p:spPr>
         <p:txBody>
-          <a:bodyPr wrap="none" lIns="27432" rIns="27432" tIns="18288" bIns="18288" anchor="ctr">
+          <a:bodyPr wrap="none" lIns="27432" tIns="18288" rIns="27432" bIns="18288" anchor="ctr">
             <a:normAutofit/>
           </a:bodyPr>
           <a:lstStyle/>
@@ -9492,6 +9530,7 @@
           <a:lstStyle/>
           <a:p>
             <a:pPr algn="ctr"/>
+            <a:endParaRPr/>
           </a:p>
         </p:txBody>
       </p:sp>
@@ -9515,7 +9554,7 @@
           </a:ln>
         </p:spPr>
         <p:txBody>
-          <a:bodyPr wrap="none" lIns="27432" rIns="27432" tIns="18288" bIns="18288" anchor="ctr">
+          <a:bodyPr wrap="none" lIns="27432" tIns="18288" rIns="27432" bIns="18288" anchor="ctr">
             <a:normAutofit/>
           </a:bodyPr>
           <a:lstStyle/>
@@ -9553,7 +9592,7 @@
           </a:ln>
         </p:spPr>
         <p:txBody>
-          <a:bodyPr wrap="none" lIns="27432" rIns="27432" tIns="18288" bIns="18288" anchor="ctr">
+          <a:bodyPr wrap="none" lIns="27432" tIns="18288" rIns="27432" bIns="18288" anchor="ctr">
             <a:normAutofit/>
           </a:bodyPr>
           <a:lstStyle/>
@@ -9605,7 +9644,7 @@
           </a:ln>
         </p:spPr>
         <p:txBody>
-          <a:bodyPr wrap="none" lIns="27432" rIns="27432" tIns="18288" bIns="18288" anchor="ctr">
+          <a:bodyPr wrap="none" lIns="27432" tIns="18288" rIns="27432" bIns="18288" anchor="ctr">
             <a:normAutofit/>
           </a:bodyPr>
           <a:lstStyle/>
@@ -9657,7 +9696,7 @@
           </a:ln>
         </p:spPr>
         <p:txBody>
-          <a:bodyPr wrap="none" lIns="27432" rIns="27432" tIns="18288" bIns="18288" anchor="ctr">
+          <a:bodyPr wrap="none" lIns="27432" tIns="18288" rIns="27432" bIns="18288" anchor="ctr">
             <a:normAutofit/>
           </a:bodyPr>
           <a:lstStyle/>
@@ -9709,7 +9748,7 @@
           </a:ln>
         </p:spPr>
         <p:txBody>
-          <a:bodyPr wrap="none" lIns="27432" rIns="27432" tIns="18288" bIns="18288" anchor="ctr">
+          <a:bodyPr wrap="none" lIns="27432" tIns="18288" rIns="27432" bIns="18288" anchor="ctr">
             <a:normAutofit/>
           </a:bodyPr>
           <a:lstStyle/>
@@ -9761,7 +9800,7 @@
           </a:ln>
         </p:spPr>
         <p:txBody>
-          <a:bodyPr wrap="none" lIns="27432" rIns="27432" tIns="18288" bIns="18288" anchor="ctr">
+          <a:bodyPr wrap="none" lIns="27432" tIns="18288" rIns="27432" bIns="18288" anchor="ctr">
             <a:normAutofit/>
           </a:bodyPr>
           <a:lstStyle/>
@@ -9813,7 +9852,7 @@
           </a:ln>
         </p:spPr>
         <p:txBody>
-          <a:bodyPr wrap="none" lIns="27432" rIns="27432" tIns="18288" bIns="18288" anchor="ctr">
+          <a:bodyPr wrap="none" lIns="27432" tIns="18288" rIns="27432" bIns="18288" anchor="ctr">
             <a:normAutofit/>
           </a:bodyPr>
           <a:lstStyle/>
@@ -9865,7 +9904,7 @@
           </a:ln>
         </p:spPr>
         <p:txBody>
-          <a:bodyPr wrap="none" lIns="27432" rIns="27432" tIns="18288" bIns="18288" anchor="ctr">
+          <a:bodyPr wrap="none" lIns="27432" tIns="18288" rIns="27432" bIns="18288" anchor="ctr">
             <a:normAutofit/>
           </a:bodyPr>
           <a:lstStyle/>
@@ -9913,7 +9952,7 @@
           </a:ln>
         </p:spPr>
         <p:txBody>
-          <a:bodyPr wrap="none" lIns="27432" rIns="27432" tIns="18288" bIns="18288" anchor="ctr">
+          <a:bodyPr wrap="none" lIns="27432" tIns="18288" rIns="27432" bIns="18288" anchor="ctr">
             <a:normAutofit/>
           </a:bodyPr>
           <a:lstStyle/>
@@ -9951,7 +9990,7 @@
           </a:ln>
         </p:spPr>
         <p:txBody>
-          <a:bodyPr wrap="none" lIns="27432" rIns="27432" tIns="18288" bIns="18288" anchor="ctr">
+          <a:bodyPr wrap="none" lIns="27432" tIns="18288" rIns="27432" bIns="18288" anchor="ctr">
             <a:normAutofit/>
           </a:bodyPr>
           <a:lstStyle/>
@@ -9965,6 +10004,5245 @@
                 <a:latin typeface="Calibri"/>
               </a:rPr>
               <a:t>Counterfactual base is a scenario, not last year actual. 2024 actual is shown only as reference.</a:t>
+            </a:r>
+          </a:p>
+        </p:txBody>
+      </p:sp>
+    </p:spTree>
+  </p:cSld>
+  <p:clrMapOvr>
+    <a:masterClrMapping/>
+  </p:clrMapOvr>
+</p:sld>
+</file>
+
+<file path=ppt/slides/slide2.xml><?xml version="1.0" encoding="utf-8"?>
+<p:sld xmlns:a="http://schemas.openxmlformats.org/drawingml/2006/main" xmlns:r="http://schemas.openxmlformats.org/officeDocument/2006/relationships" xmlns:p="http://schemas.openxmlformats.org/presentationml/2006/main">
+  <p:cSld>
+    <p:spTree>
+      <p:nvGrpSpPr>
+        <p:cNvPr id="1" name=""/>
+        <p:cNvGrpSpPr/>
+        <p:nvPr/>
+      </p:nvGrpSpPr>
+      <p:grpSpPr>
+        <a:xfrm>
+          <a:off x="0" y="0"/>
+          <a:ext cx="0" cy="0"/>
+          <a:chOff x="0" y="0"/>
+          <a:chExt cx="0" cy="0"/>
+        </a:xfrm>
+      </p:grpSpPr>
+      <p:pic>
+        <p:nvPicPr>
+          <p:cNvPr id="2" name="Picture 1" descr="gc_decomposition_waterfall_chart.png"/>
+          <p:cNvPicPr>
+            <a:picLocks noChangeAspect="1"/>
+          </p:cNvPicPr>
+          <p:nvPr/>
+        </p:nvPicPr>
+        <p:blipFill>
+          <a:blip r:embed="rId2"/>
+          <a:stretch>
+            <a:fillRect/>
+          </a:stretch>
+        </p:blipFill>
+        <p:spPr>
+          <a:xfrm>
+            <a:off x="1" y="0"/>
+            <a:ext cx="14630034" cy="8229600"/>
+          </a:xfrm>
+          <a:prstGeom prst="rect">
+            <a:avLst/>
+          </a:prstGeom>
+        </p:spPr>
+      </p:pic>
+    </p:spTree>
+  </p:cSld>
+  <p:clrMapOvr>
+    <a:masterClrMapping/>
+  </p:clrMapOvr>
+</p:sld>
+</file>
+
+<file path=ppt/slides/slide3.xml><?xml version="1.0" encoding="utf-8"?>
+<p:sld xmlns:a="http://schemas.openxmlformats.org/drawingml/2006/main" xmlns:r="http://schemas.openxmlformats.org/officeDocument/2006/relationships" xmlns:p="http://schemas.openxmlformats.org/presentationml/2006/main">
+  <p:cSld>
+    <p:spTree>
+      <p:nvGrpSpPr>
+        <p:cNvPr id="1" name=""/>
+        <p:cNvGrpSpPr/>
+        <p:nvPr/>
+      </p:nvGrpSpPr>
+      <p:grpSpPr>
+        <a:xfrm>
+          <a:off x="0" y="0"/>
+          <a:ext cx="0" cy="0"/>
+          <a:chOff x="0" y="0"/>
+          <a:chExt cx="0" cy="0"/>
+        </a:xfrm>
+      </p:grpSpPr>
+      <p:sp>
+        <p:nvSpPr>
+          <p:cNvPr id="2" name="Rectangle 1"/>
+          <p:cNvSpPr/>
+          <p:nvPr/>
+        </p:nvSpPr>
+        <p:spPr>
+          <a:xfrm>
+            <a:off x="1" y="0"/>
+            <a:ext cx="14630034" cy="8229600"/>
+          </a:xfrm>
+          <a:prstGeom prst="rect">
+            <a:avLst/>
+          </a:prstGeom>
+          <a:solidFill>
+            <a:srgbClr val="FFFFFF"/>
+          </a:solidFill>
+          <a:ln>
+            <a:noFill/>
+          </a:ln>
+        </p:spPr>
+        <p:style>
+          <a:lnRef idx="1">
+            <a:schemeClr val="accent1"/>
+          </a:lnRef>
+          <a:fillRef idx="3">
+            <a:schemeClr val="accent1"/>
+          </a:fillRef>
+          <a:effectRef idx="2">
+            <a:schemeClr val="accent1"/>
+          </a:effectRef>
+          <a:fontRef idx="minor">
+            <a:schemeClr val="lt1"/>
+          </a:fontRef>
+        </p:style>
+        <p:txBody>
+          <a:bodyPr rtlCol="0" anchor="ctr"/>
+          <a:lstStyle/>
+          <a:p>
+            <a:pPr algn="ctr"/>
+            <a:endParaRPr sz="2160"/>
+          </a:p>
+        </p:txBody>
+      </p:sp>
+      <p:sp>
+        <p:nvSpPr>
+          <p:cNvPr id="3" name="TextBox 2"/>
+          <p:cNvSpPr txBox="1"/>
+          <p:nvPr/>
+        </p:nvSpPr>
+        <p:spPr>
+          <a:xfrm>
+            <a:off x="274320" y="175566"/>
+            <a:ext cx="13716000" cy="487519"/>
+          </a:xfrm>
+          <a:prstGeom prst="rect">
+            <a:avLst/>
+          </a:prstGeom>
+          <a:noFill/>
+        </p:spPr>
+        <p:txBody>
+          <a:bodyPr wrap="square" lIns="21946" tIns="21946" rIns="21946" bIns="21946" anchor="t">
+            <a:spAutoFit/>
+          </a:bodyPr>
+          <a:lstStyle/>
+          <a:p>
+            <a:pPr algn="l"/>
+            <a:r>
+              <a:rPr sz="2880" b="1">
+                <a:solidFill>
+                  <a:srgbClr val="081B49"/>
+                </a:solidFill>
+                <a:latin typeface="Aptos"/>
+              </a:rPr>
+              <a:t>GC Decomposition: Protected Base + Growth Movement</a:t>
+            </a:r>
+          </a:p>
+        </p:txBody>
+      </p:sp>
+      <p:sp>
+        <p:nvSpPr>
+          <p:cNvPr id="4" name="TextBox 3"/>
+          <p:cNvSpPr txBox="1"/>
+          <p:nvPr/>
+        </p:nvSpPr>
+        <p:spPr>
+          <a:xfrm>
+            <a:off x="285293" y="625449"/>
+            <a:ext cx="12893040" cy="243734"/>
+          </a:xfrm>
+          <a:prstGeom prst="rect">
+            <a:avLst/>
+          </a:prstGeom>
+          <a:noFill/>
+        </p:spPr>
+        <p:txBody>
+          <a:bodyPr wrap="square" lIns="21946" tIns="21946" rIns="21946" bIns="21946" anchor="t">
+            <a:spAutoFit/>
+          </a:bodyPr>
+          <a:lstStyle/>
+          <a:p>
+            <a:pPr algn="l"/>
+            <a:r>
+              <a:rPr sz="1296">
+                <a:solidFill>
+                  <a:srgbClr val="4D5054"/>
+                </a:solidFill>
+                <a:latin typeface="Aptos"/>
+              </a:rPr>
+              <a:t>From a counterfactual weak foundation to 2025 actuals through foundation protection, external context, and commercial actions</a:t>
+            </a:r>
+          </a:p>
+        </p:txBody>
+      </p:sp>
+      <p:sp>
+        <p:nvSpPr>
+          <p:cNvPr id="5" name="Rectangle 4"/>
+          <p:cNvSpPr/>
+          <p:nvPr/>
+        </p:nvSpPr>
+        <p:spPr>
+          <a:xfrm>
+            <a:off x="307239" y="1130199"/>
+            <a:ext cx="307238" cy="307238"/>
+          </a:xfrm>
+          <a:prstGeom prst="rect">
+            <a:avLst/>
+          </a:prstGeom>
+          <a:solidFill>
+            <a:srgbClr val="081B49"/>
+          </a:solidFill>
+          <a:ln>
+            <a:noFill/>
+          </a:ln>
+        </p:spPr>
+        <p:style>
+          <a:lnRef idx="1">
+            <a:schemeClr val="accent1"/>
+          </a:lnRef>
+          <a:fillRef idx="3">
+            <a:schemeClr val="accent1"/>
+          </a:fillRef>
+          <a:effectRef idx="2">
+            <a:schemeClr val="accent1"/>
+          </a:effectRef>
+          <a:fontRef idx="minor">
+            <a:schemeClr val="lt1"/>
+          </a:fontRef>
+        </p:style>
+        <p:txBody>
+          <a:bodyPr rtlCol="0" anchor="ctr"/>
+          <a:lstStyle/>
+          <a:p>
+            <a:pPr algn="ctr"/>
+            <a:endParaRPr sz="2160"/>
+          </a:p>
+        </p:txBody>
+      </p:sp>
+      <p:sp>
+        <p:nvSpPr>
+          <p:cNvPr id="6" name="TextBox 5"/>
+          <p:cNvSpPr txBox="1"/>
+          <p:nvPr/>
+        </p:nvSpPr>
+        <p:spPr>
+          <a:xfrm>
+            <a:off x="312725" y="1157631"/>
+            <a:ext cx="296266" cy="203133"/>
+          </a:xfrm>
+          <a:prstGeom prst="rect">
+            <a:avLst/>
+          </a:prstGeom>
+          <a:noFill/>
+        </p:spPr>
+        <p:txBody>
+          <a:bodyPr wrap="square" lIns="0" tIns="0" rIns="0" bIns="0" anchor="t">
+            <a:spAutoFit/>
+          </a:bodyPr>
+          <a:lstStyle/>
+          <a:p>
+            <a:pPr algn="ctr"/>
+            <a:r>
+              <a:rPr sz="1320" b="1">
+                <a:solidFill>
+                  <a:srgbClr val="FFFFFF"/>
+                </a:solidFill>
+                <a:latin typeface="Aptos"/>
+              </a:rPr>
+              <a:t>1</a:t>
+            </a:r>
+          </a:p>
+        </p:txBody>
+      </p:sp>
+      <p:sp>
+        <p:nvSpPr>
+          <p:cNvPr id="7" name="TextBox 6"/>
+          <p:cNvSpPr txBox="1"/>
+          <p:nvPr/>
+        </p:nvSpPr>
+        <p:spPr>
+          <a:xfrm>
+            <a:off x="713232" y="1119226"/>
+            <a:ext cx="1854403" cy="383773"/>
+          </a:xfrm>
+          <a:prstGeom prst="rect">
+            <a:avLst/>
+          </a:prstGeom>
+          <a:noFill/>
+        </p:spPr>
+        <p:txBody>
+          <a:bodyPr wrap="square" lIns="21946" tIns="21946" rIns="21946" bIns="21946" anchor="t">
+            <a:spAutoFit/>
+          </a:bodyPr>
+          <a:lstStyle/>
+          <a:p>
+            <a:pPr algn="l"/>
+            <a:r>
+              <a:rPr sz="1103" b="1">
+                <a:solidFill>
+                  <a:srgbClr val="000000"/>
+                </a:solidFill>
+                <a:latin typeface="Aptos"/>
+              </a:rPr>
+              <a:t>Counterfactual
+Weak Foundation Base</a:t>
+            </a:r>
+          </a:p>
+        </p:txBody>
+      </p:sp>
+      <p:cxnSp>
+        <p:nvCxnSpPr>
+          <p:cNvPr id="8" name="Connector 7"/>
+          <p:cNvCxnSpPr/>
+          <p:nvPr/>
+        </p:nvCxnSpPr>
+        <p:spPr>
+          <a:xfrm>
+            <a:off x="307238" y="1547165"/>
+            <a:ext cx="2249424" cy="0"/>
+          </a:xfrm>
+          <a:prstGeom prst="line">
+            <a:avLst/>
+          </a:prstGeom>
+          <a:ln w="13970">
+            <a:solidFill>
+              <a:srgbClr val="081B49"/>
+            </a:solidFill>
+          </a:ln>
+        </p:spPr>
+        <p:style>
+          <a:lnRef idx="2">
+            <a:schemeClr val="accent1"/>
+          </a:lnRef>
+          <a:fillRef idx="0">
+            <a:schemeClr val="accent1"/>
+          </a:fillRef>
+          <a:effectRef idx="1">
+            <a:schemeClr val="accent1"/>
+          </a:effectRef>
+          <a:fontRef idx="minor">
+            <a:schemeClr val="tx1"/>
+          </a:fontRef>
+        </p:style>
+      </p:cxnSp>
+      <p:sp>
+        <p:nvSpPr>
+          <p:cNvPr id="9" name="TextBox 8"/>
+          <p:cNvSpPr txBox="1"/>
+          <p:nvPr/>
+        </p:nvSpPr>
+        <p:spPr>
+          <a:xfrm>
+            <a:off x="307239" y="1656893"/>
+            <a:ext cx="2249423" cy="454241"/>
+          </a:xfrm>
+          <a:prstGeom prst="rect">
+            <a:avLst/>
+          </a:prstGeom>
+          <a:noFill/>
+        </p:spPr>
+        <p:txBody>
+          <a:bodyPr wrap="square" lIns="21946" tIns="21946" rIns="21946" bIns="21946" anchor="t">
+            <a:spAutoFit/>
+          </a:bodyPr>
+          <a:lstStyle/>
+          <a:p>
+            <a:pPr algn="l"/>
+            <a:r>
+              <a:rPr sz="888">
+                <a:solidFill>
+                  <a:srgbClr val="4D5054"/>
+                </a:solidFill>
+                <a:latin typeface="Aptos"/>
+              </a:rPr>
+              <a:t>Weak GC scenario
+if the business foundation
+performed at a degraded level</a:t>
+            </a:r>
+          </a:p>
+        </p:txBody>
+      </p:sp>
+      <p:sp>
+        <p:nvSpPr>
+          <p:cNvPr id="10" name="Rectangle 9"/>
+          <p:cNvSpPr/>
+          <p:nvPr/>
+        </p:nvSpPr>
+        <p:spPr>
+          <a:xfrm>
+            <a:off x="2798064" y="1130199"/>
+            <a:ext cx="307238" cy="307238"/>
+          </a:xfrm>
+          <a:prstGeom prst="rect">
+            <a:avLst/>
+          </a:prstGeom>
+          <a:solidFill>
+            <a:srgbClr val="148943"/>
+          </a:solidFill>
+          <a:ln>
+            <a:noFill/>
+          </a:ln>
+        </p:spPr>
+        <p:style>
+          <a:lnRef idx="1">
+            <a:schemeClr val="accent1"/>
+          </a:lnRef>
+          <a:fillRef idx="3">
+            <a:schemeClr val="accent1"/>
+          </a:fillRef>
+          <a:effectRef idx="2">
+            <a:schemeClr val="accent1"/>
+          </a:effectRef>
+          <a:fontRef idx="minor">
+            <a:schemeClr val="lt1"/>
+          </a:fontRef>
+        </p:style>
+        <p:txBody>
+          <a:bodyPr rtlCol="0" anchor="ctr"/>
+          <a:lstStyle/>
+          <a:p>
+            <a:pPr algn="ctr"/>
+            <a:endParaRPr sz="2160"/>
+          </a:p>
+        </p:txBody>
+      </p:sp>
+      <p:sp>
+        <p:nvSpPr>
+          <p:cNvPr id="11" name="TextBox 10"/>
+          <p:cNvSpPr txBox="1"/>
+          <p:nvPr/>
+        </p:nvSpPr>
+        <p:spPr>
+          <a:xfrm>
+            <a:off x="2803549" y="1157631"/>
+            <a:ext cx="296266" cy="203133"/>
+          </a:xfrm>
+          <a:prstGeom prst="rect">
+            <a:avLst/>
+          </a:prstGeom>
+          <a:noFill/>
+        </p:spPr>
+        <p:txBody>
+          <a:bodyPr wrap="square" lIns="0" tIns="0" rIns="0" bIns="0" anchor="t">
+            <a:spAutoFit/>
+          </a:bodyPr>
+          <a:lstStyle/>
+          <a:p>
+            <a:pPr algn="ctr"/>
+            <a:r>
+              <a:rPr sz="1320" b="1">
+                <a:solidFill>
+                  <a:srgbClr val="FFFFFF"/>
+                </a:solidFill>
+                <a:latin typeface="Aptos"/>
+              </a:rPr>
+              <a:t>2</a:t>
+            </a:r>
+          </a:p>
+        </p:txBody>
+      </p:sp>
+      <p:sp>
+        <p:nvSpPr>
+          <p:cNvPr id="12" name="TextBox 11"/>
+          <p:cNvSpPr txBox="1"/>
+          <p:nvPr/>
+        </p:nvSpPr>
+        <p:spPr>
+          <a:xfrm>
+            <a:off x="3204057" y="1119226"/>
+            <a:ext cx="2545690" cy="383773"/>
+          </a:xfrm>
+          <a:prstGeom prst="rect">
+            <a:avLst/>
+          </a:prstGeom>
+          <a:noFill/>
+        </p:spPr>
+        <p:txBody>
+          <a:bodyPr wrap="square" lIns="21946" tIns="21946" rIns="21946" bIns="21946" anchor="t">
+            <a:spAutoFit/>
+          </a:bodyPr>
+          <a:lstStyle/>
+          <a:p>
+            <a:pPr algn="l"/>
+            <a:r>
+              <a:rPr sz="1103" b="1">
+                <a:solidFill>
+                  <a:srgbClr val="000000"/>
+                </a:solidFill>
+                <a:latin typeface="Aptos"/>
+              </a:rPr>
+              <a:t>Foundation Protection /
+BAU Base</a:t>
+            </a:r>
+          </a:p>
+        </p:txBody>
+      </p:sp>
+      <p:cxnSp>
+        <p:nvCxnSpPr>
+          <p:cNvPr id="13" name="Connector 12"/>
+          <p:cNvCxnSpPr/>
+          <p:nvPr/>
+        </p:nvCxnSpPr>
+        <p:spPr>
+          <a:xfrm>
+            <a:off x="2798064" y="1547165"/>
+            <a:ext cx="2940710" cy="0"/>
+          </a:xfrm>
+          <a:prstGeom prst="line">
+            <a:avLst/>
+          </a:prstGeom>
+          <a:ln w="13970">
+            <a:solidFill>
+              <a:srgbClr val="148943"/>
+            </a:solidFill>
+          </a:ln>
+        </p:spPr>
+        <p:style>
+          <a:lnRef idx="2">
+            <a:schemeClr val="accent1"/>
+          </a:lnRef>
+          <a:fillRef idx="0">
+            <a:schemeClr val="accent1"/>
+          </a:fillRef>
+          <a:effectRef idx="1">
+            <a:schemeClr val="accent1"/>
+          </a:effectRef>
+          <a:fontRef idx="minor">
+            <a:schemeClr val="tx1"/>
+          </a:fontRef>
+        </p:style>
+      </p:cxnSp>
+      <p:sp>
+        <p:nvSpPr>
+          <p:cNvPr id="14" name="TextBox 13"/>
+          <p:cNvSpPr txBox="1"/>
+          <p:nvPr/>
+        </p:nvSpPr>
+        <p:spPr>
+          <a:xfrm>
+            <a:off x="2798064" y="1656893"/>
+            <a:ext cx="2940710" cy="454241"/>
+          </a:xfrm>
+          <a:prstGeom prst="rect">
+            <a:avLst/>
+          </a:prstGeom>
+          <a:noFill/>
+        </p:spPr>
+        <p:txBody>
+          <a:bodyPr wrap="square" lIns="21946" tIns="21946" rIns="21946" bIns="21946" anchor="t">
+            <a:spAutoFit/>
+          </a:bodyPr>
+          <a:lstStyle/>
+          <a:p>
+            <a:pPr algn="l"/>
+            <a:r>
+              <a:rPr sz="888">
+                <a:solidFill>
+                  <a:srgbClr val="4D5054"/>
+                </a:solidFill>
+                <a:latin typeface="Aptos"/>
+              </a:rPr>
+              <a:t>Credit for maintaining the business engine,
+protecting the GC base, and capturing
+incremental BAU improvements.</a:t>
+            </a:r>
+          </a:p>
+        </p:txBody>
+      </p:sp>
+      <p:cxnSp>
+        <p:nvCxnSpPr>
+          <p:cNvPr id="15" name="Connector 14"/>
+          <p:cNvCxnSpPr/>
+          <p:nvPr/>
+        </p:nvCxnSpPr>
+        <p:spPr>
+          <a:xfrm>
+            <a:off x="2644444" y="1097280"/>
+            <a:ext cx="0" cy="1119226"/>
+          </a:xfrm>
+          <a:prstGeom prst="line">
+            <a:avLst/>
+          </a:prstGeom>
+          <a:ln w="7620">
+            <a:solidFill>
+              <a:srgbClr val="D9DDE2"/>
+            </a:solidFill>
+          </a:ln>
+        </p:spPr>
+        <p:style>
+          <a:lnRef idx="2">
+            <a:schemeClr val="accent1"/>
+          </a:lnRef>
+          <a:fillRef idx="0">
+            <a:schemeClr val="accent1"/>
+          </a:fillRef>
+          <a:effectRef idx="1">
+            <a:schemeClr val="accent1"/>
+          </a:effectRef>
+          <a:fontRef idx="minor">
+            <a:schemeClr val="tx1"/>
+          </a:fontRef>
+        </p:style>
+      </p:cxnSp>
+      <p:sp>
+        <p:nvSpPr>
+          <p:cNvPr id="16" name="Rectangle 15"/>
+          <p:cNvSpPr/>
+          <p:nvPr/>
+        </p:nvSpPr>
+        <p:spPr>
+          <a:xfrm>
+            <a:off x="5980176" y="1130199"/>
+            <a:ext cx="307238" cy="307238"/>
+          </a:xfrm>
+          <a:prstGeom prst="rect">
+            <a:avLst/>
+          </a:prstGeom>
+          <a:solidFill>
+            <a:srgbClr val="EC5C17"/>
+          </a:solidFill>
+          <a:ln>
+            <a:noFill/>
+          </a:ln>
+        </p:spPr>
+        <p:style>
+          <a:lnRef idx="1">
+            <a:schemeClr val="accent1"/>
+          </a:lnRef>
+          <a:fillRef idx="3">
+            <a:schemeClr val="accent1"/>
+          </a:fillRef>
+          <a:effectRef idx="2">
+            <a:schemeClr val="accent1"/>
+          </a:effectRef>
+          <a:fontRef idx="minor">
+            <a:schemeClr val="lt1"/>
+          </a:fontRef>
+        </p:style>
+        <p:txBody>
+          <a:bodyPr rtlCol="0" anchor="ctr"/>
+          <a:lstStyle/>
+          <a:p>
+            <a:pPr algn="ctr"/>
+            <a:endParaRPr sz="2160"/>
+          </a:p>
+        </p:txBody>
+      </p:sp>
+      <p:sp>
+        <p:nvSpPr>
+          <p:cNvPr id="17" name="TextBox 16"/>
+          <p:cNvSpPr txBox="1"/>
+          <p:nvPr/>
+        </p:nvSpPr>
+        <p:spPr>
+          <a:xfrm>
+            <a:off x="5985662" y="1157631"/>
+            <a:ext cx="296266" cy="203133"/>
+          </a:xfrm>
+          <a:prstGeom prst="rect">
+            <a:avLst/>
+          </a:prstGeom>
+          <a:noFill/>
+        </p:spPr>
+        <p:txBody>
+          <a:bodyPr wrap="square" lIns="0" tIns="0" rIns="0" bIns="0" anchor="t">
+            <a:spAutoFit/>
+          </a:bodyPr>
+          <a:lstStyle/>
+          <a:p>
+            <a:pPr algn="ctr"/>
+            <a:r>
+              <a:rPr sz="1320" b="1">
+                <a:solidFill>
+                  <a:srgbClr val="FFFFFF"/>
+                </a:solidFill>
+                <a:latin typeface="Aptos"/>
+              </a:rPr>
+              <a:t>3</a:t>
+            </a:r>
+          </a:p>
+        </p:txBody>
+      </p:sp>
+      <p:sp>
+        <p:nvSpPr>
+          <p:cNvPr id="18" name="TextBox 17"/>
+          <p:cNvSpPr txBox="1"/>
+          <p:nvPr/>
+        </p:nvSpPr>
+        <p:spPr>
+          <a:xfrm>
+            <a:off x="6386169" y="1119226"/>
+            <a:ext cx="1777594" cy="214047"/>
+          </a:xfrm>
+          <a:prstGeom prst="rect">
+            <a:avLst/>
+          </a:prstGeom>
+          <a:noFill/>
+        </p:spPr>
+        <p:txBody>
+          <a:bodyPr wrap="square" lIns="21946" tIns="21946" rIns="21946" bIns="21946" anchor="t">
+            <a:spAutoFit/>
+          </a:bodyPr>
+          <a:lstStyle/>
+          <a:p>
+            <a:pPr algn="l"/>
+            <a:r>
+              <a:rPr sz="1103" b="1">
+                <a:solidFill>
+                  <a:srgbClr val="000000"/>
+                </a:solidFill>
+                <a:latin typeface="Aptos"/>
+              </a:rPr>
+              <a:t>External Context</a:t>
+            </a:r>
+          </a:p>
+        </p:txBody>
+      </p:sp>
+      <p:cxnSp>
+        <p:nvCxnSpPr>
+          <p:cNvPr id="19" name="Connector 18"/>
+          <p:cNvCxnSpPr/>
+          <p:nvPr/>
+        </p:nvCxnSpPr>
+        <p:spPr>
+          <a:xfrm>
+            <a:off x="5980176" y="1547165"/>
+            <a:ext cx="2172614" cy="0"/>
+          </a:xfrm>
+          <a:prstGeom prst="line">
+            <a:avLst/>
+          </a:prstGeom>
+          <a:ln w="13970">
+            <a:solidFill>
+              <a:srgbClr val="EC5C17"/>
+            </a:solidFill>
+          </a:ln>
+        </p:spPr>
+        <p:style>
+          <a:lnRef idx="2">
+            <a:schemeClr val="accent1"/>
+          </a:lnRef>
+          <a:fillRef idx="0">
+            <a:schemeClr val="accent1"/>
+          </a:fillRef>
+          <a:effectRef idx="1">
+            <a:schemeClr val="accent1"/>
+          </a:effectRef>
+          <a:fontRef idx="minor">
+            <a:schemeClr val="tx1"/>
+          </a:fontRef>
+        </p:style>
+      </p:cxnSp>
+      <p:sp>
+        <p:nvSpPr>
+          <p:cNvPr id="20" name="TextBox 19"/>
+          <p:cNvSpPr txBox="1"/>
+          <p:nvPr/>
+        </p:nvSpPr>
+        <p:spPr>
+          <a:xfrm>
+            <a:off x="5980176" y="1656893"/>
+            <a:ext cx="2172614" cy="454241"/>
+          </a:xfrm>
+          <a:prstGeom prst="rect">
+            <a:avLst/>
+          </a:prstGeom>
+          <a:noFill/>
+        </p:spPr>
+        <p:txBody>
+          <a:bodyPr wrap="square" lIns="21946" tIns="21946" rIns="21946" bIns="21946" anchor="t">
+            <a:spAutoFit/>
+          </a:bodyPr>
+          <a:lstStyle/>
+          <a:p>
+            <a:pPr algn="l"/>
+            <a:r>
+              <a:rPr sz="888">
+                <a:solidFill>
+                  <a:srgbClr val="4D5054"/>
+                </a:solidFill>
+                <a:latin typeface="Aptos"/>
+              </a:rPr>
+              <a:t>External context
+not controlled by the business
+moves GC above or below base</a:t>
+            </a:r>
+          </a:p>
+        </p:txBody>
+      </p:sp>
+      <p:cxnSp>
+        <p:nvCxnSpPr>
+          <p:cNvPr id="21" name="Connector 20"/>
+          <p:cNvCxnSpPr/>
+          <p:nvPr/>
+        </p:nvCxnSpPr>
+        <p:spPr>
+          <a:xfrm>
+            <a:off x="5826557" y="1097280"/>
+            <a:ext cx="0" cy="1119226"/>
+          </a:xfrm>
+          <a:prstGeom prst="line">
+            <a:avLst/>
+          </a:prstGeom>
+          <a:ln w="7620">
+            <a:solidFill>
+              <a:srgbClr val="D9DDE2"/>
+            </a:solidFill>
+          </a:ln>
+        </p:spPr>
+        <p:style>
+          <a:lnRef idx="2">
+            <a:schemeClr val="accent1"/>
+          </a:lnRef>
+          <a:fillRef idx="0">
+            <a:schemeClr val="accent1"/>
+          </a:fillRef>
+          <a:effectRef idx="1">
+            <a:schemeClr val="accent1"/>
+          </a:effectRef>
+          <a:fontRef idx="minor">
+            <a:schemeClr val="tx1"/>
+          </a:fontRef>
+        </p:style>
+      </p:cxnSp>
+      <p:sp>
+        <p:nvSpPr>
+          <p:cNvPr id="22" name="Rectangle 21"/>
+          <p:cNvSpPr/>
+          <p:nvPr/>
+        </p:nvSpPr>
+        <p:spPr>
+          <a:xfrm>
+            <a:off x="8449056" y="1130199"/>
+            <a:ext cx="307238" cy="307238"/>
+          </a:xfrm>
+          <a:prstGeom prst="rect">
+            <a:avLst/>
+          </a:prstGeom>
+          <a:solidFill>
+            <a:srgbClr val="1C65D5"/>
+          </a:solidFill>
+          <a:ln>
+            <a:noFill/>
+          </a:ln>
+        </p:spPr>
+        <p:style>
+          <a:lnRef idx="1">
+            <a:schemeClr val="accent1"/>
+          </a:lnRef>
+          <a:fillRef idx="3">
+            <a:schemeClr val="accent1"/>
+          </a:fillRef>
+          <a:effectRef idx="2">
+            <a:schemeClr val="accent1"/>
+          </a:effectRef>
+          <a:fontRef idx="minor">
+            <a:schemeClr val="lt1"/>
+          </a:fontRef>
+        </p:style>
+        <p:txBody>
+          <a:bodyPr rtlCol="0" anchor="ctr"/>
+          <a:lstStyle/>
+          <a:p>
+            <a:pPr algn="ctr"/>
+            <a:endParaRPr sz="2160"/>
+          </a:p>
+        </p:txBody>
+      </p:sp>
+      <p:sp>
+        <p:nvSpPr>
+          <p:cNvPr id="23" name="TextBox 22"/>
+          <p:cNvSpPr txBox="1"/>
+          <p:nvPr/>
+        </p:nvSpPr>
+        <p:spPr>
+          <a:xfrm>
+            <a:off x="8454542" y="1157631"/>
+            <a:ext cx="296266" cy="203133"/>
+          </a:xfrm>
+          <a:prstGeom prst="rect">
+            <a:avLst/>
+          </a:prstGeom>
+          <a:noFill/>
+        </p:spPr>
+        <p:txBody>
+          <a:bodyPr wrap="square" lIns="0" tIns="0" rIns="0" bIns="0" anchor="t">
+            <a:spAutoFit/>
+          </a:bodyPr>
+          <a:lstStyle/>
+          <a:p>
+            <a:pPr algn="ctr"/>
+            <a:r>
+              <a:rPr sz="1320" b="1">
+                <a:solidFill>
+                  <a:srgbClr val="FFFFFF"/>
+                </a:solidFill>
+                <a:latin typeface="Aptos"/>
+              </a:rPr>
+              <a:t>4</a:t>
+            </a:r>
+          </a:p>
+        </p:txBody>
+      </p:sp>
+      <p:sp>
+        <p:nvSpPr>
+          <p:cNvPr id="24" name="TextBox 23"/>
+          <p:cNvSpPr txBox="1"/>
+          <p:nvPr/>
+        </p:nvSpPr>
+        <p:spPr>
+          <a:xfrm>
+            <a:off x="8855049" y="1119226"/>
+            <a:ext cx="1997050" cy="383773"/>
+          </a:xfrm>
+          <a:prstGeom prst="rect">
+            <a:avLst/>
+          </a:prstGeom>
+          <a:noFill/>
+        </p:spPr>
+        <p:txBody>
+          <a:bodyPr wrap="square" lIns="21946" tIns="21946" rIns="21946" bIns="21946" anchor="t">
+            <a:spAutoFit/>
+          </a:bodyPr>
+          <a:lstStyle/>
+          <a:p>
+            <a:pPr algn="l"/>
+            <a:r>
+              <a:rPr sz="1103" b="1">
+                <a:solidFill>
+                  <a:srgbClr val="000000"/>
+                </a:solidFill>
+                <a:latin typeface="Aptos"/>
+              </a:rPr>
+              <a:t>Growth Movement /
+Campaign Actions</a:t>
+            </a:r>
+          </a:p>
+        </p:txBody>
+      </p:sp>
+      <p:cxnSp>
+        <p:nvCxnSpPr>
+          <p:cNvPr id="25" name="Connector 24"/>
+          <p:cNvCxnSpPr/>
+          <p:nvPr/>
+        </p:nvCxnSpPr>
+        <p:spPr>
+          <a:xfrm>
+            <a:off x="8449056" y="1547165"/>
+            <a:ext cx="2392070" cy="0"/>
+          </a:xfrm>
+          <a:prstGeom prst="line">
+            <a:avLst/>
+          </a:prstGeom>
+          <a:ln w="13970">
+            <a:solidFill>
+              <a:srgbClr val="1C65D5"/>
+            </a:solidFill>
+          </a:ln>
+        </p:spPr>
+        <p:style>
+          <a:lnRef idx="2">
+            <a:schemeClr val="accent1"/>
+          </a:lnRef>
+          <a:fillRef idx="0">
+            <a:schemeClr val="accent1"/>
+          </a:fillRef>
+          <a:effectRef idx="1">
+            <a:schemeClr val="accent1"/>
+          </a:effectRef>
+          <a:fontRef idx="minor">
+            <a:schemeClr val="tx1"/>
+          </a:fontRef>
+        </p:style>
+      </p:cxnSp>
+      <p:sp>
+        <p:nvSpPr>
+          <p:cNvPr id="26" name="TextBox 25"/>
+          <p:cNvSpPr txBox="1"/>
+          <p:nvPr/>
+        </p:nvSpPr>
+        <p:spPr>
+          <a:xfrm>
+            <a:off x="8449056" y="1656893"/>
+            <a:ext cx="2392070" cy="454241"/>
+          </a:xfrm>
+          <a:prstGeom prst="rect">
+            <a:avLst/>
+          </a:prstGeom>
+          <a:noFill/>
+        </p:spPr>
+        <p:txBody>
+          <a:bodyPr wrap="square" lIns="21946" tIns="21946" rIns="21946" bIns="21946" anchor="t">
+            <a:spAutoFit/>
+          </a:bodyPr>
+          <a:lstStyle/>
+          <a:p>
+            <a:pPr algn="l"/>
+            <a:r>
+              <a:rPr sz="888">
+                <a:solidFill>
+                  <a:srgbClr val="4D5054"/>
+                </a:solidFill>
+                <a:latin typeface="Aptos"/>
+              </a:rPr>
+              <a:t>Commercial movement
+moves GC above the
+protected base</a:t>
+            </a:r>
+          </a:p>
+        </p:txBody>
+      </p:sp>
+      <p:cxnSp>
+        <p:nvCxnSpPr>
+          <p:cNvPr id="27" name="Connector 26"/>
+          <p:cNvCxnSpPr/>
+          <p:nvPr/>
+        </p:nvCxnSpPr>
+        <p:spPr>
+          <a:xfrm>
+            <a:off x="8295437" y="1097280"/>
+            <a:ext cx="0" cy="1119226"/>
+          </a:xfrm>
+          <a:prstGeom prst="line">
+            <a:avLst/>
+          </a:prstGeom>
+          <a:ln w="7620">
+            <a:solidFill>
+              <a:srgbClr val="D9DDE2"/>
+            </a:solidFill>
+          </a:ln>
+        </p:spPr>
+        <p:style>
+          <a:lnRef idx="2">
+            <a:schemeClr val="accent1"/>
+          </a:lnRef>
+          <a:fillRef idx="0">
+            <a:schemeClr val="accent1"/>
+          </a:fillRef>
+          <a:effectRef idx="1">
+            <a:schemeClr val="accent1"/>
+          </a:effectRef>
+          <a:fontRef idx="minor">
+            <a:schemeClr val="tx1"/>
+          </a:fontRef>
+        </p:style>
+      </p:cxnSp>
+      <p:sp>
+        <p:nvSpPr>
+          <p:cNvPr id="28" name="Rectangle 27"/>
+          <p:cNvSpPr/>
+          <p:nvPr/>
+        </p:nvSpPr>
+        <p:spPr>
+          <a:xfrm>
+            <a:off x="11104474" y="1130199"/>
+            <a:ext cx="307238" cy="307238"/>
+          </a:xfrm>
+          <a:prstGeom prst="rect">
+            <a:avLst/>
+          </a:prstGeom>
+          <a:solidFill>
+            <a:srgbClr val="4D5054"/>
+          </a:solidFill>
+          <a:ln>
+            <a:noFill/>
+          </a:ln>
+        </p:spPr>
+        <p:style>
+          <a:lnRef idx="1">
+            <a:schemeClr val="accent1"/>
+          </a:lnRef>
+          <a:fillRef idx="3">
+            <a:schemeClr val="accent1"/>
+          </a:fillRef>
+          <a:effectRef idx="2">
+            <a:schemeClr val="accent1"/>
+          </a:effectRef>
+          <a:fontRef idx="minor">
+            <a:schemeClr val="lt1"/>
+          </a:fontRef>
+        </p:style>
+        <p:txBody>
+          <a:bodyPr rtlCol="0" anchor="ctr"/>
+          <a:lstStyle/>
+          <a:p>
+            <a:pPr algn="ctr"/>
+            <a:endParaRPr sz="2160"/>
+          </a:p>
+        </p:txBody>
+      </p:sp>
+      <p:sp>
+        <p:nvSpPr>
+          <p:cNvPr id="29" name="TextBox 28"/>
+          <p:cNvSpPr txBox="1"/>
+          <p:nvPr/>
+        </p:nvSpPr>
+        <p:spPr>
+          <a:xfrm>
+            <a:off x="11109960" y="1157631"/>
+            <a:ext cx="296266" cy="203133"/>
+          </a:xfrm>
+          <a:prstGeom prst="rect">
+            <a:avLst/>
+          </a:prstGeom>
+          <a:noFill/>
+        </p:spPr>
+        <p:txBody>
+          <a:bodyPr wrap="square" lIns="0" tIns="0" rIns="0" bIns="0" anchor="t">
+            <a:spAutoFit/>
+          </a:bodyPr>
+          <a:lstStyle/>
+          <a:p>
+            <a:pPr algn="ctr"/>
+            <a:r>
+              <a:rPr sz="1320" b="1">
+                <a:solidFill>
+                  <a:srgbClr val="FFFFFF"/>
+                </a:solidFill>
+                <a:latin typeface="Aptos"/>
+              </a:rPr>
+              <a:t>5</a:t>
+            </a:r>
+          </a:p>
+        </p:txBody>
+      </p:sp>
+      <p:sp>
+        <p:nvSpPr>
+          <p:cNvPr id="30" name="TextBox 29"/>
+          <p:cNvSpPr txBox="1"/>
+          <p:nvPr/>
+        </p:nvSpPr>
+        <p:spPr>
+          <a:xfrm>
+            <a:off x="11510466" y="1119226"/>
+            <a:ext cx="1305763" cy="214047"/>
+          </a:xfrm>
+          <a:prstGeom prst="rect">
+            <a:avLst/>
+          </a:prstGeom>
+          <a:noFill/>
+        </p:spPr>
+        <p:txBody>
+          <a:bodyPr wrap="square" lIns="21946" tIns="21946" rIns="21946" bIns="21946" anchor="t">
+            <a:spAutoFit/>
+          </a:bodyPr>
+          <a:lstStyle/>
+          <a:p>
+            <a:pPr algn="l"/>
+            <a:r>
+              <a:rPr sz="1103" b="1">
+                <a:solidFill>
+                  <a:srgbClr val="000000"/>
+                </a:solidFill>
+                <a:latin typeface="Aptos"/>
+              </a:rPr>
+              <a:t>Gap / Residual</a:t>
+            </a:r>
+          </a:p>
+        </p:txBody>
+      </p:sp>
+      <p:cxnSp>
+        <p:nvCxnSpPr>
+          <p:cNvPr id="31" name="Connector 30"/>
+          <p:cNvCxnSpPr/>
+          <p:nvPr/>
+        </p:nvCxnSpPr>
+        <p:spPr>
+          <a:xfrm>
+            <a:off x="11104474" y="1547165"/>
+            <a:ext cx="1700784" cy="0"/>
+          </a:xfrm>
+          <a:prstGeom prst="line">
+            <a:avLst/>
+          </a:prstGeom>
+          <a:ln w="13970">
+            <a:solidFill>
+              <a:srgbClr val="4D5054"/>
+            </a:solidFill>
+          </a:ln>
+        </p:spPr>
+        <p:style>
+          <a:lnRef idx="2">
+            <a:schemeClr val="accent1"/>
+          </a:lnRef>
+          <a:fillRef idx="0">
+            <a:schemeClr val="accent1"/>
+          </a:fillRef>
+          <a:effectRef idx="1">
+            <a:schemeClr val="accent1"/>
+          </a:effectRef>
+          <a:fontRef idx="minor">
+            <a:schemeClr val="tx1"/>
+          </a:fontRef>
+        </p:style>
+      </p:cxnSp>
+      <p:sp>
+        <p:nvSpPr>
+          <p:cNvPr id="32" name="TextBox 31"/>
+          <p:cNvSpPr txBox="1"/>
+          <p:nvPr/>
+        </p:nvSpPr>
+        <p:spPr>
+          <a:xfrm>
+            <a:off x="11104474" y="1656893"/>
+            <a:ext cx="1700784" cy="317601"/>
+          </a:xfrm>
+          <a:prstGeom prst="rect">
+            <a:avLst/>
+          </a:prstGeom>
+          <a:noFill/>
+        </p:spPr>
+        <p:txBody>
+          <a:bodyPr wrap="square" lIns="21946" tIns="21946" rIns="21946" bIns="21946" anchor="t">
+            <a:spAutoFit/>
+          </a:bodyPr>
+          <a:lstStyle/>
+          <a:p>
+            <a:pPr algn="l"/>
+            <a:r>
+              <a:rPr sz="888">
+                <a:solidFill>
+                  <a:srgbClr val="4D5054"/>
+                </a:solidFill>
+                <a:latin typeface="Aptos"/>
+              </a:rPr>
+              <a:t>Remaining gap
+not fully measured</a:t>
+            </a:r>
+          </a:p>
+        </p:txBody>
+      </p:sp>
+      <p:cxnSp>
+        <p:nvCxnSpPr>
+          <p:cNvPr id="33" name="Connector 32"/>
+          <p:cNvCxnSpPr/>
+          <p:nvPr/>
+        </p:nvCxnSpPr>
+        <p:spPr>
+          <a:xfrm>
+            <a:off x="10950853" y="1097280"/>
+            <a:ext cx="0" cy="1119226"/>
+          </a:xfrm>
+          <a:prstGeom prst="line">
+            <a:avLst/>
+          </a:prstGeom>
+          <a:ln w="7620">
+            <a:solidFill>
+              <a:srgbClr val="D9DDE2"/>
+            </a:solidFill>
+          </a:ln>
+        </p:spPr>
+        <p:style>
+          <a:lnRef idx="2">
+            <a:schemeClr val="accent1"/>
+          </a:lnRef>
+          <a:fillRef idx="0">
+            <a:schemeClr val="accent1"/>
+          </a:fillRef>
+          <a:effectRef idx="1">
+            <a:schemeClr val="accent1"/>
+          </a:effectRef>
+          <a:fontRef idx="minor">
+            <a:schemeClr val="tx1"/>
+          </a:fontRef>
+        </p:style>
+      </p:cxnSp>
+      <p:sp>
+        <p:nvSpPr>
+          <p:cNvPr id="34" name="Rectangle 33"/>
+          <p:cNvSpPr/>
+          <p:nvPr/>
+        </p:nvSpPr>
+        <p:spPr>
+          <a:xfrm>
+            <a:off x="274320" y="4800600"/>
+            <a:ext cx="373075" cy="1102766"/>
+          </a:xfrm>
+          <a:prstGeom prst="rect">
+            <a:avLst/>
+          </a:prstGeom>
+          <a:solidFill>
+            <a:srgbClr val="081B49"/>
+          </a:solidFill>
+          <a:ln>
+            <a:noFill/>
+          </a:ln>
+        </p:spPr>
+        <p:style>
+          <a:lnRef idx="1">
+            <a:schemeClr val="accent1"/>
+          </a:lnRef>
+          <a:fillRef idx="3">
+            <a:schemeClr val="accent1"/>
+          </a:fillRef>
+          <a:effectRef idx="2">
+            <a:schemeClr val="accent1"/>
+          </a:effectRef>
+          <a:fontRef idx="minor">
+            <a:schemeClr val="lt1"/>
+          </a:fontRef>
+        </p:style>
+        <p:txBody>
+          <a:bodyPr rtlCol="0" anchor="ctr"/>
+          <a:lstStyle/>
+          <a:p>
+            <a:pPr algn="ctr"/>
+            <a:endParaRPr sz="2160"/>
+          </a:p>
+        </p:txBody>
+      </p:sp>
+      <p:sp>
+        <p:nvSpPr>
+          <p:cNvPr id="35" name="TextBox 34"/>
+          <p:cNvSpPr txBox="1"/>
+          <p:nvPr/>
+        </p:nvSpPr>
+        <p:spPr>
+          <a:xfrm>
+            <a:off x="142647" y="4471417"/>
+            <a:ext cx="636422" cy="350815"/>
+          </a:xfrm>
+          <a:prstGeom prst="rect">
+            <a:avLst/>
+          </a:prstGeom>
+          <a:noFill/>
+        </p:spPr>
+        <p:txBody>
+          <a:bodyPr wrap="square" lIns="21946" tIns="21946" rIns="21946" bIns="21946" anchor="t">
+            <a:spAutoFit/>
+          </a:bodyPr>
+          <a:lstStyle/>
+          <a:p>
+            <a:pPr algn="ctr"/>
+            <a:r>
+              <a:rPr sz="996" b="1">
+                <a:solidFill>
+                  <a:srgbClr val="000000"/>
+                </a:solidFill>
+                <a:latin typeface="Aptos"/>
+              </a:rPr>
+              <a:t>330M
+(100.0%)</a:t>
+            </a:r>
+          </a:p>
+        </p:txBody>
+      </p:sp>
+      <p:sp>
+        <p:nvSpPr>
+          <p:cNvPr id="36" name="TextBox 35"/>
+          <p:cNvSpPr txBox="1"/>
+          <p:nvPr/>
+        </p:nvSpPr>
+        <p:spPr>
+          <a:xfrm>
+            <a:off x="164592" y="5952745"/>
+            <a:ext cx="592531" cy="288105"/>
+          </a:xfrm>
+          <a:prstGeom prst="rect">
+            <a:avLst/>
+          </a:prstGeom>
+          <a:noFill/>
+        </p:spPr>
+        <p:txBody>
+          <a:bodyPr wrap="square" lIns="21946" tIns="21946" rIns="21946" bIns="21946" anchor="t">
+            <a:spAutoFit/>
+          </a:bodyPr>
+          <a:lstStyle/>
+          <a:p>
+            <a:pPr algn="ctr"/>
+            <a:r>
+              <a:rPr sz="792" b="1">
+                <a:solidFill>
+                  <a:srgbClr val="000000"/>
+                </a:solidFill>
+                <a:latin typeface="Aptos"/>
+              </a:rPr>
+              <a:t>2024
+Actual GC</a:t>
+            </a:r>
+          </a:p>
+        </p:txBody>
+      </p:sp>
+      <p:sp>
+        <p:nvSpPr>
+          <p:cNvPr id="37" name="Rectangle 36"/>
+          <p:cNvSpPr/>
+          <p:nvPr/>
+        </p:nvSpPr>
+        <p:spPr>
+          <a:xfrm>
+            <a:off x="1228954" y="5535778"/>
+            <a:ext cx="373075" cy="367589"/>
+          </a:xfrm>
+          <a:prstGeom prst="rect">
+            <a:avLst/>
+          </a:prstGeom>
+          <a:solidFill>
+            <a:srgbClr val="909499"/>
+          </a:solidFill>
+          <a:ln>
+            <a:noFill/>
+          </a:ln>
+        </p:spPr>
+        <p:style>
+          <a:lnRef idx="1">
+            <a:schemeClr val="accent1"/>
+          </a:lnRef>
+          <a:fillRef idx="3">
+            <a:schemeClr val="accent1"/>
+          </a:fillRef>
+          <a:effectRef idx="2">
+            <a:schemeClr val="accent1"/>
+          </a:effectRef>
+          <a:fontRef idx="minor">
+            <a:schemeClr val="lt1"/>
+          </a:fontRef>
+        </p:style>
+        <p:txBody>
+          <a:bodyPr rtlCol="0" anchor="ctr"/>
+          <a:lstStyle/>
+          <a:p>
+            <a:pPr algn="ctr"/>
+            <a:endParaRPr sz="2160"/>
+          </a:p>
+        </p:txBody>
+      </p:sp>
+      <p:sp>
+        <p:nvSpPr>
+          <p:cNvPr id="38" name="TextBox 37"/>
+          <p:cNvSpPr txBox="1"/>
+          <p:nvPr/>
+        </p:nvSpPr>
+        <p:spPr>
+          <a:xfrm>
+            <a:off x="1097280" y="5206594"/>
+            <a:ext cx="636422" cy="350815"/>
+          </a:xfrm>
+          <a:prstGeom prst="rect">
+            <a:avLst/>
+          </a:prstGeom>
+          <a:noFill/>
+        </p:spPr>
+        <p:txBody>
+          <a:bodyPr wrap="square" lIns="21946" tIns="21946" rIns="21946" bIns="21946" anchor="t">
+            <a:spAutoFit/>
+          </a:bodyPr>
+          <a:lstStyle/>
+          <a:p>
+            <a:pPr algn="ctr"/>
+            <a:r>
+              <a:rPr sz="996" b="1">
+                <a:solidFill>
+                  <a:srgbClr val="000000"/>
+                </a:solidFill>
+                <a:latin typeface="Aptos"/>
+              </a:rPr>
+              <a:t>310M
+(93.9%)</a:t>
+            </a:r>
+          </a:p>
+        </p:txBody>
+      </p:sp>
+      <p:sp>
+        <p:nvSpPr>
+          <p:cNvPr id="39" name="TextBox 38"/>
+          <p:cNvSpPr txBox="1"/>
+          <p:nvPr/>
+        </p:nvSpPr>
+        <p:spPr>
+          <a:xfrm>
+            <a:off x="1119226" y="5952745"/>
+            <a:ext cx="592531" cy="653783"/>
+          </a:xfrm>
+          <a:prstGeom prst="rect">
+            <a:avLst/>
+          </a:prstGeom>
+          <a:noFill/>
+        </p:spPr>
+        <p:txBody>
+          <a:bodyPr wrap="square" lIns="21946" tIns="21946" rIns="21946" bIns="21946" anchor="t">
+            <a:spAutoFit/>
+          </a:bodyPr>
+          <a:lstStyle/>
+          <a:p>
+            <a:pPr algn="ctr"/>
+            <a:r>
+              <a:rPr sz="792" b="1">
+                <a:solidFill>
+                  <a:srgbClr val="000000"/>
+                </a:solidFill>
+                <a:latin typeface="Aptos"/>
+              </a:rPr>
+              <a:t>Weak
+Foundation
+Base
+(counterfactual)</a:t>
+            </a:r>
+          </a:p>
+        </p:txBody>
+      </p:sp>
+      <p:cxnSp>
+        <p:nvCxnSpPr>
+          <p:cNvPr id="40" name="Connector 39"/>
+          <p:cNvCxnSpPr/>
+          <p:nvPr/>
+        </p:nvCxnSpPr>
+        <p:spPr>
+          <a:xfrm>
+            <a:off x="647395" y="4800600"/>
+            <a:ext cx="581558" cy="735178"/>
+          </a:xfrm>
+          <a:prstGeom prst="line">
+            <a:avLst/>
+          </a:prstGeom>
+          <a:ln w="10795">
+            <a:solidFill>
+              <a:srgbClr val="4D5054"/>
+            </a:solidFill>
+            <a:prstDash val="dash"/>
+          </a:ln>
+        </p:spPr>
+        <p:style>
+          <a:lnRef idx="2">
+            <a:schemeClr val="accent1"/>
+          </a:lnRef>
+          <a:fillRef idx="0">
+            <a:schemeClr val="accent1"/>
+          </a:fillRef>
+          <a:effectRef idx="1">
+            <a:schemeClr val="accent1"/>
+          </a:effectRef>
+          <a:fontRef idx="minor">
+            <a:schemeClr val="tx1"/>
+          </a:fontRef>
+        </p:style>
+      </p:cxnSp>
+      <p:sp>
+        <p:nvSpPr>
+          <p:cNvPr id="41" name="Rectangle 40"/>
+          <p:cNvSpPr/>
+          <p:nvPr/>
+        </p:nvSpPr>
+        <p:spPr>
+          <a:xfrm>
+            <a:off x="1997050" y="5315224"/>
+            <a:ext cx="373075" cy="220553"/>
+          </a:xfrm>
+          <a:prstGeom prst="rect">
+            <a:avLst/>
+          </a:prstGeom>
+          <a:solidFill>
+            <a:srgbClr val="148943"/>
+          </a:solidFill>
+          <a:ln>
+            <a:noFill/>
+          </a:ln>
+        </p:spPr>
+        <p:style>
+          <a:lnRef idx="1">
+            <a:schemeClr val="accent1"/>
+          </a:lnRef>
+          <a:fillRef idx="3">
+            <a:schemeClr val="accent1"/>
+          </a:fillRef>
+          <a:effectRef idx="2">
+            <a:schemeClr val="accent1"/>
+          </a:effectRef>
+          <a:fontRef idx="minor">
+            <a:schemeClr val="lt1"/>
+          </a:fontRef>
+        </p:style>
+        <p:txBody>
+          <a:bodyPr rtlCol="0" anchor="ctr"/>
+          <a:lstStyle/>
+          <a:p>
+            <a:pPr algn="ctr"/>
+            <a:endParaRPr sz="2160"/>
+          </a:p>
+        </p:txBody>
+      </p:sp>
+      <p:sp>
+        <p:nvSpPr>
+          <p:cNvPr id="42" name="TextBox 41"/>
+          <p:cNvSpPr txBox="1"/>
+          <p:nvPr/>
+        </p:nvSpPr>
+        <p:spPr>
+          <a:xfrm>
+            <a:off x="1887322" y="5007985"/>
+            <a:ext cx="592531" cy="302853"/>
+          </a:xfrm>
+          <a:prstGeom prst="rect">
+            <a:avLst/>
+          </a:prstGeom>
+          <a:noFill/>
+        </p:spPr>
+        <p:txBody>
+          <a:bodyPr wrap="square" lIns="21946" tIns="21946" rIns="21946" bIns="21946" anchor="t">
+            <a:spAutoFit/>
+          </a:bodyPr>
+          <a:lstStyle/>
+          <a:p>
+            <a:pPr algn="ctr"/>
+            <a:r>
+              <a:rPr sz="840" b="1">
+                <a:solidFill>
+                  <a:srgbClr val="000000"/>
+                </a:solidFill>
+                <a:latin typeface="Aptos"/>
+              </a:rPr>
+              <a:t>+6M
+(+1.8%)</a:t>
+            </a:r>
+          </a:p>
+        </p:txBody>
+      </p:sp>
+      <p:sp>
+        <p:nvSpPr>
+          <p:cNvPr id="43" name="TextBox 42"/>
+          <p:cNvSpPr txBox="1"/>
+          <p:nvPr/>
+        </p:nvSpPr>
+        <p:spPr>
+          <a:xfrm>
+            <a:off x="1909267" y="5952744"/>
+            <a:ext cx="548640" cy="153261"/>
+          </a:xfrm>
+          <a:prstGeom prst="rect">
+            <a:avLst/>
+          </a:prstGeom>
+          <a:noFill/>
+        </p:spPr>
+        <p:txBody>
+          <a:bodyPr wrap="square" lIns="21946" tIns="21946" rIns="21946" bIns="21946" anchor="t">
+            <a:spAutoFit/>
+          </a:bodyPr>
+          <a:lstStyle/>
+          <a:p>
+            <a:pPr algn="ctr"/>
+            <a:r>
+              <a:rPr sz="708">
+                <a:solidFill>
+                  <a:srgbClr val="000000"/>
+                </a:solidFill>
+                <a:latin typeface="Aptos"/>
+              </a:rPr>
+              <a:t>Speed</a:t>
+            </a:r>
+          </a:p>
+        </p:txBody>
+      </p:sp>
+      <p:sp>
+        <p:nvSpPr>
+          <p:cNvPr id="44" name="Rectangle 43"/>
+          <p:cNvSpPr/>
+          <p:nvPr/>
+        </p:nvSpPr>
+        <p:spPr>
+          <a:xfrm>
+            <a:off x="2468880" y="5021153"/>
+            <a:ext cx="373075" cy="294071"/>
+          </a:xfrm>
+          <a:prstGeom prst="rect">
+            <a:avLst/>
+          </a:prstGeom>
+          <a:solidFill>
+            <a:srgbClr val="148943"/>
+          </a:solidFill>
+          <a:ln>
+            <a:noFill/>
+          </a:ln>
+        </p:spPr>
+        <p:style>
+          <a:lnRef idx="1">
+            <a:schemeClr val="accent1"/>
+          </a:lnRef>
+          <a:fillRef idx="3">
+            <a:schemeClr val="accent1"/>
+          </a:fillRef>
+          <a:effectRef idx="2">
+            <a:schemeClr val="accent1"/>
+          </a:effectRef>
+          <a:fontRef idx="minor">
+            <a:schemeClr val="lt1"/>
+          </a:fontRef>
+        </p:style>
+        <p:txBody>
+          <a:bodyPr rtlCol="0" anchor="ctr"/>
+          <a:lstStyle/>
+          <a:p>
+            <a:pPr algn="ctr"/>
+            <a:endParaRPr sz="2160"/>
+          </a:p>
+        </p:txBody>
+      </p:sp>
+      <p:sp>
+        <p:nvSpPr>
+          <p:cNvPr id="45" name="TextBox 44"/>
+          <p:cNvSpPr txBox="1"/>
+          <p:nvPr/>
+        </p:nvSpPr>
+        <p:spPr>
+          <a:xfrm>
+            <a:off x="2359152" y="4713915"/>
+            <a:ext cx="592531" cy="302853"/>
+          </a:xfrm>
+          <a:prstGeom prst="rect">
+            <a:avLst/>
+          </a:prstGeom>
+          <a:noFill/>
+        </p:spPr>
+        <p:txBody>
+          <a:bodyPr wrap="square" lIns="21946" tIns="21946" rIns="21946" bIns="21946" anchor="t">
+            <a:spAutoFit/>
+          </a:bodyPr>
+          <a:lstStyle/>
+          <a:p>
+            <a:pPr algn="ctr"/>
+            <a:r>
+              <a:rPr sz="840" b="1">
+                <a:solidFill>
+                  <a:srgbClr val="000000"/>
+                </a:solidFill>
+                <a:latin typeface="Aptos"/>
+              </a:rPr>
+              <a:t>+8M
+(+2.4%)</a:t>
+            </a:r>
+          </a:p>
+        </p:txBody>
+      </p:sp>
+      <p:sp>
+        <p:nvSpPr>
+          <p:cNvPr id="46" name="TextBox 45"/>
+          <p:cNvSpPr txBox="1"/>
+          <p:nvPr/>
+        </p:nvSpPr>
+        <p:spPr>
+          <a:xfrm>
+            <a:off x="2381098" y="5952744"/>
+            <a:ext cx="548640" cy="262201"/>
+          </a:xfrm>
+          <a:prstGeom prst="rect">
+            <a:avLst/>
+          </a:prstGeom>
+          <a:noFill/>
+        </p:spPr>
+        <p:txBody>
+          <a:bodyPr wrap="square" lIns="21946" tIns="21946" rIns="21946" bIns="21946" anchor="t">
+            <a:spAutoFit/>
+          </a:bodyPr>
+          <a:lstStyle/>
+          <a:p>
+            <a:pPr algn="ctr"/>
+            <a:r>
+              <a:rPr sz="708">
+                <a:solidFill>
+                  <a:srgbClr val="000000"/>
+                </a:solidFill>
+                <a:latin typeface="Aptos"/>
+              </a:rPr>
+              <a:t>Supply
+Chain</a:t>
+            </a:r>
+          </a:p>
+        </p:txBody>
+      </p:sp>
+      <p:sp>
+        <p:nvSpPr>
+          <p:cNvPr id="47" name="Rectangle 46"/>
+          <p:cNvSpPr/>
+          <p:nvPr/>
+        </p:nvSpPr>
+        <p:spPr>
+          <a:xfrm>
+            <a:off x="2940711" y="4910877"/>
+            <a:ext cx="373075" cy="110276"/>
+          </a:xfrm>
+          <a:prstGeom prst="rect">
+            <a:avLst/>
+          </a:prstGeom>
+          <a:solidFill>
+            <a:srgbClr val="148943"/>
+          </a:solidFill>
+          <a:ln>
+            <a:noFill/>
+          </a:ln>
+        </p:spPr>
+        <p:style>
+          <a:lnRef idx="1">
+            <a:schemeClr val="accent1"/>
+          </a:lnRef>
+          <a:fillRef idx="3">
+            <a:schemeClr val="accent1"/>
+          </a:fillRef>
+          <a:effectRef idx="2">
+            <a:schemeClr val="accent1"/>
+          </a:effectRef>
+          <a:fontRef idx="minor">
+            <a:schemeClr val="lt1"/>
+          </a:fontRef>
+        </p:style>
+        <p:txBody>
+          <a:bodyPr rtlCol="0" anchor="ctr"/>
+          <a:lstStyle/>
+          <a:p>
+            <a:pPr algn="ctr"/>
+            <a:endParaRPr sz="2160"/>
+          </a:p>
+        </p:txBody>
+      </p:sp>
+      <p:sp>
+        <p:nvSpPr>
+          <p:cNvPr id="48" name="TextBox 47"/>
+          <p:cNvSpPr txBox="1"/>
+          <p:nvPr/>
+        </p:nvSpPr>
+        <p:spPr>
+          <a:xfrm>
+            <a:off x="2830983" y="4603638"/>
+            <a:ext cx="592531" cy="302853"/>
+          </a:xfrm>
+          <a:prstGeom prst="rect">
+            <a:avLst/>
+          </a:prstGeom>
+          <a:noFill/>
+        </p:spPr>
+        <p:txBody>
+          <a:bodyPr wrap="square" lIns="21946" tIns="21946" rIns="21946" bIns="21946" anchor="t">
+            <a:spAutoFit/>
+          </a:bodyPr>
+          <a:lstStyle/>
+          <a:p>
+            <a:pPr algn="ctr"/>
+            <a:r>
+              <a:rPr sz="840" b="1">
+                <a:solidFill>
+                  <a:srgbClr val="000000"/>
+                </a:solidFill>
+                <a:latin typeface="Aptos"/>
+              </a:rPr>
+              <a:t>+3M
+(+0.9%)</a:t>
+            </a:r>
+          </a:p>
+        </p:txBody>
+      </p:sp>
+      <p:sp>
+        <p:nvSpPr>
+          <p:cNvPr id="49" name="TextBox 48"/>
+          <p:cNvSpPr txBox="1"/>
+          <p:nvPr/>
+        </p:nvSpPr>
+        <p:spPr>
+          <a:xfrm>
+            <a:off x="2852928" y="5952744"/>
+            <a:ext cx="548640" cy="153261"/>
+          </a:xfrm>
+          <a:prstGeom prst="rect">
+            <a:avLst/>
+          </a:prstGeom>
+          <a:noFill/>
+        </p:spPr>
+        <p:txBody>
+          <a:bodyPr wrap="square" lIns="21946" tIns="21946" rIns="21946" bIns="21946" anchor="t">
+            <a:spAutoFit/>
+          </a:bodyPr>
+          <a:lstStyle/>
+          <a:p>
+            <a:pPr algn="ctr"/>
+            <a:r>
+              <a:rPr sz="708">
+                <a:solidFill>
+                  <a:srgbClr val="000000"/>
+                </a:solidFill>
+                <a:latin typeface="Aptos"/>
+              </a:rPr>
+              <a:t>CSAT</a:t>
+            </a:r>
+          </a:p>
+        </p:txBody>
+      </p:sp>
+      <p:sp>
+        <p:nvSpPr>
+          <p:cNvPr id="50" name="Rectangle 49"/>
+          <p:cNvSpPr/>
+          <p:nvPr/>
+        </p:nvSpPr>
+        <p:spPr>
+          <a:xfrm>
+            <a:off x="3412541" y="4837358"/>
+            <a:ext cx="373075" cy="73517"/>
+          </a:xfrm>
+          <a:prstGeom prst="rect">
+            <a:avLst/>
+          </a:prstGeom>
+          <a:solidFill>
+            <a:srgbClr val="148943"/>
+          </a:solidFill>
+          <a:ln>
+            <a:noFill/>
+          </a:ln>
+        </p:spPr>
+        <p:style>
+          <a:lnRef idx="1">
+            <a:schemeClr val="accent1"/>
+          </a:lnRef>
+          <a:fillRef idx="3">
+            <a:schemeClr val="accent1"/>
+          </a:fillRef>
+          <a:effectRef idx="2">
+            <a:schemeClr val="accent1"/>
+          </a:effectRef>
+          <a:fontRef idx="minor">
+            <a:schemeClr val="lt1"/>
+          </a:fontRef>
+        </p:style>
+        <p:txBody>
+          <a:bodyPr rtlCol="0" anchor="ctr"/>
+          <a:lstStyle/>
+          <a:p>
+            <a:pPr algn="ctr"/>
+            <a:endParaRPr sz="2160"/>
+          </a:p>
+        </p:txBody>
+      </p:sp>
+      <p:sp>
+        <p:nvSpPr>
+          <p:cNvPr id="51" name="TextBox 50"/>
+          <p:cNvSpPr txBox="1"/>
+          <p:nvPr/>
+        </p:nvSpPr>
+        <p:spPr>
+          <a:xfrm>
+            <a:off x="3302813" y="4530120"/>
+            <a:ext cx="592531" cy="302853"/>
+          </a:xfrm>
+          <a:prstGeom prst="rect">
+            <a:avLst/>
+          </a:prstGeom>
+          <a:noFill/>
+        </p:spPr>
+        <p:txBody>
+          <a:bodyPr wrap="square" lIns="21946" tIns="21946" rIns="21946" bIns="21946" anchor="t">
+            <a:spAutoFit/>
+          </a:bodyPr>
+          <a:lstStyle/>
+          <a:p>
+            <a:pPr algn="ctr"/>
+            <a:r>
+              <a:rPr sz="840" b="1">
+                <a:solidFill>
+                  <a:srgbClr val="000000"/>
+                </a:solidFill>
+                <a:latin typeface="Aptos"/>
+              </a:rPr>
+              <a:t>+2M
+(+0.6%)</a:t>
+            </a:r>
+          </a:p>
+        </p:txBody>
+      </p:sp>
+      <p:sp>
+        <p:nvSpPr>
+          <p:cNvPr id="52" name="TextBox 51"/>
+          <p:cNvSpPr txBox="1"/>
+          <p:nvPr/>
+        </p:nvSpPr>
+        <p:spPr>
+          <a:xfrm>
+            <a:off x="3324758" y="5952744"/>
+            <a:ext cx="548640" cy="153261"/>
+          </a:xfrm>
+          <a:prstGeom prst="rect">
+            <a:avLst/>
+          </a:prstGeom>
+          <a:noFill/>
+        </p:spPr>
+        <p:txBody>
+          <a:bodyPr wrap="square" lIns="21946" tIns="21946" rIns="21946" bIns="21946" anchor="t">
+            <a:spAutoFit/>
+          </a:bodyPr>
+          <a:lstStyle/>
+          <a:p>
+            <a:pPr algn="ctr"/>
+            <a:r>
+              <a:rPr sz="708">
+                <a:solidFill>
+                  <a:srgbClr val="000000"/>
+                </a:solidFill>
+                <a:latin typeface="Aptos"/>
+              </a:rPr>
+              <a:t>Tech</a:t>
+            </a:r>
+          </a:p>
+        </p:txBody>
+      </p:sp>
+      <p:sp>
+        <p:nvSpPr>
+          <p:cNvPr id="53" name="Rectangle 52"/>
+          <p:cNvSpPr/>
+          <p:nvPr/>
+        </p:nvSpPr>
+        <p:spPr>
+          <a:xfrm>
+            <a:off x="3884371" y="4800600"/>
+            <a:ext cx="373075" cy="43891"/>
+          </a:xfrm>
+          <a:prstGeom prst="rect">
+            <a:avLst/>
+          </a:prstGeom>
+          <a:solidFill>
+            <a:srgbClr val="148943"/>
+          </a:solidFill>
+          <a:ln>
+            <a:noFill/>
+          </a:ln>
+        </p:spPr>
+        <p:style>
+          <a:lnRef idx="1">
+            <a:schemeClr val="accent1"/>
+          </a:lnRef>
+          <a:fillRef idx="3">
+            <a:schemeClr val="accent1"/>
+          </a:fillRef>
+          <a:effectRef idx="2">
+            <a:schemeClr val="accent1"/>
+          </a:effectRef>
+          <a:fontRef idx="minor">
+            <a:schemeClr val="lt1"/>
+          </a:fontRef>
+        </p:style>
+        <p:txBody>
+          <a:bodyPr rtlCol="0" anchor="ctr"/>
+          <a:lstStyle/>
+          <a:p>
+            <a:pPr algn="ctr"/>
+            <a:endParaRPr sz="2160"/>
+          </a:p>
+        </p:txBody>
+      </p:sp>
+      <p:sp>
+        <p:nvSpPr>
+          <p:cNvPr id="54" name="TextBox 53"/>
+          <p:cNvSpPr txBox="1"/>
+          <p:nvPr/>
+        </p:nvSpPr>
+        <p:spPr>
+          <a:xfrm>
+            <a:off x="3774643" y="4493362"/>
+            <a:ext cx="592531" cy="302853"/>
+          </a:xfrm>
+          <a:prstGeom prst="rect">
+            <a:avLst/>
+          </a:prstGeom>
+          <a:noFill/>
+        </p:spPr>
+        <p:txBody>
+          <a:bodyPr wrap="square" lIns="21946" tIns="21946" rIns="21946" bIns="21946" anchor="t">
+            <a:spAutoFit/>
+          </a:bodyPr>
+          <a:lstStyle/>
+          <a:p>
+            <a:pPr algn="ctr"/>
+            <a:r>
+              <a:rPr sz="840" b="1">
+                <a:solidFill>
+                  <a:srgbClr val="000000"/>
+                </a:solidFill>
+                <a:latin typeface="Aptos"/>
+              </a:rPr>
+              <a:t>+1M
+(+0.3%)</a:t>
+            </a:r>
+          </a:p>
+        </p:txBody>
+      </p:sp>
+      <p:sp>
+        <p:nvSpPr>
+          <p:cNvPr id="55" name="TextBox 54"/>
+          <p:cNvSpPr txBox="1"/>
+          <p:nvPr/>
+        </p:nvSpPr>
+        <p:spPr>
+          <a:xfrm>
+            <a:off x="3796589" y="5952744"/>
+            <a:ext cx="548640" cy="262201"/>
+          </a:xfrm>
+          <a:prstGeom prst="rect">
+            <a:avLst/>
+          </a:prstGeom>
+          <a:noFill/>
+        </p:spPr>
+        <p:txBody>
+          <a:bodyPr wrap="square" lIns="21946" tIns="21946" rIns="21946" bIns="21946" anchor="t">
+            <a:spAutoFit/>
+          </a:bodyPr>
+          <a:lstStyle/>
+          <a:p>
+            <a:pPr algn="ctr"/>
+            <a:r>
+              <a:rPr sz="708">
+                <a:solidFill>
+                  <a:srgbClr val="000000"/>
+                </a:solidFill>
+                <a:latin typeface="Aptos"/>
+              </a:rPr>
+              <a:t>People /
+Hours</a:t>
+            </a:r>
+          </a:p>
+        </p:txBody>
+      </p:sp>
+      <p:sp>
+        <p:nvSpPr>
+          <p:cNvPr id="56" name="Rectangle 55"/>
+          <p:cNvSpPr/>
+          <p:nvPr/>
+        </p:nvSpPr>
+        <p:spPr>
+          <a:xfrm>
+            <a:off x="4356202" y="4690323"/>
+            <a:ext cx="373075" cy="110276"/>
+          </a:xfrm>
+          <a:prstGeom prst="rect">
+            <a:avLst/>
+          </a:prstGeom>
+          <a:solidFill>
+            <a:srgbClr val="148943"/>
+          </a:solidFill>
+          <a:ln>
+            <a:noFill/>
+          </a:ln>
+        </p:spPr>
+        <p:style>
+          <a:lnRef idx="1">
+            <a:schemeClr val="accent1"/>
+          </a:lnRef>
+          <a:fillRef idx="3">
+            <a:schemeClr val="accent1"/>
+          </a:fillRef>
+          <a:effectRef idx="2">
+            <a:schemeClr val="accent1"/>
+          </a:effectRef>
+          <a:fontRef idx="minor">
+            <a:schemeClr val="lt1"/>
+          </a:fontRef>
+        </p:style>
+        <p:txBody>
+          <a:bodyPr rtlCol="0" anchor="ctr"/>
+          <a:lstStyle/>
+          <a:p>
+            <a:pPr algn="ctr"/>
+            <a:endParaRPr sz="2160"/>
+          </a:p>
+        </p:txBody>
+      </p:sp>
+      <p:sp>
+        <p:nvSpPr>
+          <p:cNvPr id="57" name="TextBox 56"/>
+          <p:cNvSpPr txBox="1"/>
+          <p:nvPr/>
+        </p:nvSpPr>
+        <p:spPr>
+          <a:xfrm>
+            <a:off x="4246474" y="4383084"/>
+            <a:ext cx="592531" cy="302853"/>
+          </a:xfrm>
+          <a:prstGeom prst="rect">
+            <a:avLst/>
+          </a:prstGeom>
+          <a:noFill/>
+        </p:spPr>
+        <p:txBody>
+          <a:bodyPr wrap="square" lIns="21946" tIns="21946" rIns="21946" bIns="21946" anchor="t">
+            <a:spAutoFit/>
+          </a:bodyPr>
+          <a:lstStyle/>
+          <a:p>
+            <a:pPr algn="ctr"/>
+            <a:r>
+              <a:rPr sz="840" b="1">
+                <a:solidFill>
+                  <a:srgbClr val="000000"/>
+                </a:solidFill>
+                <a:latin typeface="Aptos"/>
+              </a:rPr>
+              <a:t>+3M
+(+0.9%)</a:t>
+            </a:r>
+          </a:p>
+        </p:txBody>
+      </p:sp>
+      <p:sp>
+        <p:nvSpPr>
+          <p:cNvPr id="58" name="TextBox 57"/>
+          <p:cNvSpPr txBox="1"/>
+          <p:nvPr/>
+        </p:nvSpPr>
+        <p:spPr>
+          <a:xfrm>
+            <a:off x="4268419" y="5952744"/>
+            <a:ext cx="548640" cy="153261"/>
+          </a:xfrm>
+          <a:prstGeom prst="rect">
+            <a:avLst/>
+          </a:prstGeom>
+          <a:noFill/>
+        </p:spPr>
+        <p:txBody>
+          <a:bodyPr wrap="square" lIns="21946" tIns="21946" rIns="21946" bIns="21946" anchor="t">
+            <a:spAutoFit/>
+          </a:bodyPr>
+          <a:lstStyle/>
+          <a:p>
+            <a:pPr algn="ctr"/>
+            <a:r>
+              <a:rPr sz="708">
+                <a:solidFill>
+                  <a:srgbClr val="000000"/>
+                </a:solidFill>
+                <a:latin typeface="Aptos"/>
+              </a:rPr>
+              <a:t>Loyalty</a:t>
+            </a:r>
+          </a:p>
+        </p:txBody>
+      </p:sp>
+      <p:sp>
+        <p:nvSpPr>
+          <p:cNvPr id="59" name="Rectangle 58"/>
+          <p:cNvSpPr/>
+          <p:nvPr/>
+        </p:nvSpPr>
+        <p:spPr>
+          <a:xfrm>
+            <a:off x="4828032" y="4690323"/>
+            <a:ext cx="373075" cy="1213043"/>
+          </a:xfrm>
+          <a:prstGeom prst="rect">
+            <a:avLst/>
+          </a:prstGeom>
+          <a:solidFill>
+            <a:srgbClr val="081B49"/>
+          </a:solidFill>
+          <a:ln>
+            <a:noFill/>
+          </a:ln>
+        </p:spPr>
+        <p:style>
+          <a:lnRef idx="1">
+            <a:schemeClr val="accent1"/>
+          </a:lnRef>
+          <a:fillRef idx="3">
+            <a:schemeClr val="accent1"/>
+          </a:fillRef>
+          <a:effectRef idx="2">
+            <a:schemeClr val="accent1"/>
+          </a:effectRef>
+          <a:fontRef idx="minor">
+            <a:schemeClr val="lt1"/>
+          </a:fontRef>
+        </p:style>
+        <p:txBody>
+          <a:bodyPr rtlCol="0" anchor="ctr"/>
+          <a:lstStyle/>
+          <a:p>
+            <a:pPr algn="ctr"/>
+            <a:endParaRPr sz="2160"/>
+          </a:p>
+        </p:txBody>
+      </p:sp>
+      <p:sp>
+        <p:nvSpPr>
+          <p:cNvPr id="60" name="TextBox 59"/>
+          <p:cNvSpPr txBox="1"/>
+          <p:nvPr/>
+        </p:nvSpPr>
+        <p:spPr>
+          <a:xfrm>
+            <a:off x="4696359" y="4361139"/>
+            <a:ext cx="636422" cy="350815"/>
+          </a:xfrm>
+          <a:prstGeom prst="rect">
+            <a:avLst/>
+          </a:prstGeom>
+          <a:noFill/>
+        </p:spPr>
+        <p:txBody>
+          <a:bodyPr wrap="square" lIns="21946" tIns="21946" rIns="21946" bIns="21946" anchor="t">
+            <a:spAutoFit/>
+          </a:bodyPr>
+          <a:lstStyle/>
+          <a:p>
+            <a:pPr algn="ctr"/>
+            <a:r>
+              <a:rPr sz="996" b="1">
+                <a:solidFill>
+                  <a:srgbClr val="000000"/>
+                </a:solidFill>
+                <a:latin typeface="Aptos"/>
+              </a:rPr>
+              <a:t>333M
+(100.9%)</a:t>
+            </a:r>
+          </a:p>
+        </p:txBody>
+      </p:sp>
+      <p:sp>
+        <p:nvSpPr>
+          <p:cNvPr id="61" name="TextBox 60"/>
+          <p:cNvSpPr txBox="1"/>
+          <p:nvPr/>
+        </p:nvSpPr>
+        <p:spPr>
+          <a:xfrm>
+            <a:off x="4718304" y="5952744"/>
+            <a:ext cx="592531" cy="288105"/>
+          </a:xfrm>
+          <a:prstGeom prst="rect">
+            <a:avLst/>
+          </a:prstGeom>
+          <a:noFill/>
+        </p:spPr>
+        <p:txBody>
+          <a:bodyPr wrap="square" lIns="21946" tIns="21946" rIns="21946" bIns="21946" anchor="t">
+            <a:spAutoFit/>
+          </a:bodyPr>
+          <a:lstStyle/>
+          <a:p>
+            <a:pPr algn="ctr"/>
+            <a:r>
+              <a:rPr sz="792" b="1">
+                <a:solidFill>
+                  <a:srgbClr val="000000"/>
+                </a:solidFill>
+                <a:latin typeface="Aptos"/>
+              </a:rPr>
+              <a:t>Protected
+BAU Base</a:t>
+            </a:r>
+          </a:p>
+        </p:txBody>
+      </p:sp>
+      <p:cxnSp>
+        <p:nvCxnSpPr>
+          <p:cNvPr id="62" name="Connector 61"/>
+          <p:cNvCxnSpPr/>
+          <p:nvPr/>
+        </p:nvCxnSpPr>
+        <p:spPr>
+          <a:xfrm>
+            <a:off x="4729277" y="4690322"/>
+            <a:ext cx="98755" cy="0"/>
+          </a:xfrm>
+          <a:prstGeom prst="line">
+            <a:avLst/>
+          </a:prstGeom>
+          <a:ln w="10160">
+            <a:solidFill>
+              <a:srgbClr val="4D5054"/>
+            </a:solidFill>
+            <a:prstDash val="dash"/>
+          </a:ln>
+        </p:spPr>
+        <p:style>
+          <a:lnRef idx="2">
+            <a:schemeClr val="accent1"/>
+          </a:lnRef>
+          <a:fillRef idx="0">
+            <a:schemeClr val="accent1"/>
+          </a:fillRef>
+          <a:effectRef idx="1">
+            <a:schemeClr val="accent1"/>
+          </a:effectRef>
+          <a:fontRef idx="minor">
+            <a:schemeClr val="tx1"/>
+          </a:fontRef>
+        </p:style>
+      </p:cxnSp>
+      <p:sp>
+        <p:nvSpPr>
+          <p:cNvPr id="63" name="Rounded Rectangle 62"/>
+          <p:cNvSpPr/>
+          <p:nvPr/>
+        </p:nvSpPr>
+        <p:spPr>
+          <a:xfrm>
+            <a:off x="1821485" y="2721254"/>
+            <a:ext cx="3708806" cy="779069"/>
+          </a:xfrm>
+          <a:prstGeom prst="roundRect">
+            <a:avLst/>
+          </a:prstGeom>
+          <a:solidFill>
+            <a:srgbClr val="FFFFFF"/>
+          </a:solidFill>
+          <a:ln w="12700">
+            <a:solidFill>
+              <a:srgbClr val="148943"/>
+            </a:solidFill>
+          </a:ln>
+        </p:spPr>
+        <p:style>
+          <a:lnRef idx="1">
+            <a:schemeClr val="accent1"/>
+          </a:lnRef>
+          <a:fillRef idx="3">
+            <a:schemeClr val="accent1"/>
+          </a:fillRef>
+          <a:effectRef idx="2">
+            <a:schemeClr val="accent1"/>
+          </a:effectRef>
+          <a:fontRef idx="minor">
+            <a:schemeClr val="lt1"/>
+          </a:fontRef>
+        </p:style>
+        <p:txBody>
+          <a:bodyPr wrap="square" lIns="87782" rIns="87782" rtlCol="0" anchor="ctr"/>
+          <a:lstStyle/>
+          <a:p>
+            <a:pPr algn="ctr"/>
+            <a:r>
+              <a:rPr sz="1392" b="1">
+                <a:solidFill>
+                  <a:srgbClr val="148943"/>
+                </a:solidFill>
+                <a:latin typeface="Aptos"/>
+              </a:rPr>
+              <a:t>+23M protected + improved GC
+(+7.0%)</a:t>
+            </a:r>
+          </a:p>
+          <a:p>
+            <a:pPr algn="ctr">
+              <a:spcBef>
+                <a:spcPts val="120"/>
+              </a:spcBef>
+            </a:pPr>
+            <a:r>
+              <a:rPr sz="864">
+                <a:solidFill>
+                  <a:srgbClr val="4D5054"/>
+                </a:solidFill>
+                <a:latin typeface="Aptos"/>
+              </a:rPr>
+              <a:t>Includes base protection vs. weak foundation
+plus incremental BAU improvements
+(speed, supply, CSAT, tech, people / hours, loyalty).</a:t>
+            </a:r>
+          </a:p>
+        </p:txBody>
+      </p:sp>
+      <p:cxnSp>
+        <p:nvCxnSpPr>
+          <p:cNvPr id="64" name="Connector 63"/>
+          <p:cNvCxnSpPr/>
+          <p:nvPr/>
+        </p:nvCxnSpPr>
+        <p:spPr>
+          <a:xfrm>
+            <a:off x="1700784" y="3621024"/>
+            <a:ext cx="0" cy="768096"/>
+          </a:xfrm>
+          <a:prstGeom prst="line">
+            <a:avLst/>
+          </a:prstGeom>
+          <a:ln w="13335">
+            <a:solidFill>
+              <a:srgbClr val="148943"/>
+            </a:solidFill>
+            <a:prstDash val="dash"/>
+          </a:ln>
+        </p:spPr>
+        <p:style>
+          <a:lnRef idx="2">
+            <a:schemeClr val="accent1"/>
+          </a:lnRef>
+          <a:fillRef idx="0">
+            <a:schemeClr val="accent1"/>
+          </a:fillRef>
+          <a:effectRef idx="1">
+            <a:schemeClr val="accent1"/>
+          </a:effectRef>
+          <a:fontRef idx="minor">
+            <a:schemeClr val="tx1"/>
+          </a:fontRef>
+        </p:style>
+      </p:cxnSp>
+      <p:cxnSp>
+        <p:nvCxnSpPr>
+          <p:cNvPr id="65" name="Connector 64"/>
+          <p:cNvCxnSpPr/>
+          <p:nvPr/>
+        </p:nvCxnSpPr>
+        <p:spPr>
+          <a:xfrm>
+            <a:off x="1700784" y="3621024"/>
+            <a:ext cx="3642970" cy="0"/>
+          </a:xfrm>
+          <a:prstGeom prst="line">
+            <a:avLst/>
+          </a:prstGeom>
+          <a:ln w="13335">
+            <a:solidFill>
+              <a:srgbClr val="148943"/>
+            </a:solidFill>
+            <a:prstDash val="dash"/>
+          </a:ln>
+        </p:spPr>
+        <p:style>
+          <a:lnRef idx="2">
+            <a:schemeClr val="accent1"/>
+          </a:lnRef>
+          <a:fillRef idx="0">
+            <a:schemeClr val="accent1"/>
+          </a:fillRef>
+          <a:effectRef idx="1">
+            <a:schemeClr val="accent1"/>
+          </a:effectRef>
+          <a:fontRef idx="minor">
+            <a:schemeClr val="tx1"/>
+          </a:fontRef>
+        </p:style>
+      </p:cxnSp>
+      <p:cxnSp>
+        <p:nvCxnSpPr>
+          <p:cNvPr id="66" name="Connector 65"/>
+          <p:cNvCxnSpPr/>
+          <p:nvPr/>
+        </p:nvCxnSpPr>
+        <p:spPr>
+          <a:xfrm>
+            <a:off x="5343754" y="3621024"/>
+            <a:ext cx="0" cy="822960"/>
+          </a:xfrm>
+          <a:prstGeom prst="line">
+            <a:avLst/>
+          </a:prstGeom>
+          <a:ln w="13335">
+            <a:solidFill>
+              <a:srgbClr val="148943"/>
+            </a:solidFill>
+            <a:prstDash val="dash"/>
+          </a:ln>
+        </p:spPr>
+        <p:style>
+          <a:lnRef idx="2">
+            <a:schemeClr val="accent1"/>
+          </a:lnRef>
+          <a:fillRef idx="0">
+            <a:schemeClr val="accent1"/>
+          </a:fillRef>
+          <a:effectRef idx="1">
+            <a:schemeClr val="accent1"/>
+          </a:effectRef>
+          <a:fontRef idx="minor">
+            <a:schemeClr val="tx1"/>
+          </a:fontRef>
+        </p:style>
+      </p:cxnSp>
+      <p:sp>
+        <p:nvSpPr>
+          <p:cNvPr id="67" name="Rectangle 66"/>
+          <p:cNvSpPr/>
+          <p:nvPr/>
+        </p:nvSpPr>
+        <p:spPr>
+          <a:xfrm>
+            <a:off x="6089904" y="4690322"/>
+            <a:ext cx="373075" cy="220553"/>
+          </a:xfrm>
+          <a:prstGeom prst="rect">
+            <a:avLst/>
+          </a:prstGeom>
+          <a:solidFill>
+            <a:srgbClr val="EC5C17"/>
+          </a:solidFill>
+          <a:ln>
+            <a:noFill/>
+          </a:ln>
+        </p:spPr>
+        <p:style>
+          <a:lnRef idx="1">
+            <a:schemeClr val="accent1"/>
+          </a:lnRef>
+          <a:fillRef idx="3">
+            <a:schemeClr val="accent1"/>
+          </a:fillRef>
+          <a:effectRef idx="2">
+            <a:schemeClr val="accent1"/>
+          </a:effectRef>
+          <a:fontRef idx="minor">
+            <a:schemeClr val="lt1"/>
+          </a:fontRef>
+        </p:style>
+        <p:txBody>
+          <a:bodyPr rtlCol="0" anchor="ctr"/>
+          <a:lstStyle/>
+          <a:p>
+            <a:pPr algn="ctr"/>
+            <a:endParaRPr sz="2160"/>
+          </a:p>
+        </p:txBody>
+      </p:sp>
+      <p:sp>
+        <p:nvSpPr>
+          <p:cNvPr id="68" name="TextBox 67"/>
+          <p:cNvSpPr txBox="1"/>
+          <p:nvPr/>
+        </p:nvSpPr>
+        <p:spPr>
+          <a:xfrm>
+            <a:off x="5980176" y="4383084"/>
+            <a:ext cx="592531" cy="302853"/>
+          </a:xfrm>
+          <a:prstGeom prst="rect">
+            <a:avLst/>
+          </a:prstGeom>
+          <a:noFill/>
+        </p:spPr>
+        <p:txBody>
+          <a:bodyPr wrap="square" lIns="21946" tIns="21946" rIns="21946" bIns="21946" anchor="t">
+            <a:spAutoFit/>
+          </a:bodyPr>
+          <a:lstStyle/>
+          <a:p>
+            <a:pPr algn="ctr"/>
+            <a:r>
+              <a:rPr sz="840" b="1">
+                <a:solidFill>
+                  <a:srgbClr val="000000"/>
+                </a:solidFill>
+                <a:latin typeface="Aptos"/>
+              </a:rPr>
+              <a:t>-6M
+(-1.8%)</a:t>
+            </a:r>
+          </a:p>
+        </p:txBody>
+      </p:sp>
+      <p:sp>
+        <p:nvSpPr>
+          <p:cNvPr id="69" name="TextBox 68"/>
+          <p:cNvSpPr txBox="1"/>
+          <p:nvPr/>
+        </p:nvSpPr>
+        <p:spPr>
+          <a:xfrm>
+            <a:off x="6002122" y="5952744"/>
+            <a:ext cx="548640" cy="153261"/>
+          </a:xfrm>
+          <a:prstGeom prst="rect">
+            <a:avLst/>
+          </a:prstGeom>
+          <a:noFill/>
+        </p:spPr>
+        <p:txBody>
+          <a:bodyPr wrap="square" lIns="21946" tIns="21946" rIns="21946" bIns="21946" anchor="t">
+            <a:spAutoFit/>
+          </a:bodyPr>
+          <a:lstStyle/>
+          <a:p>
+            <a:pPr algn="ctr"/>
+            <a:r>
+              <a:rPr sz="708">
+                <a:solidFill>
+                  <a:srgbClr val="000000"/>
+                </a:solidFill>
+                <a:latin typeface="Aptos"/>
+              </a:rPr>
+              <a:t>Weather</a:t>
+            </a:r>
+          </a:p>
+        </p:txBody>
+      </p:sp>
+      <p:sp>
+        <p:nvSpPr>
+          <p:cNvPr id="70" name="Rectangle 69"/>
+          <p:cNvSpPr/>
+          <p:nvPr/>
+        </p:nvSpPr>
+        <p:spPr>
+          <a:xfrm>
+            <a:off x="6561735" y="4910877"/>
+            <a:ext cx="373075" cy="147035"/>
+          </a:xfrm>
+          <a:prstGeom prst="rect">
+            <a:avLst/>
+          </a:prstGeom>
+          <a:solidFill>
+            <a:srgbClr val="EC5C17"/>
+          </a:solidFill>
+          <a:ln>
+            <a:noFill/>
+          </a:ln>
+        </p:spPr>
+        <p:style>
+          <a:lnRef idx="1">
+            <a:schemeClr val="accent1"/>
+          </a:lnRef>
+          <a:fillRef idx="3">
+            <a:schemeClr val="accent1"/>
+          </a:fillRef>
+          <a:effectRef idx="2">
+            <a:schemeClr val="accent1"/>
+          </a:effectRef>
+          <a:fontRef idx="minor">
+            <a:schemeClr val="lt1"/>
+          </a:fontRef>
+        </p:style>
+        <p:txBody>
+          <a:bodyPr rtlCol="0" anchor="ctr"/>
+          <a:lstStyle/>
+          <a:p>
+            <a:pPr algn="ctr"/>
+            <a:endParaRPr sz="2160"/>
+          </a:p>
+        </p:txBody>
+      </p:sp>
+      <p:sp>
+        <p:nvSpPr>
+          <p:cNvPr id="71" name="TextBox 70"/>
+          <p:cNvSpPr txBox="1"/>
+          <p:nvPr/>
+        </p:nvSpPr>
+        <p:spPr>
+          <a:xfrm>
+            <a:off x="6452007" y="4603638"/>
+            <a:ext cx="592531" cy="302853"/>
+          </a:xfrm>
+          <a:prstGeom prst="rect">
+            <a:avLst/>
+          </a:prstGeom>
+          <a:noFill/>
+        </p:spPr>
+        <p:txBody>
+          <a:bodyPr wrap="square" lIns="21946" tIns="21946" rIns="21946" bIns="21946" anchor="t">
+            <a:spAutoFit/>
+          </a:bodyPr>
+          <a:lstStyle/>
+          <a:p>
+            <a:pPr algn="ctr"/>
+            <a:r>
+              <a:rPr sz="840" b="1">
+                <a:solidFill>
+                  <a:srgbClr val="000000"/>
+                </a:solidFill>
+                <a:latin typeface="Aptos"/>
+              </a:rPr>
+              <a:t>-4M
+(-1.2%)</a:t>
+            </a:r>
+          </a:p>
+        </p:txBody>
+      </p:sp>
+      <p:sp>
+        <p:nvSpPr>
+          <p:cNvPr id="72" name="TextBox 71"/>
+          <p:cNvSpPr txBox="1"/>
+          <p:nvPr/>
+        </p:nvSpPr>
+        <p:spPr>
+          <a:xfrm>
+            <a:off x="6473951" y="5952744"/>
+            <a:ext cx="548640" cy="153261"/>
+          </a:xfrm>
+          <a:prstGeom prst="rect">
+            <a:avLst/>
+          </a:prstGeom>
+          <a:noFill/>
+        </p:spPr>
+        <p:txBody>
+          <a:bodyPr wrap="square" lIns="21946" tIns="21946" rIns="21946" bIns="21946" anchor="t">
+            <a:spAutoFit/>
+          </a:bodyPr>
+          <a:lstStyle/>
+          <a:p>
+            <a:pPr algn="ctr"/>
+            <a:r>
+              <a:rPr sz="708">
+                <a:solidFill>
+                  <a:srgbClr val="000000"/>
+                </a:solidFill>
+                <a:latin typeface="Aptos"/>
+              </a:rPr>
+              <a:t>Macro</a:t>
+            </a:r>
+          </a:p>
+        </p:txBody>
+      </p:sp>
+      <p:sp>
+        <p:nvSpPr>
+          <p:cNvPr id="73" name="Rectangle 72"/>
+          <p:cNvSpPr/>
+          <p:nvPr/>
+        </p:nvSpPr>
+        <p:spPr>
+          <a:xfrm>
+            <a:off x="7033564" y="5057912"/>
+            <a:ext cx="373075" cy="110276"/>
+          </a:xfrm>
+          <a:prstGeom prst="rect">
+            <a:avLst/>
+          </a:prstGeom>
+          <a:solidFill>
+            <a:srgbClr val="EC5C17"/>
+          </a:solidFill>
+          <a:ln>
+            <a:noFill/>
+          </a:ln>
+        </p:spPr>
+        <p:style>
+          <a:lnRef idx="1">
+            <a:schemeClr val="accent1"/>
+          </a:lnRef>
+          <a:fillRef idx="3">
+            <a:schemeClr val="accent1"/>
+          </a:fillRef>
+          <a:effectRef idx="2">
+            <a:schemeClr val="accent1"/>
+          </a:effectRef>
+          <a:fontRef idx="minor">
+            <a:schemeClr val="lt1"/>
+          </a:fontRef>
+        </p:style>
+        <p:txBody>
+          <a:bodyPr rtlCol="0" anchor="ctr"/>
+          <a:lstStyle/>
+          <a:p>
+            <a:pPr algn="ctr"/>
+            <a:endParaRPr sz="2160"/>
+          </a:p>
+        </p:txBody>
+      </p:sp>
+      <p:sp>
+        <p:nvSpPr>
+          <p:cNvPr id="74" name="TextBox 73"/>
+          <p:cNvSpPr txBox="1"/>
+          <p:nvPr/>
+        </p:nvSpPr>
+        <p:spPr>
+          <a:xfrm>
+            <a:off x="6923837" y="4750673"/>
+            <a:ext cx="592531" cy="302853"/>
+          </a:xfrm>
+          <a:prstGeom prst="rect">
+            <a:avLst/>
+          </a:prstGeom>
+          <a:noFill/>
+        </p:spPr>
+        <p:txBody>
+          <a:bodyPr wrap="square" lIns="21946" tIns="21946" rIns="21946" bIns="21946" anchor="t">
+            <a:spAutoFit/>
+          </a:bodyPr>
+          <a:lstStyle/>
+          <a:p>
+            <a:pPr algn="ctr"/>
+            <a:r>
+              <a:rPr sz="840" b="1">
+                <a:solidFill>
+                  <a:srgbClr val="000000"/>
+                </a:solidFill>
+                <a:latin typeface="Aptos"/>
+              </a:rPr>
+              <a:t>-3M
+(-0.9%)</a:t>
+            </a:r>
+          </a:p>
+        </p:txBody>
+      </p:sp>
+      <p:sp>
+        <p:nvSpPr>
+          <p:cNvPr id="75" name="TextBox 74"/>
+          <p:cNvSpPr txBox="1"/>
+          <p:nvPr/>
+        </p:nvSpPr>
+        <p:spPr>
+          <a:xfrm>
+            <a:off x="6945781" y="5952744"/>
+            <a:ext cx="548640" cy="153261"/>
+          </a:xfrm>
+          <a:prstGeom prst="rect">
+            <a:avLst/>
+          </a:prstGeom>
+          <a:noFill/>
+        </p:spPr>
+        <p:txBody>
+          <a:bodyPr wrap="square" lIns="21946" tIns="21946" rIns="21946" bIns="21946" anchor="t">
+            <a:spAutoFit/>
+          </a:bodyPr>
+          <a:lstStyle/>
+          <a:p>
+            <a:pPr algn="ctr"/>
+            <a:r>
+              <a:rPr sz="708">
+                <a:solidFill>
+                  <a:srgbClr val="000000"/>
+                </a:solidFill>
+                <a:latin typeface="Aptos"/>
+              </a:rPr>
+              <a:t>Competition</a:t>
+            </a:r>
+          </a:p>
+        </p:txBody>
+      </p:sp>
+      <p:sp>
+        <p:nvSpPr>
+          <p:cNvPr id="76" name="Rectangle 75"/>
+          <p:cNvSpPr/>
+          <p:nvPr/>
+        </p:nvSpPr>
+        <p:spPr>
+          <a:xfrm>
+            <a:off x="7505394" y="5168189"/>
+            <a:ext cx="373075" cy="43891"/>
+          </a:xfrm>
+          <a:prstGeom prst="rect">
+            <a:avLst/>
+          </a:prstGeom>
+          <a:solidFill>
+            <a:srgbClr val="EC5C17"/>
+          </a:solidFill>
+          <a:ln>
+            <a:noFill/>
+          </a:ln>
+        </p:spPr>
+        <p:style>
+          <a:lnRef idx="1">
+            <a:schemeClr val="accent1"/>
+          </a:lnRef>
+          <a:fillRef idx="3">
+            <a:schemeClr val="accent1"/>
+          </a:fillRef>
+          <a:effectRef idx="2">
+            <a:schemeClr val="accent1"/>
+          </a:effectRef>
+          <a:fontRef idx="minor">
+            <a:schemeClr val="lt1"/>
+          </a:fontRef>
+        </p:style>
+        <p:txBody>
+          <a:bodyPr rtlCol="0" anchor="ctr"/>
+          <a:lstStyle/>
+          <a:p>
+            <a:pPr algn="ctr"/>
+            <a:endParaRPr sz="2160"/>
+          </a:p>
+        </p:txBody>
+      </p:sp>
+      <p:sp>
+        <p:nvSpPr>
+          <p:cNvPr id="77" name="TextBox 76"/>
+          <p:cNvSpPr txBox="1"/>
+          <p:nvPr/>
+        </p:nvSpPr>
+        <p:spPr>
+          <a:xfrm>
+            <a:off x="7395666" y="4860949"/>
+            <a:ext cx="592531" cy="302853"/>
+          </a:xfrm>
+          <a:prstGeom prst="rect">
+            <a:avLst/>
+          </a:prstGeom>
+          <a:noFill/>
+        </p:spPr>
+        <p:txBody>
+          <a:bodyPr wrap="square" lIns="21946" tIns="21946" rIns="21946" bIns="21946" anchor="t">
+            <a:spAutoFit/>
+          </a:bodyPr>
+          <a:lstStyle/>
+          <a:p>
+            <a:pPr algn="ctr"/>
+            <a:r>
+              <a:rPr sz="840" b="1">
+                <a:solidFill>
+                  <a:srgbClr val="000000"/>
+                </a:solidFill>
+                <a:latin typeface="Aptos"/>
+              </a:rPr>
+              <a:t>-1M
+(-0.3%)</a:t>
+            </a:r>
+          </a:p>
+        </p:txBody>
+      </p:sp>
+      <p:sp>
+        <p:nvSpPr>
+          <p:cNvPr id="78" name="TextBox 77"/>
+          <p:cNvSpPr txBox="1"/>
+          <p:nvPr/>
+        </p:nvSpPr>
+        <p:spPr>
+          <a:xfrm>
+            <a:off x="7417612" y="5952744"/>
+            <a:ext cx="548640" cy="153261"/>
+          </a:xfrm>
+          <a:prstGeom prst="rect">
+            <a:avLst/>
+          </a:prstGeom>
+          <a:noFill/>
+        </p:spPr>
+        <p:txBody>
+          <a:bodyPr wrap="square" lIns="21946" tIns="21946" rIns="21946" bIns="21946" anchor="t">
+            <a:spAutoFit/>
+          </a:bodyPr>
+          <a:lstStyle/>
+          <a:p>
+            <a:pPr algn="ctr"/>
+            <a:r>
+              <a:rPr sz="708">
+                <a:solidFill>
+                  <a:srgbClr val="000000"/>
+                </a:solidFill>
+                <a:latin typeface="Aptos"/>
+              </a:rPr>
+              <a:t>Footprint</a:t>
+            </a:r>
+          </a:p>
+        </p:txBody>
+      </p:sp>
+      <p:sp>
+        <p:nvSpPr>
+          <p:cNvPr id="79" name="Rounded Rectangle 78"/>
+          <p:cNvSpPr/>
+          <p:nvPr/>
+        </p:nvSpPr>
+        <p:spPr>
+          <a:xfrm>
+            <a:off x="5760721" y="2874874"/>
+            <a:ext cx="2249423" cy="614477"/>
+          </a:xfrm>
+          <a:prstGeom prst="roundRect">
+            <a:avLst/>
+          </a:prstGeom>
+          <a:solidFill>
+            <a:srgbClr val="FFFFFF"/>
+          </a:solidFill>
+          <a:ln w="12700">
+            <a:solidFill>
+              <a:srgbClr val="EC5C17"/>
+            </a:solidFill>
+          </a:ln>
+        </p:spPr>
+        <p:style>
+          <a:lnRef idx="1">
+            <a:schemeClr val="accent1"/>
+          </a:lnRef>
+          <a:fillRef idx="3">
+            <a:schemeClr val="accent1"/>
+          </a:fillRef>
+          <a:effectRef idx="2">
+            <a:schemeClr val="accent1"/>
+          </a:effectRef>
+          <a:fontRef idx="minor">
+            <a:schemeClr val="lt1"/>
+          </a:fontRef>
+        </p:style>
+        <p:txBody>
+          <a:bodyPr wrap="square" lIns="87782" rIns="87782" rtlCol="0" anchor="ctr"/>
+          <a:lstStyle/>
+          <a:p>
+            <a:pPr algn="ctr"/>
+            <a:r>
+              <a:rPr sz="1392" b="1">
+                <a:solidFill>
+                  <a:srgbClr val="EC5C17"/>
+                </a:solidFill>
+                <a:latin typeface="Aptos"/>
+              </a:rPr>
+              <a:t>-14M external
+context
+(-4.2%)</a:t>
+            </a:r>
+          </a:p>
+          <a:p>
+            <a:pPr algn="ctr">
+              <a:spcBef>
+                <a:spcPts val="120"/>
+              </a:spcBef>
+            </a:pPr>
+            <a:r>
+              <a:rPr sz="864">
+                <a:solidFill>
+                  <a:srgbClr val="4D5054"/>
+                </a:solidFill>
+                <a:latin typeface="Aptos"/>
+              </a:rPr>
+              <a:t>(Weather, macro,
+competition)</a:t>
+            </a:r>
+          </a:p>
+        </p:txBody>
+      </p:sp>
+      <p:cxnSp>
+        <p:nvCxnSpPr>
+          <p:cNvPr id="80" name="Connector 79"/>
+          <p:cNvCxnSpPr/>
+          <p:nvPr/>
+        </p:nvCxnSpPr>
+        <p:spPr>
+          <a:xfrm>
+            <a:off x="6858000" y="3489350"/>
+            <a:ext cx="0" cy="899770"/>
+          </a:xfrm>
+          <a:prstGeom prst="line">
+            <a:avLst/>
+          </a:prstGeom>
+          <a:ln w="13335">
+            <a:solidFill>
+              <a:srgbClr val="EC5C17"/>
+            </a:solidFill>
+            <a:prstDash val="dash"/>
+          </a:ln>
+        </p:spPr>
+        <p:style>
+          <a:lnRef idx="2">
+            <a:schemeClr val="accent1"/>
+          </a:lnRef>
+          <a:fillRef idx="0">
+            <a:schemeClr val="accent1"/>
+          </a:fillRef>
+          <a:effectRef idx="1">
+            <a:schemeClr val="accent1"/>
+          </a:effectRef>
+          <a:fontRef idx="minor">
+            <a:schemeClr val="tx1"/>
+          </a:fontRef>
+        </p:style>
+      </p:cxnSp>
+      <p:sp>
+        <p:nvSpPr>
+          <p:cNvPr id="81" name="Rectangle 80"/>
+          <p:cNvSpPr/>
+          <p:nvPr/>
+        </p:nvSpPr>
+        <p:spPr>
+          <a:xfrm>
+            <a:off x="8383219" y="4837358"/>
+            <a:ext cx="373075" cy="367589"/>
+          </a:xfrm>
+          <a:prstGeom prst="rect">
+            <a:avLst/>
+          </a:prstGeom>
+          <a:solidFill>
+            <a:srgbClr val="1C65D5"/>
+          </a:solidFill>
+          <a:ln>
+            <a:noFill/>
+          </a:ln>
+        </p:spPr>
+        <p:style>
+          <a:lnRef idx="1">
+            <a:schemeClr val="accent1"/>
+          </a:lnRef>
+          <a:fillRef idx="3">
+            <a:schemeClr val="accent1"/>
+          </a:fillRef>
+          <a:effectRef idx="2">
+            <a:schemeClr val="accent1"/>
+          </a:effectRef>
+          <a:fontRef idx="minor">
+            <a:schemeClr val="lt1"/>
+          </a:fontRef>
+        </p:style>
+        <p:txBody>
+          <a:bodyPr rtlCol="0" anchor="ctr"/>
+          <a:lstStyle/>
+          <a:p>
+            <a:pPr algn="ctr"/>
+            <a:endParaRPr sz="2160"/>
+          </a:p>
+        </p:txBody>
+      </p:sp>
+      <p:sp>
+        <p:nvSpPr>
+          <p:cNvPr id="82" name="TextBox 81"/>
+          <p:cNvSpPr txBox="1"/>
+          <p:nvPr/>
+        </p:nvSpPr>
+        <p:spPr>
+          <a:xfrm>
+            <a:off x="8273491" y="4530120"/>
+            <a:ext cx="592531" cy="302853"/>
+          </a:xfrm>
+          <a:prstGeom prst="rect">
+            <a:avLst/>
+          </a:prstGeom>
+          <a:noFill/>
+        </p:spPr>
+        <p:txBody>
+          <a:bodyPr wrap="square" lIns="21946" tIns="21946" rIns="21946" bIns="21946" anchor="t">
+            <a:spAutoFit/>
+          </a:bodyPr>
+          <a:lstStyle/>
+          <a:p>
+            <a:pPr algn="ctr"/>
+            <a:r>
+              <a:rPr sz="840" b="1">
+                <a:solidFill>
+                  <a:srgbClr val="000000"/>
+                </a:solidFill>
+                <a:latin typeface="Aptos"/>
+              </a:rPr>
+              <a:t>+10M
+(+3.0%)</a:t>
+            </a:r>
+          </a:p>
+        </p:txBody>
+      </p:sp>
+      <p:sp>
+        <p:nvSpPr>
+          <p:cNvPr id="83" name="TextBox 82"/>
+          <p:cNvSpPr txBox="1"/>
+          <p:nvPr/>
+        </p:nvSpPr>
+        <p:spPr>
+          <a:xfrm>
+            <a:off x="8295437" y="5952744"/>
+            <a:ext cx="548640" cy="153261"/>
+          </a:xfrm>
+          <a:prstGeom prst="rect">
+            <a:avLst/>
+          </a:prstGeom>
+          <a:noFill/>
+        </p:spPr>
+        <p:txBody>
+          <a:bodyPr wrap="square" lIns="21946" tIns="21946" rIns="21946" bIns="21946" anchor="t">
+            <a:spAutoFit/>
+          </a:bodyPr>
+          <a:lstStyle/>
+          <a:p>
+            <a:pPr algn="ctr"/>
+            <a:r>
+              <a:rPr sz="708">
+                <a:solidFill>
+                  <a:srgbClr val="000000"/>
+                </a:solidFill>
+                <a:latin typeface="Aptos"/>
+              </a:rPr>
+              <a:t>Pricing</a:t>
+            </a:r>
+          </a:p>
+        </p:txBody>
+      </p:sp>
+      <p:sp>
+        <p:nvSpPr>
+          <p:cNvPr id="84" name="Rectangle 83"/>
+          <p:cNvSpPr/>
+          <p:nvPr/>
+        </p:nvSpPr>
+        <p:spPr>
+          <a:xfrm>
+            <a:off x="8855050" y="4506529"/>
+            <a:ext cx="373075" cy="330829"/>
+          </a:xfrm>
+          <a:prstGeom prst="rect">
+            <a:avLst/>
+          </a:prstGeom>
+          <a:solidFill>
+            <a:srgbClr val="1C65D5"/>
+          </a:solidFill>
+          <a:ln>
+            <a:noFill/>
+          </a:ln>
+        </p:spPr>
+        <p:style>
+          <a:lnRef idx="1">
+            <a:schemeClr val="accent1"/>
+          </a:lnRef>
+          <a:fillRef idx="3">
+            <a:schemeClr val="accent1"/>
+          </a:fillRef>
+          <a:effectRef idx="2">
+            <a:schemeClr val="accent1"/>
+          </a:effectRef>
+          <a:fontRef idx="minor">
+            <a:schemeClr val="lt1"/>
+          </a:fontRef>
+        </p:style>
+        <p:txBody>
+          <a:bodyPr rtlCol="0" anchor="ctr"/>
+          <a:lstStyle/>
+          <a:p>
+            <a:pPr algn="ctr"/>
+            <a:endParaRPr sz="2160"/>
+          </a:p>
+        </p:txBody>
+      </p:sp>
+      <p:sp>
+        <p:nvSpPr>
+          <p:cNvPr id="85" name="TextBox 84"/>
+          <p:cNvSpPr txBox="1"/>
+          <p:nvPr/>
+        </p:nvSpPr>
+        <p:spPr>
+          <a:xfrm>
+            <a:off x="8745322" y="4199290"/>
+            <a:ext cx="592531" cy="302853"/>
+          </a:xfrm>
+          <a:prstGeom prst="rect">
+            <a:avLst/>
+          </a:prstGeom>
+          <a:noFill/>
+        </p:spPr>
+        <p:txBody>
+          <a:bodyPr wrap="square" lIns="21946" tIns="21946" rIns="21946" bIns="21946" anchor="t">
+            <a:spAutoFit/>
+          </a:bodyPr>
+          <a:lstStyle/>
+          <a:p>
+            <a:pPr algn="ctr"/>
+            <a:r>
+              <a:rPr sz="840" b="1">
+                <a:solidFill>
+                  <a:srgbClr val="000000"/>
+                </a:solidFill>
+                <a:latin typeface="Aptos"/>
+              </a:rPr>
+              <a:t>+9M
+(+2.7%)</a:t>
+            </a:r>
+          </a:p>
+        </p:txBody>
+      </p:sp>
+      <p:sp>
+        <p:nvSpPr>
+          <p:cNvPr id="86" name="TextBox 85"/>
+          <p:cNvSpPr txBox="1"/>
+          <p:nvPr/>
+        </p:nvSpPr>
+        <p:spPr>
+          <a:xfrm>
+            <a:off x="8767267" y="5952744"/>
+            <a:ext cx="548640" cy="262201"/>
+          </a:xfrm>
+          <a:prstGeom prst="rect">
+            <a:avLst/>
+          </a:prstGeom>
+          <a:noFill/>
+        </p:spPr>
+        <p:txBody>
+          <a:bodyPr wrap="square" lIns="21946" tIns="21946" rIns="21946" bIns="21946" anchor="t">
+            <a:spAutoFit/>
+          </a:bodyPr>
+          <a:lstStyle/>
+          <a:p>
+            <a:pPr algn="ctr"/>
+            <a:r>
+              <a:rPr sz="708">
+                <a:solidFill>
+                  <a:srgbClr val="000000"/>
+                </a:solidFill>
+                <a:latin typeface="Aptos"/>
+              </a:rPr>
+              <a:t>Promo /
+Value</a:t>
+            </a:r>
+          </a:p>
+        </p:txBody>
+      </p:sp>
+      <p:sp>
+        <p:nvSpPr>
+          <p:cNvPr id="87" name="Rectangle 86"/>
+          <p:cNvSpPr/>
+          <p:nvPr/>
+        </p:nvSpPr>
+        <p:spPr>
+          <a:xfrm>
+            <a:off x="9326880" y="4249216"/>
+            <a:ext cx="373075" cy="257311"/>
+          </a:xfrm>
+          <a:prstGeom prst="rect">
+            <a:avLst/>
+          </a:prstGeom>
+          <a:solidFill>
+            <a:srgbClr val="1C65D5"/>
+          </a:solidFill>
+          <a:ln>
+            <a:noFill/>
+          </a:ln>
+        </p:spPr>
+        <p:style>
+          <a:lnRef idx="1">
+            <a:schemeClr val="accent1"/>
+          </a:lnRef>
+          <a:fillRef idx="3">
+            <a:schemeClr val="accent1"/>
+          </a:fillRef>
+          <a:effectRef idx="2">
+            <a:schemeClr val="accent1"/>
+          </a:effectRef>
+          <a:fontRef idx="minor">
+            <a:schemeClr val="lt1"/>
+          </a:fontRef>
+        </p:style>
+        <p:txBody>
+          <a:bodyPr rtlCol="0" anchor="ctr"/>
+          <a:lstStyle/>
+          <a:p>
+            <a:pPr algn="ctr"/>
+            <a:endParaRPr sz="2160"/>
+          </a:p>
+        </p:txBody>
+      </p:sp>
+      <p:sp>
+        <p:nvSpPr>
+          <p:cNvPr id="88" name="TextBox 87"/>
+          <p:cNvSpPr txBox="1"/>
+          <p:nvPr/>
+        </p:nvSpPr>
+        <p:spPr>
+          <a:xfrm>
+            <a:off x="9217152" y="3941977"/>
+            <a:ext cx="592531" cy="302853"/>
+          </a:xfrm>
+          <a:prstGeom prst="rect">
+            <a:avLst/>
+          </a:prstGeom>
+          <a:noFill/>
+        </p:spPr>
+        <p:txBody>
+          <a:bodyPr wrap="square" lIns="21946" tIns="21946" rIns="21946" bIns="21946" anchor="t">
+            <a:spAutoFit/>
+          </a:bodyPr>
+          <a:lstStyle/>
+          <a:p>
+            <a:pPr algn="ctr"/>
+            <a:r>
+              <a:rPr sz="840" b="1">
+                <a:solidFill>
+                  <a:srgbClr val="000000"/>
+                </a:solidFill>
+                <a:latin typeface="Aptos"/>
+              </a:rPr>
+              <a:t>+7M
+(+2.1%)</a:t>
+            </a:r>
+          </a:p>
+        </p:txBody>
+      </p:sp>
+      <p:sp>
+        <p:nvSpPr>
+          <p:cNvPr id="89" name="TextBox 88"/>
+          <p:cNvSpPr txBox="1"/>
+          <p:nvPr/>
+        </p:nvSpPr>
+        <p:spPr>
+          <a:xfrm>
+            <a:off x="9239098" y="5952744"/>
+            <a:ext cx="548640" cy="153261"/>
+          </a:xfrm>
+          <a:prstGeom prst="rect">
+            <a:avLst/>
+          </a:prstGeom>
+          <a:noFill/>
+        </p:spPr>
+        <p:txBody>
+          <a:bodyPr wrap="square" lIns="21946" tIns="21946" rIns="21946" bIns="21946" anchor="t">
+            <a:spAutoFit/>
+          </a:bodyPr>
+          <a:lstStyle/>
+          <a:p>
+            <a:pPr algn="ctr"/>
+            <a:r>
+              <a:rPr sz="708">
+                <a:solidFill>
+                  <a:srgbClr val="000000"/>
+                </a:solidFill>
+                <a:latin typeface="Aptos"/>
+              </a:rPr>
+              <a:t>Media</a:t>
+            </a:r>
+          </a:p>
+        </p:txBody>
+      </p:sp>
+      <p:sp>
+        <p:nvSpPr>
+          <p:cNvPr id="90" name="Rectangle 89"/>
+          <p:cNvSpPr/>
+          <p:nvPr/>
+        </p:nvSpPr>
+        <p:spPr>
+          <a:xfrm>
+            <a:off x="9798711" y="4028663"/>
+            <a:ext cx="373075" cy="220553"/>
+          </a:xfrm>
+          <a:prstGeom prst="rect">
+            <a:avLst/>
+          </a:prstGeom>
+          <a:solidFill>
+            <a:srgbClr val="1C65D5"/>
+          </a:solidFill>
+          <a:ln>
+            <a:noFill/>
+          </a:ln>
+        </p:spPr>
+        <p:style>
+          <a:lnRef idx="1">
+            <a:schemeClr val="accent1"/>
+          </a:lnRef>
+          <a:fillRef idx="3">
+            <a:schemeClr val="accent1"/>
+          </a:fillRef>
+          <a:effectRef idx="2">
+            <a:schemeClr val="accent1"/>
+          </a:effectRef>
+          <a:fontRef idx="minor">
+            <a:schemeClr val="lt1"/>
+          </a:fontRef>
+        </p:style>
+        <p:txBody>
+          <a:bodyPr rtlCol="0" anchor="ctr"/>
+          <a:lstStyle/>
+          <a:p>
+            <a:pPr algn="ctr"/>
+            <a:endParaRPr sz="2160"/>
+          </a:p>
+        </p:txBody>
+      </p:sp>
+      <p:sp>
+        <p:nvSpPr>
+          <p:cNvPr id="91" name="TextBox 90"/>
+          <p:cNvSpPr txBox="1"/>
+          <p:nvPr/>
+        </p:nvSpPr>
+        <p:spPr>
+          <a:xfrm>
+            <a:off x="9688983" y="3721425"/>
+            <a:ext cx="592531" cy="302853"/>
+          </a:xfrm>
+          <a:prstGeom prst="rect">
+            <a:avLst/>
+          </a:prstGeom>
+          <a:noFill/>
+        </p:spPr>
+        <p:txBody>
+          <a:bodyPr wrap="square" lIns="21946" tIns="21946" rIns="21946" bIns="21946" anchor="t">
+            <a:spAutoFit/>
+          </a:bodyPr>
+          <a:lstStyle/>
+          <a:p>
+            <a:pPr algn="ctr"/>
+            <a:r>
+              <a:rPr sz="840" b="1">
+                <a:solidFill>
+                  <a:srgbClr val="000000"/>
+                </a:solidFill>
+                <a:latin typeface="Aptos"/>
+              </a:rPr>
+              <a:t>+6M
+(+1.8%)</a:t>
+            </a:r>
+          </a:p>
+        </p:txBody>
+      </p:sp>
+      <p:sp>
+        <p:nvSpPr>
+          <p:cNvPr id="92" name="TextBox 91"/>
+          <p:cNvSpPr txBox="1"/>
+          <p:nvPr/>
+        </p:nvSpPr>
+        <p:spPr>
+          <a:xfrm>
+            <a:off x="9710928" y="5952744"/>
+            <a:ext cx="548640" cy="262201"/>
+          </a:xfrm>
+          <a:prstGeom prst="rect">
+            <a:avLst/>
+          </a:prstGeom>
+          <a:noFill/>
+        </p:spPr>
+        <p:txBody>
+          <a:bodyPr wrap="square" lIns="21946" tIns="21946" rIns="21946" bIns="21946" anchor="t">
+            <a:spAutoFit/>
+          </a:bodyPr>
+          <a:lstStyle/>
+          <a:p>
+            <a:pPr algn="ctr"/>
+            <a:r>
+              <a:rPr sz="708">
+                <a:solidFill>
+                  <a:srgbClr val="000000"/>
+                </a:solidFill>
+                <a:latin typeface="Aptos"/>
+              </a:rPr>
+              <a:t>LTO /
+Innovation</a:t>
+            </a:r>
+          </a:p>
+        </p:txBody>
+      </p:sp>
+      <p:sp>
+        <p:nvSpPr>
+          <p:cNvPr id="93" name="Rectangle 92"/>
+          <p:cNvSpPr/>
+          <p:nvPr/>
+        </p:nvSpPr>
+        <p:spPr>
+          <a:xfrm>
+            <a:off x="10270541" y="3918387"/>
+            <a:ext cx="373075" cy="110276"/>
+          </a:xfrm>
+          <a:prstGeom prst="rect">
+            <a:avLst/>
+          </a:prstGeom>
+          <a:solidFill>
+            <a:srgbClr val="1C65D5"/>
+          </a:solidFill>
+          <a:ln>
+            <a:noFill/>
+          </a:ln>
+        </p:spPr>
+        <p:style>
+          <a:lnRef idx="1">
+            <a:schemeClr val="accent1"/>
+          </a:lnRef>
+          <a:fillRef idx="3">
+            <a:schemeClr val="accent1"/>
+          </a:fillRef>
+          <a:effectRef idx="2">
+            <a:schemeClr val="accent1"/>
+          </a:effectRef>
+          <a:fontRef idx="minor">
+            <a:schemeClr val="lt1"/>
+          </a:fontRef>
+        </p:style>
+        <p:txBody>
+          <a:bodyPr rtlCol="0" anchor="ctr"/>
+          <a:lstStyle/>
+          <a:p>
+            <a:pPr algn="ctr"/>
+            <a:endParaRPr sz="2160"/>
+          </a:p>
+        </p:txBody>
+      </p:sp>
+      <p:sp>
+        <p:nvSpPr>
+          <p:cNvPr id="94" name="TextBox 93"/>
+          <p:cNvSpPr txBox="1"/>
+          <p:nvPr/>
+        </p:nvSpPr>
+        <p:spPr>
+          <a:xfrm>
+            <a:off x="10160813" y="3611148"/>
+            <a:ext cx="592531" cy="302853"/>
+          </a:xfrm>
+          <a:prstGeom prst="rect">
+            <a:avLst/>
+          </a:prstGeom>
+          <a:noFill/>
+        </p:spPr>
+        <p:txBody>
+          <a:bodyPr wrap="square" lIns="21946" tIns="21946" rIns="21946" bIns="21946" anchor="t">
+            <a:spAutoFit/>
+          </a:bodyPr>
+          <a:lstStyle/>
+          <a:p>
+            <a:pPr algn="ctr"/>
+            <a:r>
+              <a:rPr sz="840" b="1">
+                <a:solidFill>
+                  <a:srgbClr val="000000"/>
+                </a:solidFill>
+                <a:latin typeface="Aptos"/>
+              </a:rPr>
+              <a:t>+3M
+(+0.9%)</a:t>
+            </a:r>
+          </a:p>
+        </p:txBody>
+      </p:sp>
+      <p:sp>
+        <p:nvSpPr>
+          <p:cNvPr id="95" name="TextBox 94"/>
+          <p:cNvSpPr txBox="1"/>
+          <p:nvPr/>
+        </p:nvSpPr>
+        <p:spPr>
+          <a:xfrm>
+            <a:off x="10182758" y="5952744"/>
+            <a:ext cx="548640" cy="262201"/>
+          </a:xfrm>
+          <a:prstGeom prst="rect">
+            <a:avLst/>
+          </a:prstGeom>
+          <a:noFill/>
+        </p:spPr>
+        <p:txBody>
+          <a:bodyPr wrap="square" lIns="21946" tIns="21946" rIns="21946" bIns="21946" anchor="t">
+            <a:spAutoFit/>
+          </a:bodyPr>
+          <a:lstStyle/>
+          <a:p>
+            <a:pPr algn="ctr"/>
+            <a:r>
+              <a:rPr sz="708">
+                <a:solidFill>
+                  <a:srgbClr val="000000"/>
+                </a:solidFill>
+                <a:latin typeface="Aptos"/>
+              </a:rPr>
+              <a:t>Digital /
+CRM</a:t>
+            </a:r>
+          </a:p>
+        </p:txBody>
+      </p:sp>
+      <p:sp>
+        <p:nvSpPr>
+          <p:cNvPr id="96" name="Rounded Rectangle 95"/>
+          <p:cNvSpPr/>
+          <p:nvPr/>
+        </p:nvSpPr>
+        <p:spPr>
+          <a:xfrm>
+            <a:off x="8317382" y="2820010"/>
+            <a:ext cx="2743200" cy="636422"/>
+          </a:xfrm>
+          <a:prstGeom prst="roundRect">
+            <a:avLst/>
+          </a:prstGeom>
+          <a:solidFill>
+            <a:srgbClr val="FFFFFF"/>
+          </a:solidFill>
+          <a:ln w="12700">
+            <a:solidFill>
+              <a:srgbClr val="1C65D5"/>
+            </a:solidFill>
+          </a:ln>
+        </p:spPr>
+        <p:style>
+          <a:lnRef idx="1">
+            <a:schemeClr val="accent1"/>
+          </a:lnRef>
+          <a:fillRef idx="3">
+            <a:schemeClr val="accent1"/>
+          </a:fillRef>
+          <a:effectRef idx="2">
+            <a:schemeClr val="accent1"/>
+          </a:effectRef>
+          <a:fontRef idx="minor">
+            <a:schemeClr val="lt1"/>
+          </a:fontRef>
+        </p:style>
+        <p:txBody>
+          <a:bodyPr wrap="square" lIns="87782" rIns="87782" rtlCol="0" anchor="ctr"/>
+          <a:lstStyle/>
+          <a:p>
+            <a:pPr algn="ctr"/>
+            <a:r>
+              <a:rPr sz="1392" b="1">
+                <a:solidFill>
+                  <a:srgbClr val="1C65D5"/>
+                </a:solidFill>
+                <a:latin typeface="Aptos"/>
+              </a:rPr>
+              <a:t>+35M commercial
+movement
+(+10.6%)</a:t>
+            </a:r>
+          </a:p>
+          <a:p>
+            <a:pPr algn="ctr">
+              <a:spcBef>
+                <a:spcPts val="120"/>
+              </a:spcBef>
+            </a:pPr>
+            <a:r>
+              <a:rPr sz="864">
+                <a:solidFill>
+                  <a:srgbClr val="4D5054"/>
+                </a:solidFill>
+                <a:latin typeface="Aptos"/>
+              </a:rPr>
+              <a:t>(Pricing, promo, media, LTO, digital)</a:t>
+            </a:r>
+          </a:p>
+        </p:txBody>
+      </p:sp>
+      <p:cxnSp>
+        <p:nvCxnSpPr>
+          <p:cNvPr id="97" name="Connector 96"/>
+          <p:cNvCxnSpPr/>
+          <p:nvPr/>
+        </p:nvCxnSpPr>
+        <p:spPr>
+          <a:xfrm>
+            <a:off x="9678010" y="3467405"/>
+            <a:ext cx="0" cy="921715"/>
+          </a:xfrm>
+          <a:prstGeom prst="line">
+            <a:avLst/>
+          </a:prstGeom>
+          <a:ln w="13335">
+            <a:solidFill>
+              <a:srgbClr val="1C65D5"/>
+            </a:solidFill>
+            <a:prstDash val="dash"/>
+          </a:ln>
+        </p:spPr>
+        <p:style>
+          <a:lnRef idx="2">
+            <a:schemeClr val="accent1"/>
+          </a:lnRef>
+          <a:fillRef idx="0">
+            <a:schemeClr val="accent1"/>
+          </a:fillRef>
+          <a:effectRef idx="1">
+            <a:schemeClr val="accent1"/>
+          </a:effectRef>
+          <a:fontRef idx="minor">
+            <a:schemeClr val="tx1"/>
+          </a:fontRef>
+        </p:style>
+      </p:cxnSp>
+      <p:sp>
+        <p:nvSpPr>
+          <p:cNvPr id="98" name="Rectangle 97"/>
+          <p:cNvSpPr/>
+          <p:nvPr/>
+        </p:nvSpPr>
+        <p:spPr>
+          <a:xfrm>
+            <a:off x="11038637" y="3918387"/>
+            <a:ext cx="373075" cy="147035"/>
+          </a:xfrm>
+          <a:prstGeom prst="rect">
+            <a:avLst/>
+          </a:prstGeom>
+          <a:solidFill>
+            <a:srgbClr val="909499"/>
+          </a:solidFill>
+          <a:ln>
+            <a:noFill/>
+          </a:ln>
+        </p:spPr>
+        <p:style>
+          <a:lnRef idx="1">
+            <a:schemeClr val="accent1"/>
+          </a:lnRef>
+          <a:fillRef idx="3">
+            <a:schemeClr val="accent1"/>
+          </a:fillRef>
+          <a:effectRef idx="2">
+            <a:schemeClr val="accent1"/>
+          </a:effectRef>
+          <a:fontRef idx="minor">
+            <a:schemeClr val="lt1"/>
+          </a:fontRef>
+        </p:style>
+        <p:txBody>
+          <a:bodyPr rtlCol="0" anchor="ctr"/>
+          <a:lstStyle/>
+          <a:p>
+            <a:pPr algn="ctr"/>
+            <a:endParaRPr sz="2160"/>
+          </a:p>
+        </p:txBody>
+      </p:sp>
+      <p:sp>
+        <p:nvSpPr>
+          <p:cNvPr id="99" name="TextBox 98"/>
+          <p:cNvSpPr txBox="1"/>
+          <p:nvPr/>
+        </p:nvSpPr>
+        <p:spPr>
+          <a:xfrm>
+            <a:off x="10928909" y="3611148"/>
+            <a:ext cx="592531" cy="302853"/>
+          </a:xfrm>
+          <a:prstGeom prst="rect">
+            <a:avLst/>
+          </a:prstGeom>
+          <a:noFill/>
+        </p:spPr>
+        <p:txBody>
+          <a:bodyPr wrap="square" lIns="21946" tIns="21946" rIns="21946" bIns="21946" anchor="t">
+            <a:spAutoFit/>
+          </a:bodyPr>
+          <a:lstStyle/>
+          <a:p>
+            <a:pPr algn="ctr"/>
+            <a:r>
+              <a:rPr sz="840" b="1">
+                <a:solidFill>
+                  <a:srgbClr val="000000"/>
+                </a:solidFill>
+                <a:latin typeface="Aptos"/>
+              </a:rPr>
+              <a:t>-4M
+(-1.2%)</a:t>
+            </a:r>
+          </a:p>
+        </p:txBody>
+      </p:sp>
+      <p:sp>
+        <p:nvSpPr>
+          <p:cNvPr id="100" name="TextBox 99"/>
+          <p:cNvSpPr txBox="1"/>
+          <p:nvPr/>
+        </p:nvSpPr>
+        <p:spPr>
+          <a:xfrm>
+            <a:off x="10950854" y="5952744"/>
+            <a:ext cx="548640" cy="262201"/>
+          </a:xfrm>
+          <a:prstGeom prst="rect">
+            <a:avLst/>
+          </a:prstGeom>
+          <a:noFill/>
+        </p:spPr>
+        <p:txBody>
+          <a:bodyPr wrap="square" lIns="21946" tIns="21946" rIns="21946" bIns="21946" anchor="t">
+            <a:spAutoFit/>
+          </a:bodyPr>
+          <a:lstStyle/>
+          <a:p>
+            <a:pPr algn="ctr"/>
+            <a:r>
+              <a:rPr sz="708">
+                <a:solidFill>
+                  <a:srgbClr val="000000"/>
+                </a:solidFill>
+                <a:latin typeface="Aptos"/>
+              </a:rPr>
+              <a:t>Gap /
+Residual</a:t>
+            </a:r>
+          </a:p>
+        </p:txBody>
+      </p:sp>
+      <p:sp>
+        <p:nvSpPr>
+          <p:cNvPr id="101" name="Rectangle 100"/>
+          <p:cNvSpPr/>
+          <p:nvPr/>
+        </p:nvSpPr>
+        <p:spPr>
+          <a:xfrm>
+            <a:off x="11982298" y="4065422"/>
+            <a:ext cx="373075" cy="1837944"/>
+          </a:xfrm>
+          <a:prstGeom prst="rect">
+            <a:avLst/>
+          </a:prstGeom>
+          <a:solidFill>
+            <a:srgbClr val="081B49"/>
+          </a:solidFill>
+          <a:ln>
+            <a:noFill/>
+          </a:ln>
+        </p:spPr>
+        <p:style>
+          <a:lnRef idx="1">
+            <a:schemeClr val="accent1"/>
+          </a:lnRef>
+          <a:fillRef idx="3">
+            <a:schemeClr val="accent1"/>
+          </a:fillRef>
+          <a:effectRef idx="2">
+            <a:schemeClr val="accent1"/>
+          </a:effectRef>
+          <a:fontRef idx="minor">
+            <a:schemeClr val="lt1"/>
+          </a:fontRef>
+        </p:style>
+        <p:txBody>
+          <a:bodyPr rtlCol="0" anchor="ctr"/>
+          <a:lstStyle/>
+          <a:p>
+            <a:pPr algn="ctr"/>
+            <a:endParaRPr sz="2160"/>
+          </a:p>
+        </p:txBody>
+      </p:sp>
+      <p:sp>
+        <p:nvSpPr>
+          <p:cNvPr id="102" name="TextBox 101"/>
+          <p:cNvSpPr txBox="1"/>
+          <p:nvPr/>
+        </p:nvSpPr>
+        <p:spPr>
+          <a:xfrm>
+            <a:off x="11850624" y="3736239"/>
+            <a:ext cx="636422" cy="350815"/>
+          </a:xfrm>
+          <a:prstGeom prst="rect">
+            <a:avLst/>
+          </a:prstGeom>
+          <a:noFill/>
+        </p:spPr>
+        <p:txBody>
+          <a:bodyPr wrap="square" lIns="21946" tIns="21946" rIns="21946" bIns="21946" anchor="t">
+            <a:spAutoFit/>
+          </a:bodyPr>
+          <a:lstStyle/>
+          <a:p>
+            <a:pPr algn="ctr"/>
+            <a:r>
+              <a:rPr sz="996" b="1">
+                <a:solidFill>
+                  <a:srgbClr val="000000"/>
+                </a:solidFill>
+                <a:latin typeface="Aptos"/>
+              </a:rPr>
+              <a:t>350M
+(106.1%)</a:t>
+            </a:r>
+          </a:p>
+        </p:txBody>
+      </p:sp>
+      <p:sp>
+        <p:nvSpPr>
+          <p:cNvPr id="103" name="TextBox 102"/>
+          <p:cNvSpPr txBox="1"/>
+          <p:nvPr/>
+        </p:nvSpPr>
+        <p:spPr>
+          <a:xfrm>
+            <a:off x="11872570" y="5952745"/>
+            <a:ext cx="592531" cy="288105"/>
+          </a:xfrm>
+          <a:prstGeom prst="rect">
+            <a:avLst/>
+          </a:prstGeom>
+          <a:noFill/>
+        </p:spPr>
+        <p:txBody>
+          <a:bodyPr wrap="square" lIns="21946" tIns="21946" rIns="21946" bIns="21946" anchor="t">
+            <a:spAutoFit/>
+          </a:bodyPr>
+          <a:lstStyle/>
+          <a:p>
+            <a:pPr algn="ctr"/>
+            <a:r>
+              <a:rPr sz="792" b="1">
+                <a:solidFill>
+                  <a:srgbClr val="000000"/>
+                </a:solidFill>
+                <a:latin typeface="Aptos"/>
+              </a:rPr>
+              <a:t>2025
+Actual GC</a:t>
+            </a:r>
+          </a:p>
+        </p:txBody>
+      </p:sp>
+      <p:cxnSp>
+        <p:nvCxnSpPr>
+          <p:cNvPr id="104" name="Connector 103"/>
+          <p:cNvCxnSpPr/>
+          <p:nvPr/>
+        </p:nvCxnSpPr>
+        <p:spPr>
+          <a:xfrm>
+            <a:off x="11411712" y="4065422"/>
+            <a:ext cx="570586" cy="0"/>
+          </a:xfrm>
+          <a:prstGeom prst="line">
+            <a:avLst/>
+          </a:prstGeom>
+          <a:ln w="10795">
+            <a:solidFill>
+              <a:srgbClr val="4D5054"/>
+            </a:solidFill>
+            <a:prstDash val="dash"/>
+          </a:ln>
+        </p:spPr>
+        <p:style>
+          <a:lnRef idx="2">
+            <a:schemeClr val="accent1"/>
+          </a:lnRef>
+          <a:fillRef idx="0">
+            <a:schemeClr val="accent1"/>
+          </a:fillRef>
+          <a:effectRef idx="1">
+            <a:schemeClr val="accent1"/>
+          </a:effectRef>
+          <a:fontRef idx="minor">
+            <a:schemeClr val="tx1"/>
+          </a:fontRef>
+        </p:style>
+      </p:cxnSp>
+      <p:cxnSp>
+        <p:nvCxnSpPr>
+          <p:cNvPr id="105" name="Connector 104"/>
+          <p:cNvCxnSpPr/>
+          <p:nvPr/>
+        </p:nvCxnSpPr>
+        <p:spPr>
+          <a:xfrm>
+            <a:off x="219456" y="5903366"/>
+            <a:ext cx="12322454" cy="0"/>
+          </a:xfrm>
+          <a:prstGeom prst="line">
+            <a:avLst/>
+          </a:prstGeom>
+          <a:ln w="9525">
+            <a:solidFill>
+              <a:srgbClr val="4D5054"/>
+            </a:solidFill>
+          </a:ln>
+        </p:spPr>
+        <p:style>
+          <a:lnRef idx="2">
+            <a:schemeClr val="accent1"/>
+          </a:lnRef>
+          <a:fillRef idx="0">
+            <a:schemeClr val="accent1"/>
+          </a:fillRef>
+          <a:effectRef idx="1">
+            <a:schemeClr val="accent1"/>
+          </a:effectRef>
+          <a:fontRef idx="minor">
+            <a:schemeClr val="tx1"/>
+          </a:fontRef>
+        </p:style>
+      </p:cxnSp>
+      <p:sp>
+        <p:nvSpPr>
+          <p:cNvPr id="106" name="Rounded Rectangle 105"/>
+          <p:cNvSpPr/>
+          <p:nvPr/>
+        </p:nvSpPr>
+        <p:spPr>
+          <a:xfrm>
+            <a:off x="12563856" y="1887322"/>
+            <a:ext cx="1645920" cy="4663440"/>
+          </a:xfrm>
+          <a:prstGeom prst="roundRect">
+            <a:avLst/>
+          </a:prstGeom>
+          <a:solidFill>
+            <a:srgbClr val="F6F8FB"/>
+          </a:solidFill>
+          <a:ln>
+            <a:noFill/>
+          </a:ln>
+        </p:spPr>
+        <p:style>
+          <a:lnRef idx="1">
+            <a:schemeClr val="accent1"/>
+          </a:lnRef>
+          <a:fillRef idx="3">
+            <a:schemeClr val="accent1"/>
+          </a:fillRef>
+          <a:effectRef idx="2">
+            <a:schemeClr val="accent1"/>
+          </a:effectRef>
+          <a:fontRef idx="minor">
+            <a:schemeClr val="lt1"/>
+          </a:fontRef>
+        </p:style>
+        <p:txBody>
+          <a:bodyPr rtlCol="0" anchor="ctr"/>
+          <a:lstStyle/>
+          <a:p>
+            <a:pPr algn="ctr"/>
+            <a:endParaRPr sz="2160"/>
+          </a:p>
+        </p:txBody>
+      </p:sp>
+      <p:sp>
+        <p:nvSpPr>
+          <p:cNvPr id="107" name="TextBox 106"/>
+          <p:cNvSpPr txBox="1"/>
+          <p:nvPr/>
+        </p:nvSpPr>
+        <p:spPr>
+          <a:xfrm>
+            <a:off x="12739421" y="2139696"/>
+            <a:ext cx="1272845" cy="369332"/>
+          </a:xfrm>
+          <a:prstGeom prst="rect">
+            <a:avLst/>
+          </a:prstGeom>
+          <a:noFill/>
+        </p:spPr>
+        <p:txBody>
+          <a:bodyPr wrap="square" lIns="0" tIns="0" rIns="0" bIns="0" anchor="t">
+            <a:spAutoFit/>
+          </a:bodyPr>
+          <a:lstStyle/>
+          <a:p>
+            <a:pPr algn="ctr"/>
+            <a:r>
+              <a:rPr sz="1200" b="1">
+                <a:solidFill>
+                  <a:srgbClr val="081B49"/>
+                </a:solidFill>
+                <a:latin typeface="Aptos"/>
+              </a:rPr>
+              <a:t>KEY
+TAKEAWAYS</a:t>
+            </a:r>
+          </a:p>
+        </p:txBody>
+      </p:sp>
+      <p:cxnSp>
+        <p:nvCxnSpPr>
+          <p:cNvPr id="108" name="Connector 107"/>
+          <p:cNvCxnSpPr/>
+          <p:nvPr/>
+        </p:nvCxnSpPr>
+        <p:spPr>
+          <a:xfrm>
+            <a:off x="12673584" y="2545690"/>
+            <a:ext cx="1349654" cy="0"/>
+          </a:xfrm>
+          <a:prstGeom prst="line">
+            <a:avLst/>
+          </a:prstGeom>
+          <a:ln w="12700">
+            <a:solidFill>
+              <a:srgbClr val="081B49"/>
+            </a:solidFill>
+          </a:ln>
+        </p:spPr>
+        <p:style>
+          <a:lnRef idx="2">
+            <a:schemeClr val="accent1"/>
+          </a:lnRef>
+          <a:fillRef idx="0">
+            <a:schemeClr val="accent1"/>
+          </a:fillRef>
+          <a:effectRef idx="1">
+            <a:schemeClr val="accent1"/>
+          </a:effectRef>
+          <a:fontRef idx="minor">
+            <a:schemeClr val="tx1"/>
+          </a:fontRef>
+        </p:style>
+      </p:cxnSp>
+      <p:sp>
+        <p:nvSpPr>
+          <p:cNvPr id="109" name="TextBox 108"/>
+          <p:cNvSpPr txBox="1"/>
+          <p:nvPr/>
+        </p:nvSpPr>
+        <p:spPr>
+          <a:xfrm>
+            <a:off x="12706502" y="2798064"/>
+            <a:ext cx="219456" cy="295466"/>
+          </a:xfrm>
+          <a:prstGeom prst="rect">
+            <a:avLst/>
+          </a:prstGeom>
+          <a:noFill/>
+        </p:spPr>
+        <p:txBody>
+          <a:bodyPr wrap="square" lIns="0" tIns="0" rIns="0" bIns="0" anchor="t">
+            <a:spAutoFit/>
+          </a:bodyPr>
+          <a:lstStyle/>
+          <a:p>
+            <a:pPr algn="ctr"/>
+            <a:r>
+              <a:rPr sz="1920" b="1">
+                <a:solidFill>
+                  <a:srgbClr val="148943"/>
+                </a:solidFill>
+                <a:latin typeface="Aptos"/>
+              </a:rPr>
+              <a:t>1</a:t>
+            </a:r>
+          </a:p>
+        </p:txBody>
+      </p:sp>
+      <p:sp>
+        <p:nvSpPr>
+          <p:cNvPr id="110" name="TextBox 109"/>
+          <p:cNvSpPr txBox="1"/>
+          <p:nvPr/>
+        </p:nvSpPr>
+        <p:spPr>
+          <a:xfrm>
+            <a:off x="13035686" y="2830982"/>
+            <a:ext cx="954634" cy="453779"/>
+          </a:xfrm>
+          <a:prstGeom prst="rect">
+            <a:avLst/>
+          </a:prstGeom>
+          <a:noFill/>
+        </p:spPr>
+        <p:txBody>
+          <a:bodyPr wrap="square" lIns="0" tIns="0" rIns="0" bIns="0" anchor="t">
+            <a:spAutoFit/>
+          </a:bodyPr>
+          <a:lstStyle/>
+          <a:p>
+            <a:pPr algn="l"/>
+            <a:r>
+              <a:rPr sz="983" b="1">
+                <a:solidFill>
+                  <a:srgbClr val="148943"/>
+                </a:solidFill>
+                <a:latin typeface="Aptos"/>
+              </a:rPr>
+              <a:t>Foundation
+protects the base.</a:t>
+            </a:r>
+          </a:p>
+        </p:txBody>
+      </p:sp>
+      <p:sp>
+        <p:nvSpPr>
+          <p:cNvPr id="111" name="TextBox 110"/>
+          <p:cNvSpPr txBox="1"/>
+          <p:nvPr/>
+        </p:nvSpPr>
+        <p:spPr>
+          <a:xfrm>
+            <a:off x="13035686" y="3258922"/>
+            <a:ext cx="987552" cy="251094"/>
+          </a:xfrm>
+          <a:prstGeom prst="rect">
+            <a:avLst/>
+          </a:prstGeom>
+          <a:noFill/>
+        </p:spPr>
+        <p:txBody>
+          <a:bodyPr wrap="square" lIns="0" tIns="0" rIns="0" bIns="0" anchor="t">
+            <a:spAutoFit/>
+          </a:bodyPr>
+          <a:lstStyle/>
+          <a:p>
+            <a:pPr algn="l"/>
+            <a:r>
+              <a:rPr sz="816">
+                <a:solidFill>
+                  <a:srgbClr val="4D5054"/>
+                </a:solidFill>
+                <a:latin typeface="Aptos"/>
+              </a:rPr>
+              <a:t>Adds +23M (+7.0%)
+and prevents erosion.</a:t>
+            </a:r>
+          </a:p>
+        </p:txBody>
+      </p:sp>
+      <p:cxnSp>
+        <p:nvCxnSpPr>
+          <p:cNvPr id="112" name="Connector 111"/>
+          <p:cNvCxnSpPr/>
+          <p:nvPr/>
+        </p:nvCxnSpPr>
+        <p:spPr>
+          <a:xfrm>
+            <a:off x="12673584" y="3950207"/>
+            <a:ext cx="1349654" cy="0"/>
+          </a:xfrm>
+          <a:prstGeom prst="line">
+            <a:avLst/>
+          </a:prstGeom>
+          <a:ln w="8890">
+            <a:solidFill>
+              <a:srgbClr val="D9DDE2"/>
+            </a:solidFill>
+          </a:ln>
+        </p:spPr>
+        <p:style>
+          <a:lnRef idx="2">
+            <a:schemeClr val="accent1"/>
+          </a:lnRef>
+          <a:fillRef idx="0">
+            <a:schemeClr val="accent1"/>
+          </a:fillRef>
+          <a:effectRef idx="1">
+            <a:schemeClr val="accent1"/>
+          </a:effectRef>
+          <a:fontRef idx="minor">
+            <a:schemeClr val="tx1"/>
+          </a:fontRef>
+        </p:style>
+      </p:cxnSp>
+      <p:sp>
+        <p:nvSpPr>
+          <p:cNvPr id="113" name="TextBox 112"/>
+          <p:cNvSpPr txBox="1"/>
+          <p:nvPr/>
+        </p:nvSpPr>
+        <p:spPr>
+          <a:xfrm>
+            <a:off x="12706502" y="4037989"/>
+            <a:ext cx="219456" cy="295466"/>
+          </a:xfrm>
+          <a:prstGeom prst="rect">
+            <a:avLst/>
+          </a:prstGeom>
+          <a:noFill/>
+        </p:spPr>
+        <p:txBody>
+          <a:bodyPr wrap="square" lIns="0" tIns="0" rIns="0" bIns="0" anchor="t">
+            <a:spAutoFit/>
+          </a:bodyPr>
+          <a:lstStyle/>
+          <a:p>
+            <a:pPr algn="ctr"/>
+            <a:r>
+              <a:rPr sz="1920" b="1">
+                <a:solidFill>
+                  <a:srgbClr val="1C65D5"/>
+                </a:solidFill>
+                <a:latin typeface="Aptos"/>
+              </a:rPr>
+              <a:t>2</a:t>
+            </a:r>
+          </a:p>
+        </p:txBody>
+      </p:sp>
+      <p:sp>
+        <p:nvSpPr>
+          <p:cNvPr id="114" name="TextBox 113"/>
+          <p:cNvSpPr txBox="1"/>
+          <p:nvPr/>
+        </p:nvSpPr>
+        <p:spPr>
+          <a:xfrm>
+            <a:off x="13035686" y="4070908"/>
+            <a:ext cx="954634" cy="453779"/>
+          </a:xfrm>
+          <a:prstGeom prst="rect">
+            <a:avLst/>
+          </a:prstGeom>
+          <a:noFill/>
+        </p:spPr>
+        <p:txBody>
+          <a:bodyPr wrap="square" lIns="0" tIns="0" rIns="0" bIns="0" anchor="t">
+            <a:spAutoFit/>
+          </a:bodyPr>
+          <a:lstStyle/>
+          <a:p>
+            <a:pPr algn="l"/>
+            <a:r>
+              <a:rPr sz="983" b="1">
+                <a:solidFill>
+                  <a:srgbClr val="1C65D5"/>
+                </a:solidFill>
+                <a:latin typeface="Aptos"/>
+              </a:rPr>
+              <a:t>Commercial actions
+move growth.</a:t>
+            </a:r>
+          </a:p>
+        </p:txBody>
+      </p:sp>
+      <p:sp>
+        <p:nvSpPr>
+          <p:cNvPr id="115" name="TextBox 114"/>
+          <p:cNvSpPr txBox="1"/>
+          <p:nvPr/>
+        </p:nvSpPr>
+        <p:spPr>
+          <a:xfrm>
+            <a:off x="13035686" y="4498847"/>
+            <a:ext cx="987552" cy="376642"/>
+          </a:xfrm>
+          <a:prstGeom prst="rect">
+            <a:avLst/>
+          </a:prstGeom>
+          <a:noFill/>
+        </p:spPr>
+        <p:txBody>
+          <a:bodyPr wrap="square" lIns="0" tIns="0" rIns="0" bIns="0" anchor="t">
+            <a:spAutoFit/>
+          </a:bodyPr>
+          <a:lstStyle/>
+          <a:p>
+            <a:pPr algn="l"/>
+            <a:r>
+              <a:rPr sz="816">
+                <a:solidFill>
+                  <a:srgbClr val="4D5054"/>
+                </a:solidFill>
+                <a:latin typeface="Aptos"/>
+              </a:rPr>
+              <a:t>Delivers +35M
+(+10.6%) above the
+protected base.</a:t>
+            </a:r>
+          </a:p>
+        </p:txBody>
+      </p:sp>
+      <p:cxnSp>
+        <p:nvCxnSpPr>
+          <p:cNvPr id="116" name="Connector 115"/>
+          <p:cNvCxnSpPr/>
+          <p:nvPr/>
+        </p:nvCxnSpPr>
+        <p:spPr>
+          <a:xfrm>
+            <a:off x="12673584" y="5190134"/>
+            <a:ext cx="1349654" cy="0"/>
+          </a:xfrm>
+          <a:prstGeom prst="line">
+            <a:avLst/>
+          </a:prstGeom>
+          <a:ln w="8890">
+            <a:solidFill>
+              <a:srgbClr val="D9DDE2"/>
+            </a:solidFill>
+          </a:ln>
+        </p:spPr>
+        <p:style>
+          <a:lnRef idx="2">
+            <a:schemeClr val="accent1"/>
+          </a:lnRef>
+          <a:fillRef idx="0">
+            <a:schemeClr val="accent1"/>
+          </a:fillRef>
+          <a:effectRef idx="1">
+            <a:schemeClr val="accent1"/>
+          </a:effectRef>
+          <a:fontRef idx="minor">
+            <a:schemeClr val="tx1"/>
+          </a:fontRef>
+        </p:style>
+      </p:cxnSp>
+      <p:sp>
+        <p:nvSpPr>
+          <p:cNvPr id="117" name="TextBox 116"/>
+          <p:cNvSpPr txBox="1"/>
+          <p:nvPr/>
+        </p:nvSpPr>
+        <p:spPr>
+          <a:xfrm>
+            <a:off x="12706502" y="5277917"/>
+            <a:ext cx="219456" cy="295466"/>
+          </a:xfrm>
+          <a:prstGeom prst="rect">
+            <a:avLst/>
+          </a:prstGeom>
+          <a:noFill/>
+        </p:spPr>
+        <p:txBody>
+          <a:bodyPr wrap="square" lIns="0" tIns="0" rIns="0" bIns="0" anchor="t">
+            <a:spAutoFit/>
+          </a:bodyPr>
+          <a:lstStyle/>
+          <a:p>
+            <a:pPr algn="ctr"/>
+            <a:r>
+              <a:rPr sz="1920" b="1">
+                <a:solidFill>
+                  <a:srgbClr val="4D5054"/>
+                </a:solidFill>
+                <a:latin typeface="Aptos"/>
+              </a:rPr>
+              <a:t>3</a:t>
+            </a:r>
+          </a:p>
+        </p:txBody>
+      </p:sp>
+      <p:sp>
+        <p:nvSpPr>
+          <p:cNvPr id="118" name="TextBox 117"/>
+          <p:cNvSpPr txBox="1"/>
+          <p:nvPr/>
+        </p:nvSpPr>
+        <p:spPr>
+          <a:xfrm>
+            <a:off x="13035686" y="5310836"/>
+            <a:ext cx="954634" cy="302519"/>
+          </a:xfrm>
+          <a:prstGeom prst="rect">
+            <a:avLst/>
+          </a:prstGeom>
+          <a:noFill/>
+        </p:spPr>
+        <p:txBody>
+          <a:bodyPr wrap="square" lIns="0" tIns="0" rIns="0" bIns="0" anchor="t">
+            <a:spAutoFit/>
+          </a:bodyPr>
+          <a:lstStyle/>
+          <a:p>
+            <a:pPr algn="l"/>
+            <a:r>
+              <a:rPr sz="983" b="1">
+                <a:solidFill>
+                  <a:srgbClr val="4D5054"/>
+                </a:solidFill>
+                <a:latin typeface="Aptos"/>
+              </a:rPr>
+              <a:t>Data gaps
+remain visible.</a:t>
+            </a:r>
+          </a:p>
+        </p:txBody>
+      </p:sp>
+      <p:sp>
+        <p:nvSpPr>
+          <p:cNvPr id="119" name="TextBox 118"/>
+          <p:cNvSpPr txBox="1"/>
+          <p:nvPr/>
+        </p:nvSpPr>
+        <p:spPr>
+          <a:xfrm>
+            <a:off x="13035686" y="5738775"/>
+            <a:ext cx="987552" cy="502189"/>
+          </a:xfrm>
+          <a:prstGeom prst="rect">
+            <a:avLst/>
+          </a:prstGeom>
+          <a:noFill/>
+        </p:spPr>
+        <p:txBody>
+          <a:bodyPr wrap="square" lIns="0" tIns="0" rIns="0" bIns="0" anchor="t">
+            <a:spAutoFit/>
+          </a:bodyPr>
+          <a:lstStyle/>
+          <a:p>
+            <a:pPr algn="l"/>
+            <a:r>
+              <a:rPr sz="816">
+                <a:solidFill>
+                  <a:srgbClr val="4D5054"/>
+                </a:solidFill>
+                <a:latin typeface="Aptos"/>
+              </a:rPr>
+              <a:t>-4M (-1.2%) remains
+unmeasured; close with
+better data capture.</a:t>
+            </a:r>
+          </a:p>
+        </p:txBody>
+      </p:sp>
+      <p:sp>
+        <p:nvSpPr>
+          <p:cNvPr id="120" name="Rounded Rectangle 119"/>
+          <p:cNvSpPr/>
+          <p:nvPr/>
+        </p:nvSpPr>
+        <p:spPr>
+          <a:xfrm>
+            <a:off x="1887322" y="7132320"/>
+            <a:ext cx="2249423" cy="680314"/>
+          </a:xfrm>
+          <a:prstGeom prst="roundRect">
+            <a:avLst/>
+          </a:prstGeom>
+          <a:solidFill>
+            <a:srgbClr val="FFFFFF"/>
+          </a:solidFill>
+          <a:ln w="12700">
+            <a:solidFill>
+              <a:srgbClr val="D9DDE2"/>
+            </a:solidFill>
+          </a:ln>
+        </p:spPr>
+        <p:style>
+          <a:lnRef idx="1">
+            <a:schemeClr val="accent1"/>
+          </a:lnRef>
+          <a:fillRef idx="3">
+            <a:schemeClr val="accent1"/>
+          </a:fillRef>
+          <a:effectRef idx="2">
+            <a:schemeClr val="accent1"/>
+          </a:effectRef>
+          <a:fontRef idx="minor">
+            <a:schemeClr val="lt1"/>
+          </a:fontRef>
+        </p:style>
+        <p:txBody>
+          <a:bodyPr rtlCol="0" anchor="ctr"/>
+          <a:lstStyle/>
+          <a:p>
+            <a:pPr algn="ctr"/>
+            <a:endParaRPr sz="2160"/>
+          </a:p>
+        </p:txBody>
+      </p:sp>
+      <p:sp>
+        <p:nvSpPr>
+          <p:cNvPr id="121" name="TextBox 120"/>
+          <p:cNvSpPr txBox="1"/>
+          <p:nvPr/>
+        </p:nvSpPr>
+        <p:spPr>
+          <a:xfrm>
+            <a:off x="1920241" y="7231076"/>
+            <a:ext cx="2183586" cy="195759"/>
+          </a:xfrm>
+          <a:prstGeom prst="rect">
+            <a:avLst/>
+          </a:prstGeom>
+          <a:noFill/>
+        </p:spPr>
+        <p:txBody>
+          <a:bodyPr wrap="square" lIns="0" tIns="0" rIns="0" bIns="0" anchor="t">
+            <a:spAutoFit/>
+          </a:bodyPr>
+          <a:lstStyle/>
+          <a:p>
+            <a:pPr algn="ctr"/>
+            <a:r>
+              <a:rPr sz="1272" b="1">
+                <a:solidFill>
+                  <a:srgbClr val="148943"/>
+                </a:solidFill>
+                <a:latin typeface="Aptos"/>
+              </a:rPr>
+              <a:t>+23M (+7.0%)</a:t>
+            </a:r>
+          </a:p>
+        </p:txBody>
+      </p:sp>
+      <p:sp>
+        <p:nvSpPr>
+          <p:cNvPr id="122" name="TextBox 121"/>
+          <p:cNvSpPr txBox="1"/>
+          <p:nvPr/>
+        </p:nvSpPr>
+        <p:spPr>
+          <a:xfrm>
+            <a:off x="1920241" y="7472477"/>
+            <a:ext cx="2183586" cy="276999"/>
+          </a:xfrm>
+          <a:prstGeom prst="rect">
+            <a:avLst/>
+          </a:prstGeom>
+          <a:noFill/>
+        </p:spPr>
+        <p:txBody>
+          <a:bodyPr wrap="square" lIns="0" tIns="0" rIns="0" bIns="0" anchor="t">
+            <a:spAutoFit/>
+          </a:bodyPr>
+          <a:lstStyle/>
+          <a:p>
+            <a:pPr algn="ctr"/>
+            <a:r>
+              <a:rPr sz="900">
+                <a:solidFill>
+                  <a:srgbClr val="148943"/>
+                </a:solidFill>
+                <a:latin typeface="Aptos"/>
+              </a:rPr>
+              <a:t>Foundation / BAU
+Protects base / improves BAU</a:t>
+            </a:r>
+          </a:p>
+        </p:txBody>
+      </p:sp>
+      <p:sp>
+        <p:nvSpPr>
+          <p:cNvPr id="123" name="Rounded Rectangle 122"/>
+          <p:cNvSpPr/>
+          <p:nvPr/>
+        </p:nvSpPr>
+        <p:spPr>
+          <a:xfrm>
+            <a:off x="4136745" y="7132320"/>
+            <a:ext cx="2249423" cy="680314"/>
+          </a:xfrm>
+          <a:prstGeom prst="roundRect">
+            <a:avLst/>
+          </a:prstGeom>
+          <a:solidFill>
+            <a:srgbClr val="FFFFFF"/>
+          </a:solidFill>
+          <a:ln w="12700">
+            <a:solidFill>
+              <a:srgbClr val="D9DDE2"/>
+            </a:solidFill>
+          </a:ln>
+        </p:spPr>
+        <p:style>
+          <a:lnRef idx="1">
+            <a:schemeClr val="accent1"/>
+          </a:lnRef>
+          <a:fillRef idx="3">
+            <a:schemeClr val="accent1"/>
+          </a:fillRef>
+          <a:effectRef idx="2">
+            <a:schemeClr val="accent1"/>
+          </a:effectRef>
+          <a:fontRef idx="minor">
+            <a:schemeClr val="lt1"/>
+          </a:fontRef>
+        </p:style>
+        <p:txBody>
+          <a:bodyPr rtlCol="0" anchor="ctr"/>
+          <a:lstStyle/>
+          <a:p>
+            <a:pPr algn="ctr"/>
+            <a:endParaRPr sz="2160"/>
+          </a:p>
+        </p:txBody>
+      </p:sp>
+      <p:sp>
+        <p:nvSpPr>
+          <p:cNvPr id="124" name="TextBox 123"/>
+          <p:cNvSpPr txBox="1"/>
+          <p:nvPr/>
+        </p:nvSpPr>
+        <p:spPr>
+          <a:xfrm>
+            <a:off x="4169663" y="7231076"/>
+            <a:ext cx="2183586" cy="195759"/>
+          </a:xfrm>
+          <a:prstGeom prst="rect">
+            <a:avLst/>
+          </a:prstGeom>
+          <a:noFill/>
+        </p:spPr>
+        <p:txBody>
+          <a:bodyPr wrap="square" lIns="0" tIns="0" rIns="0" bIns="0" anchor="t">
+            <a:spAutoFit/>
+          </a:bodyPr>
+          <a:lstStyle/>
+          <a:p>
+            <a:pPr algn="ctr"/>
+            <a:r>
+              <a:rPr sz="1272" b="1">
+                <a:solidFill>
+                  <a:srgbClr val="EC5C17"/>
+                </a:solidFill>
+                <a:latin typeface="Aptos"/>
+              </a:rPr>
+              <a:t>-14M (-4.2%)</a:t>
+            </a:r>
+          </a:p>
+        </p:txBody>
+      </p:sp>
+      <p:sp>
+        <p:nvSpPr>
+          <p:cNvPr id="125" name="TextBox 124"/>
+          <p:cNvSpPr txBox="1"/>
+          <p:nvPr/>
+        </p:nvSpPr>
+        <p:spPr>
+          <a:xfrm>
+            <a:off x="4169663" y="7472477"/>
+            <a:ext cx="2183586" cy="276999"/>
+          </a:xfrm>
+          <a:prstGeom prst="rect">
+            <a:avLst/>
+          </a:prstGeom>
+          <a:noFill/>
+        </p:spPr>
+        <p:txBody>
+          <a:bodyPr wrap="square" lIns="0" tIns="0" rIns="0" bIns="0" anchor="t">
+            <a:spAutoFit/>
+          </a:bodyPr>
+          <a:lstStyle/>
+          <a:p>
+            <a:pPr algn="ctr"/>
+            <a:r>
+              <a:rPr sz="900">
+                <a:solidFill>
+                  <a:srgbClr val="EC5C17"/>
+                </a:solidFill>
+                <a:latin typeface="Aptos"/>
+              </a:rPr>
+              <a:t>External Context
+Headwinds</a:t>
+            </a:r>
+          </a:p>
+        </p:txBody>
+      </p:sp>
+      <p:sp>
+        <p:nvSpPr>
+          <p:cNvPr id="126" name="Rounded Rectangle 125"/>
+          <p:cNvSpPr/>
+          <p:nvPr/>
+        </p:nvSpPr>
+        <p:spPr>
+          <a:xfrm>
+            <a:off x="6386168" y="7132320"/>
+            <a:ext cx="2468880" cy="680314"/>
+          </a:xfrm>
+          <a:prstGeom prst="roundRect">
+            <a:avLst/>
+          </a:prstGeom>
+          <a:solidFill>
+            <a:srgbClr val="FFFFFF"/>
+          </a:solidFill>
+          <a:ln w="12700">
+            <a:solidFill>
+              <a:srgbClr val="D9DDE2"/>
+            </a:solidFill>
+          </a:ln>
+        </p:spPr>
+        <p:style>
+          <a:lnRef idx="1">
+            <a:schemeClr val="accent1"/>
+          </a:lnRef>
+          <a:fillRef idx="3">
+            <a:schemeClr val="accent1"/>
+          </a:fillRef>
+          <a:effectRef idx="2">
+            <a:schemeClr val="accent1"/>
+          </a:effectRef>
+          <a:fontRef idx="minor">
+            <a:schemeClr val="lt1"/>
+          </a:fontRef>
+        </p:style>
+        <p:txBody>
+          <a:bodyPr rtlCol="0" anchor="ctr"/>
+          <a:lstStyle/>
+          <a:p>
+            <a:pPr algn="ctr"/>
+            <a:endParaRPr sz="2160"/>
+          </a:p>
+        </p:txBody>
+      </p:sp>
+      <p:sp>
+        <p:nvSpPr>
+          <p:cNvPr id="127" name="TextBox 126"/>
+          <p:cNvSpPr txBox="1"/>
+          <p:nvPr/>
+        </p:nvSpPr>
+        <p:spPr>
+          <a:xfrm>
+            <a:off x="6419088" y="7231076"/>
+            <a:ext cx="2403043" cy="195759"/>
+          </a:xfrm>
+          <a:prstGeom prst="rect">
+            <a:avLst/>
+          </a:prstGeom>
+          <a:noFill/>
+        </p:spPr>
+        <p:txBody>
+          <a:bodyPr wrap="square" lIns="0" tIns="0" rIns="0" bIns="0" anchor="t">
+            <a:spAutoFit/>
+          </a:bodyPr>
+          <a:lstStyle/>
+          <a:p>
+            <a:pPr algn="ctr"/>
+            <a:r>
+              <a:rPr sz="1272" b="1">
+                <a:solidFill>
+                  <a:srgbClr val="1C65D5"/>
+                </a:solidFill>
+                <a:latin typeface="Aptos"/>
+              </a:rPr>
+              <a:t>+35M (+10.6%)</a:t>
+            </a:r>
+          </a:p>
+        </p:txBody>
+      </p:sp>
+      <p:sp>
+        <p:nvSpPr>
+          <p:cNvPr id="128" name="TextBox 127"/>
+          <p:cNvSpPr txBox="1"/>
+          <p:nvPr/>
+        </p:nvSpPr>
+        <p:spPr>
+          <a:xfrm>
+            <a:off x="6419088" y="7472477"/>
+            <a:ext cx="2403043" cy="276999"/>
+          </a:xfrm>
+          <a:prstGeom prst="rect">
+            <a:avLst/>
+          </a:prstGeom>
+          <a:noFill/>
+        </p:spPr>
+        <p:txBody>
+          <a:bodyPr wrap="square" lIns="0" tIns="0" rIns="0" bIns="0" anchor="t">
+            <a:spAutoFit/>
+          </a:bodyPr>
+          <a:lstStyle/>
+          <a:p>
+            <a:pPr algn="ctr"/>
+            <a:r>
+              <a:rPr sz="900">
+                <a:solidFill>
+                  <a:srgbClr val="1C65D5"/>
+                </a:solidFill>
+                <a:latin typeface="Aptos"/>
+              </a:rPr>
+              <a:t>Commercial Actions
+Drive Growth</a:t>
+            </a:r>
+          </a:p>
+        </p:txBody>
+      </p:sp>
+      <p:sp>
+        <p:nvSpPr>
+          <p:cNvPr id="129" name="Rounded Rectangle 128"/>
+          <p:cNvSpPr/>
+          <p:nvPr/>
+        </p:nvSpPr>
+        <p:spPr>
+          <a:xfrm>
+            <a:off x="8855050" y="7132320"/>
+            <a:ext cx="1898294" cy="680314"/>
+          </a:xfrm>
+          <a:prstGeom prst="roundRect">
+            <a:avLst/>
+          </a:prstGeom>
+          <a:solidFill>
+            <a:srgbClr val="FFFFFF"/>
+          </a:solidFill>
+          <a:ln w="12700">
+            <a:solidFill>
+              <a:srgbClr val="D9DDE2"/>
+            </a:solidFill>
+          </a:ln>
+        </p:spPr>
+        <p:style>
+          <a:lnRef idx="1">
+            <a:schemeClr val="accent1"/>
+          </a:lnRef>
+          <a:fillRef idx="3">
+            <a:schemeClr val="accent1"/>
+          </a:fillRef>
+          <a:effectRef idx="2">
+            <a:schemeClr val="accent1"/>
+          </a:effectRef>
+          <a:fontRef idx="minor">
+            <a:schemeClr val="lt1"/>
+          </a:fontRef>
+        </p:style>
+        <p:txBody>
+          <a:bodyPr rtlCol="0" anchor="ctr"/>
+          <a:lstStyle/>
+          <a:p>
+            <a:pPr algn="ctr"/>
+            <a:endParaRPr sz="2160"/>
+          </a:p>
+        </p:txBody>
+      </p:sp>
+      <p:sp>
+        <p:nvSpPr>
+          <p:cNvPr id="130" name="TextBox 129"/>
+          <p:cNvSpPr txBox="1"/>
+          <p:nvPr/>
+        </p:nvSpPr>
+        <p:spPr>
+          <a:xfrm>
+            <a:off x="8887968" y="7231076"/>
+            <a:ext cx="1832458" cy="195759"/>
+          </a:xfrm>
+          <a:prstGeom prst="rect">
+            <a:avLst/>
+          </a:prstGeom>
+          <a:noFill/>
+        </p:spPr>
+        <p:txBody>
+          <a:bodyPr wrap="square" lIns="0" tIns="0" rIns="0" bIns="0" anchor="t">
+            <a:spAutoFit/>
+          </a:bodyPr>
+          <a:lstStyle/>
+          <a:p>
+            <a:pPr algn="ctr"/>
+            <a:r>
+              <a:rPr sz="1272" b="1">
+                <a:solidFill>
+                  <a:srgbClr val="4D5054"/>
+                </a:solidFill>
+                <a:latin typeface="Aptos"/>
+              </a:rPr>
+              <a:t>-4M (-1.2%)</a:t>
+            </a:r>
+          </a:p>
+        </p:txBody>
+      </p:sp>
+      <p:sp>
+        <p:nvSpPr>
+          <p:cNvPr id="131" name="TextBox 130"/>
+          <p:cNvSpPr txBox="1"/>
+          <p:nvPr/>
+        </p:nvSpPr>
+        <p:spPr>
+          <a:xfrm>
+            <a:off x="8887968" y="7472477"/>
+            <a:ext cx="1832458" cy="276999"/>
+          </a:xfrm>
+          <a:prstGeom prst="rect">
+            <a:avLst/>
+          </a:prstGeom>
+          <a:noFill/>
+        </p:spPr>
+        <p:txBody>
+          <a:bodyPr wrap="square" lIns="0" tIns="0" rIns="0" bIns="0" anchor="t">
+            <a:spAutoFit/>
+          </a:bodyPr>
+          <a:lstStyle/>
+          <a:p>
+            <a:pPr algn="ctr"/>
+            <a:r>
+              <a:rPr sz="900">
+                <a:solidFill>
+                  <a:srgbClr val="4D5054"/>
+                </a:solidFill>
+                <a:latin typeface="Aptos"/>
+              </a:rPr>
+              <a:t>Gap / Residual
+Unmeasured</a:t>
+            </a:r>
+          </a:p>
+        </p:txBody>
+      </p:sp>
+      <p:sp>
+        <p:nvSpPr>
+          <p:cNvPr id="132" name="Rounded Rectangle 131"/>
+          <p:cNvSpPr/>
+          <p:nvPr/>
+        </p:nvSpPr>
+        <p:spPr>
+          <a:xfrm>
+            <a:off x="10753344" y="7132320"/>
+            <a:ext cx="1975104" cy="680314"/>
+          </a:xfrm>
+          <a:prstGeom prst="roundRect">
+            <a:avLst/>
+          </a:prstGeom>
+          <a:solidFill>
+            <a:srgbClr val="081B49"/>
+          </a:solidFill>
+          <a:ln>
+            <a:noFill/>
+          </a:ln>
+        </p:spPr>
+        <p:style>
+          <a:lnRef idx="1">
+            <a:schemeClr val="accent1"/>
+          </a:lnRef>
+          <a:fillRef idx="3">
+            <a:schemeClr val="accent1"/>
+          </a:fillRef>
+          <a:effectRef idx="2">
+            <a:schemeClr val="accent1"/>
+          </a:effectRef>
+          <a:fontRef idx="minor">
+            <a:schemeClr val="lt1"/>
+          </a:fontRef>
+        </p:style>
+        <p:txBody>
+          <a:bodyPr rtlCol="0" anchor="ctr"/>
+          <a:lstStyle/>
+          <a:p>
+            <a:pPr algn="ctr"/>
+            <a:endParaRPr sz="2160"/>
+          </a:p>
+        </p:txBody>
+      </p:sp>
+      <p:sp>
+        <p:nvSpPr>
+          <p:cNvPr id="133" name="TextBox 132"/>
+          <p:cNvSpPr txBox="1"/>
+          <p:nvPr/>
+        </p:nvSpPr>
+        <p:spPr>
+          <a:xfrm>
+            <a:off x="10786263" y="7231076"/>
+            <a:ext cx="1909267" cy="195759"/>
+          </a:xfrm>
+          <a:prstGeom prst="rect">
+            <a:avLst/>
+          </a:prstGeom>
+          <a:noFill/>
+        </p:spPr>
+        <p:txBody>
+          <a:bodyPr wrap="square" lIns="0" tIns="0" rIns="0" bIns="0" anchor="t">
+            <a:spAutoFit/>
+          </a:bodyPr>
+          <a:lstStyle/>
+          <a:p>
+            <a:pPr algn="ctr"/>
+            <a:r>
+              <a:rPr sz="1272" b="1">
+                <a:solidFill>
+                  <a:srgbClr val="FFFFFF"/>
+                </a:solidFill>
+                <a:latin typeface="Aptos"/>
+              </a:rPr>
+              <a:t>+20M (+6.1%)</a:t>
+            </a:r>
+          </a:p>
+        </p:txBody>
+      </p:sp>
+      <p:sp>
+        <p:nvSpPr>
+          <p:cNvPr id="134" name="TextBox 133"/>
+          <p:cNvSpPr txBox="1"/>
+          <p:nvPr/>
+        </p:nvSpPr>
+        <p:spPr>
+          <a:xfrm>
+            <a:off x="10786263" y="7472477"/>
+            <a:ext cx="1909267" cy="276999"/>
+          </a:xfrm>
+          <a:prstGeom prst="rect">
+            <a:avLst/>
+          </a:prstGeom>
+          <a:noFill/>
+        </p:spPr>
+        <p:txBody>
+          <a:bodyPr wrap="square" lIns="0" tIns="0" rIns="0" bIns="0" anchor="t">
+            <a:spAutoFit/>
+          </a:bodyPr>
+          <a:lstStyle/>
+          <a:p>
+            <a:pPr algn="ctr"/>
+            <a:r>
+              <a:rPr sz="900">
+                <a:solidFill>
+                  <a:srgbClr val="FFFFFF"/>
+                </a:solidFill>
+                <a:latin typeface="Aptos"/>
+              </a:rPr>
+              <a:t>Net Change
+vs. 2024 Actual</a:t>
+            </a:r>
+          </a:p>
+        </p:txBody>
+      </p:sp>
+      <p:sp>
+        <p:nvSpPr>
+          <p:cNvPr id="135" name="TextBox 134"/>
+          <p:cNvSpPr txBox="1"/>
+          <p:nvPr/>
+        </p:nvSpPr>
+        <p:spPr>
+          <a:xfrm>
+            <a:off x="274320" y="7878471"/>
+            <a:ext cx="8339328" cy="164353"/>
+          </a:xfrm>
+          <a:prstGeom prst="rect">
+            <a:avLst/>
+          </a:prstGeom>
+          <a:noFill/>
+        </p:spPr>
+        <p:txBody>
+          <a:bodyPr wrap="square" lIns="21946" tIns="21946" rIns="21946" bIns="21946" anchor="t">
+            <a:spAutoFit/>
+          </a:bodyPr>
+          <a:lstStyle/>
+          <a:p>
+            <a:pPr algn="l"/>
+            <a:r>
+              <a:rPr sz="780">
+                <a:solidFill>
+                  <a:srgbClr val="4D5054"/>
+                </a:solidFill>
+                <a:latin typeface="Aptos"/>
+              </a:rPr>
+              <a:t>Note: Percentages shown vs. 2024 Actual GC (330M). Numbers may not sum due to rounding.</a:t>
             </a:r>
           </a:p>
         </p:txBody>
